--- a/lessons/lesson-09/slides.pptx
+++ b/lessons/lesson-09/slides.pptx
@@ -2,32 +2,32 @@
 <file path=ppt/presentation.xml><?xml version="1.0" encoding="utf-8"?>
 <p:presentation xmlns:p="http://schemas.openxmlformats.org/presentationml/2006/main">
   <p:sldMasterIdLst>
-    <p:sldMasterId xmlns:r="http://schemas.openxmlformats.org/officeDocument/2006/relationships" id="2147483648" r:id="R1b8262c1066b4b23"/>
+    <p:sldMasterId xmlns:r="http://schemas.openxmlformats.org/officeDocument/2006/relationships" id="2147483648" r:id="R09682036dab449c8"/>
   </p:sldMasterIdLst>
   <p:notesMasterIdLst>
-    <p:notesMasterId xmlns:r="http://schemas.openxmlformats.org/officeDocument/2006/relationships" r:id="R018dfb3b4bdd49fd"/>
+    <p:notesMasterId xmlns:r="http://schemas.openxmlformats.org/officeDocument/2006/relationships" r:id="Ra9650c0613c444f0"/>
   </p:notesMasterIdLst>
   <p:sldIdLst>
-    <p:sldId xmlns:r="http://schemas.openxmlformats.org/officeDocument/2006/relationships" id="256" r:id="Rbd61a9d5ec5948a1"/>
-    <p:sldId xmlns:r="http://schemas.openxmlformats.org/officeDocument/2006/relationships" id="257" r:id="R2a7ac120d18d4197"/>
-    <p:sldId xmlns:r="http://schemas.openxmlformats.org/officeDocument/2006/relationships" id="258" r:id="R86a442a670e84c95"/>
-    <p:sldId xmlns:r="http://schemas.openxmlformats.org/officeDocument/2006/relationships" id="259" r:id="R95a566ea17b4495e"/>
-    <p:sldId xmlns:r="http://schemas.openxmlformats.org/officeDocument/2006/relationships" id="260" r:id="R066702982680484b"/>
-    <p:sldId xmlns:r="http://schemas.openxmlformats.org/officeDocument/2006/relationships" id="261" r:id="R9cecf2647a4f43f0"/>
-    <p:sldId xmlns:r="http://schemas.openxmlformats.org/officeDocument/2006/relationships" id="262" r:id="Rab91cee0814e40a3"/>
-    <p:sldId xmlns:r="http://schemas.openxmlformats.org/officeDocument/2006/relationships" id="263" r:id="Rc9db7136f1ec4cfb"/>
-    <p:sldId xmlns:r="http://schemas.openxmlformats.org/officeDocument/2006/relationships" id="264" r:id="R992a091be1c34576"/>
-    <p:sldId xmlns:r="http://schemas.openxmlformats.org/officeDocument/2006/relationships" id="265" r:id="Rde8dea8c413648b7"/>
-    <p:sldId xmlns:r="http://schemas.openxmlformats.org/officeDocument/2006/relationships" id="266" r:id="R50a182b695ab4686"/>
-    <p:sldId xmlns:r="http://schemas.openxmlformats.org/officeDocument/2006/relationships" id="267" r:id="Rad8fb1fd1452462e"/>
-    <p:sldId xmlns:r="http://schemas.openxmlformats.org/officeDocument/2006/relationships" id="268" r:id="R9cc274dfc23549a2"/>
-    <p:sldId xmlns:r="http://schemas.openxmlformats.org/officeDocument/2006/relationships" id="269" r:id="R0d4c221022094bfc"/>
-    <p:sldId xmlns:r="http://schemas.openxmlformats.org/officeDocument/2006/relationships" id="270" r:id="R20da18d0fe5145ac"/>
-    <p:sldId xmlns:r="http://schemas.openxmlformats.org/officeDocument/2006/relationships" id="271" r:id="Ra67fd41c5fa940a4"/>
-    <p:sldId xmlns:r="http://schemas.openxmlformats.org/officeDocument/2006/relationships" id="272" r:id="R4a19ad1ae729447b"/>
-    <p:sldId xmlns:r="http://schemas.openxmlformats.org/officeDocument/2006/relationships" id="273" r:id="R4edd06f0a0734472"/>
-    <p:sldId xmlns:r="http://schemas.openxmlformats.org/officeDocument/2006/relationships" id="274" r:id="Re90c380dbef448dd"/>
-    <p:sldId xmlns:r="http://schemas.openxmlformats.org/officeDocument/2006/relationships" id="275" r:id="R6630d9d75fd14e40"/>
+    <p:sldId xmlns:r="http://schemas.openxmlformats.org/officeDocument/2006/relationships" id="256" r:id="R158db47936804db4"/>
+    <p:sldId xmlns:r="http://schemas.openxmlformats.org/officeDocument/2006/relationships" id="257" r:id="R8d0239400f174fdb"/>
+    <p:sldId xmlns:r="http://schemas.openxmlformats.org/officeDocument/2006/relationships" id="258" r:id="R93980e396b544f56"/>
+    <p:sldId xmlns:r="http://schemas.openxmlformats.org/officeDocument/2006/relationships" id="259" r:id="Re1c714e770204b17"/>
+    <p:sldId xmlns:r="http://schemas.openxmlformats.org/officeDocument/2006/relationships" id="260" r:id="Refb9204506c9408a"/>
+    <p:sldId xmlns:r="http://schemas.openxmlformats.org/officeDocument/2006/relationships" id="261" r:id="Recb7562a25e2421c"/>
+    <p:sldId xmlns:r="http://schemas.openxmlformats.org/officeDocument/2006/relationships" id="262" r:id="R9cd6ac006e004aa3"/>
+    <p:sldId xmlns:r="http://schemas.openxmlformats.org/officeDocument/2006/relationships" id="263" r:id="R5e8e430b89724d3a"/>
+    <p:sldId xmlns:r="http://schemas.openxmlformats.org/officeDocument/2006/relationships" id="264" r:id="R3b78e5620ca34f2f"/>
+    <p:sldId xmlns:r="http://schemas.openxmlformats.org/officeDocument/2006/relationships" id="265" r:id="R459b4f3eb6bc4e34"/>
+    <p:sldId xmlns:r="http://schemas.openxmlformats.org/officeDocument/2006/relationships" id="266" r:id="R019bc02ef23e4ee8"/>
+    <p:sldId xmlns:r="http://schemas.openxmlformats.org/officeDocument/2006/relationships" id="267" r:id="R40791c4de86c4142"/>
+    <p:sldId xmlns:r="http://schemas.openxmlformats.org/officeDocument/2006/relationships" id="268" r:id="Rd45116cf5f7a447f"/>
+    <p:sldId xmlns:r="http://schemas.openxmlformats.org/officeDocument/2006/relationships" id="269" r:id="R1161973d044e4b7b"/>
+    <p:sldId xmlns:r="http://schemas.openxmlformats.org/officeDocument/2006/relationships" id="270" r:id="R7e717a62c6fe4cb4"/>
+    <p:sldId xmlns:r="http://schemas.openxmlformats.org/officeDocument/2006/relationships" id="271" r:id="R0cfa5092a9df4a5e"/>
+    <p:sldId xmlns:r="http://schemas.openxmlformats.org/officeDocument/2006/relationships" id="272" r:id="Rab10df556b9548dd"/>
+    <p:sldId xmlns:r="http://schemas.openxmlformats.org/officeDocument/2006/relationships" id="273" r:id="R7de4ada7268341be"/>
+    <p:sldId xmlns:r="http://schemas.openxmlformats.org/officeDocument/2006/relationships" id="274" r:id="R330e48dccca240d6"/>
+    <p:sldId xmlns:r="http://schemas.openxmlformats.org/officeDocument/2006/relationships" id="275" r:id="Rf6e2f9357fb843ca"/>
   </p:sldIdLst>
   <p:sldSz cx="12192000" cy="6858000"/>
   <p:notesSz cx="6858000" cy="9144000"/>
@@ -507,7 +507,7 @@
           <a:lstStyle xmlns:a="http://schemas.openxmlformats.org/drawingml/2006/main"/>
           <a:p xmlns:a="http://schemas.openxmlformats.org/drawingml/2006/main">
             <a:r>
-              <a:t>请学生把自己的指标写成一个可重算的操作定义。</a:t>
+              <a:t>页内指标数值是虚构教学规格，只演示可重算操作定义。</a:t>
             </a:r>
           </a:p>
           <a:p xmlns:a="http://schemas.openxmlformats.org/drawingml/2006/main">
@@ -518,6 +518,11 @@
           <a:p xmlns:a="http://schemas.openxmlformats.org/drawingml/2006/main">
             <a:r>
               <a:t>[Sources]</a:t>
+            </a:r>
+          </a:p>
+          <a:p xmlns:a="http://schemas.openxmlformats.org/drawingml/2006/main">
+            <a:r>
+              <a:t>- Teaching artifact; fictional values, not empirical evidence.</a:t>
             </a:r>
           </a:p>
           <a:p xmlns:a="http://schemas.openxmlformats.org/drawingml/2006/main">
@@ -602,7 +607,7 @@
           <a:lstStyle xmlns:a="http://schemas.openxmlformats.org/drawingml/2006/main"/>
           <a:p xmlns:a="http://schemas.openxmlformats.org/drawingml/2006/main">
             <a:r>
-              <a:t>让学生对照六类标注自己的复现说明缺哪一类。</a:t>
+              <a:t>现场运行课次本地工件并核对规格、配置、输入、结果与日志。工件真实可运行，输入为合成数据，不构成实证研究结果。</a:t>
             </a:r>
           </a:p>
           <a:p xmlns:a="http://schemas.openxmlformats.org/drawingml/2006/main">
@@ -618,6 +623,26 @@
           <a:p xmlns:a="http://schemas.openxmlformats.org/drawingml/2006/main">
             <a:r>
               <a:t>- Sandve et al. (2013). Ten Simple Rules for Reproducible Computational Research. DOI: 10.1371/journal.pcbi.1003285</a:t>
+            </a:r>
+          </a:p>
+          <a:p xmlns:a="http://schemas.openxmlformats.org/drawingml/2006/main">
+            <a:r>
+              <a:t>- /Users/bright/Projects/courses/graduate/lessons/lesson-09/assets/reproducibility-example/experiment-spec.md</a:t>
+            </a:r>
+          </a:p>
+          <a:p xmlns:a="http://schemas.openxmlformats.org/drawingml/2006/main">
+            <a:r>
+              <a:t>- /Users/bright/Projects/courses/graduate/lessons/lesson-09/assets/reproducibility-example/config.json</a:t>
+            </a:r>
+          </a:p>
+          <a:p xmlns:a="http://schemas.openxmlformats.org/drawingml/2006/main">
+            <a:r>
+              <a:t>- /Users/bright/Projects/courses/graduate/lessons/lesson-09/assets/reproducibility-example/run.py</a:t>
+            </a:r>
+          </a:p>
+          <a:p xmlns:a="http://schemas.openxmlformats.org/drawingml/2006/main">
+            <a:r>
+              <a:t>- /Users/bright/Projects/courses/graduate/lessons/lesson-09/assets/reproducibility-example/run-log.jsonl</a:t>
             </a:r>
           </a:p>
           <a:p xmlns:a="http://schemas.openxmlformats.org/drawingml/2006/main">
@@ -697,7 +722,7 @@
           <a:lstStyle xmlns:a="http://schemas.openxmlformats.org/drawingml/2006/main"/>
           <a:p xmlns:a="http://schemas.openxmlformats.org/drawingml/2006/main">
             <a:r>
-              <a:t>检查学生的关键比较运行次数和标准差记录。</a:t>
+              <a:t>课程不设统一重复次数硬门；检查重复计划是否足以支持主张。</a:t>
             </a:r>
           </a:p>
           <a:p xmlns:a="http://schemas.openxmlformats.org/drawingml/2006/main">
@@ -887,7 +912,7 @@
           <a:lstStyle xmlns:a="http://schemas.openxmlformats.org/drawingml/2006/main"/>
           <a:p xmlns:a="http://schemas.openxmlformats.org/drawingml/2006/main">
             <a:r>
-              <a:t>40 分钟开始个人补全段；先对照迁移表标记已搬与未搬字段。</a:t>
+              <a:t>36:00–37:20 作为迁移快速参考；不侵占 40–60 分钟持续实践。</a:t>
             </a:r>
           </a:p>
           <a:p xmlns:a="http://schemas.openxmlformats.org/drawingml/2006/main">
@@ -1087,7 +1112,7 @@
           <a:lstStyle xmlns:a="http://schemas.openxmlformats.org/drawingml/2006/main"/>
           <a:p xmlns:a="http://schemas.openxmlformats.org/drawingml/2006/main">
             <a:r>
-              <a:t>演示如何把第 8 课反馈转成 J2 和可检查的处理记录。</a:t>
+              <a:t>J2 和三条反馈均为虚构教学工件，只演示决策记录写法。</a:t>
             </a:r>
           </a:p>
           <a:p xmlns:a="http://schemas.openxmlformats.org/drawingml/2006/main">
@@ -1098,6 +1123,11 @@
           <a:p xmlns:a="http://schemas.openxmlformats.org/drawingml/2006/main">
             <a:r>
               <a:t>[Sources]</a:t>
+            </a:r>
+          </a:p>
+          <a:p xmlns:a="http://schemas.openxmlformats.org/drawingml/2006/main">
+            <a:r>
+              <a:t>- Teaching artifact; fictional judgment and feedback, not empirical evidence.</a:t>
             </a:r>
           </a:p>
           <a:p xmlns:a="http://schemas.openxmlformats.org/drawingml/2006/main">
@@ -1782,7 +1812,7 @@
           <a:lstStyle xmlns:a="http://schemas.openxmlformats.org/drawingml/2006/main"/>
           <a:p xmlns:a="http://schemas.openxmlformats.org/drawingml/2006/main">
             <a:r>
-              <a:t>让学生先判断自己的 baseline 属于哪一类；没有者沿用贯穿案例。</a:t>
+              <a:t>三个 baseline 仅为虚构教学例，用于区分类型，不声称已运行。</a:t>
             </a:r>
           </a:p>
           <a:p xmlns:a="http://schemas.openxmlformats.org/drawingml/2006/main">
@@ -1793,6 +1823,11 @@
           <a:p xmlns:a="http://schemas.openxmlformats.org/drawingml/2006/main">
             <a:r>
               <a:t>[Sources]</a:t>
+            </a:r>
+          </a:p>
+          <a:p xmlns:a="http://schemas.openxmlformats.org/drawingml/2006/main">
+            <a:r>
+              <a:t>- Teaching artifact; fictional examples, not empirical evidence.</a:t>
             </a:r>
           </a:p>
           <a:p xmlns:a="http://schemas.openxmlformats.org/drawingml/2006/main">
@@ -2172,7 +2207,7 @@
           <a:lstStyle xmlns:a="http://schemas.openxmlformats.org/drawingml/2006/main"/>
           <a:p xmlns:a="http://schemas.openxmlformats.org/drawingml/2006/main">
             <a:r>
-              <a:t>请学生在自己的草图上标出七字段已填与缺失项。</a:t>
+              <a:t>页内数值是虚构教学规格，只演示七字段写法；请学生标出自己草图的缺失项。</a:t>
             </a:r>
           </a:p>
           <a:p xmlns:a="http://schemas.openxmlformats.org/drawingml/2006/main">
@@ -2183,6 +2218,11 @@
           <a:p xmlns:a="http://schemas.openxmlformats.org/drawingml/2006/main">
             <a:r>
               <a:t>[Sources]</a:t>
+            </a:r>
+          </a:p>
+          <a:p xmlns:a="http://schemas.openxmlformats.org/drawingml/2006/main">
+            <a:r>
+              <a:t>- Teaching artifact; fictional values, not empirical evidence.</a:t>
             </a:r>
           </a:p>
           <a:p xmlns:a="http://schemas.openxmlformats.org/drawingml/2006/main">
@@ -2272,7 +2312,7 @@
           <a:lstStyle xmlns:a="http://schemas.openxmlformats.org/drawingml/2006/main"/>
           <a:p xmlns:a="http://schemas.openxmlformats.org/drawingml/2006/main">
             <a:r>
-              <a:t>要求学生写自己的停止条件与至少三种失败预案。</a:t>
+              <a:t>页内停止条件和失败路径是虚构教学规格。学生只需为当前最大风险写一条直接对应的可执行预案。</a:t>
             </a:r>
           </a:p>
           <a:p xmlns:a="http://schemas.openxmlformats.org/drawingml/2006/main">
@@ -2283,6 +2323,11 @@
           <a:p xmlns:a="http://schemas.openxmlformats.org/drawingml/2006/main">
             <a:r>
               <a:t>[Sources]</a:t>
+            </a:r>
+          </a:p>
+          <a:p xmlns:a="http://schemas.openxmlformats.org/drawingml/2006/main">
+            <a:r>
+              <a:t>- Teaching artifact; fictional values, not empirical evidence.</a:t>
             </a:r>
           </a:p>
           <a:p xmlns:a="http://schemas.openxmlformats.org/drawingml/2006/main">
@@ -2348,7 +2393,7 @@
           <p:nvPr/>
         </p:nvPicPr>
         <p:blipFill>
-          <a:blip xmlns:r="http://schemas.openxmlformats.org/officeDocument/2006/relationships" xmlns:a="http://schemas.openxmlformats.org/drawingml/2006/main" r:embed="R09b3e1f5dc4c4248">
+          <a:blip xmlns:r="http://schemas.openxmlformats.org/officeDocument/2006/relationships" xmlns:a="http://schemas.openxmlformats.org/drawingml/2006/main" r:embed="R4e0fff5735194c9d">
             <a:duotone>
               <a:prstClr val="black"/>
               <a:schemeClr val="accent1">
@@ -2526,7 +2571,7 @@
           <p:nvPr/>
         </p:nvPicPr>
         <p:blipFill rotWithShape="1">
-          <a:blip xmlns:r="http://schemas.openxmlformats.org/officeDocument/2006/relationships" xmlns:a="http://schemas.openxmlformats.org/drawingml/2006/main" r:embed="R2f819cbcc5b14950"/>
+          <a:blip xmlns:r="http://schemas.openxmlformats.org/officeDocument/2006/relationships" xmlns:a="http://schemas.openxmlformats.org/drawingml/2006/main" r:embed="R64e8248cdc43438c"/>
           <a:srcRect xmlns:a="http://schemas.openxmlformats.org/drawingml/2006/main" l="74359" t="0" r="1346" b="0"/>
           <a:stretch xmlns:a="http://schemas.openxmlformats.org/drawingml/2006/main"/>
         </p:blipFill>
@@ -2549,7 +2594,7 @@
           <p:nvPr/>
         </p:nvPicPr>
         <p:blipFill rotWithShape="1">
-          <a:blip xmlns:r="http://schemas.openxmlformats.org/officeDocument/2006/relationships" xmlns:a="http://schemas.openxmlformats.org/drawingml/2006/main" r:embed="R9b99bbfeafeb47aa">
+          <a:blip xmlns:r="http://schemas.openxmlformats.org/officeDocument/2006/relationships" xmlns:a="http://schemas.openxmlformats.org/drawingml/2006/main" r:embed="R4444395036024068">
             <a:alphaModFix amt="35000"/>
           </a:blip>
           <a:srcRect xmlns:a="http://schemas.openxmlformats.org/drawingml/2006/main" l="0" t="9831" r="0" b="36385"/>
@@ -2811,7 +2856,7 @@
           <p:nvPr/>
         </p:nvPicPr>
         <p:blipFill>
-          <a:blip xmlns:r="http://schemas.openxmlformats.org/officeDocument/2006/relationships" xmlns:a="http://schemas.openxmlformats.org/drawingml/2006/main" r:embed="R0f299f2fc3c6465d"/>
+          <a:blip xmlns:r="http://schemas.openxmlformats.org/officeDocument/2006/relationships" xmlns:a="http://schemas.openxmlformats.org/drawingml/2006/main" r:embed="R59406d894d894437"/>
           <a:srcRect xmlns:a="http://schemas.openxmlformats.org/drawingml/2006/main" l="0" t="0" r="54251" b="0"/>
           <a:stretch xmlns:a="http://schemas.openxmlformats.org/drawingml/2006/main"/>
         </p:blipFill>
@@ -3068,7 +3113,7 @@
           <p:nvPr/>
         </p:nvPicPr>
         <p:blipFill rotWithShape="1">
-          <a:blip xmlns:r="http://schemas.openxmlformats.org/officeDocument/2006/relationships" xmlns:a="http://schemas.openxmlformats.org/drawingml/2006/main" r:embed="R507875f3b0674a85"/>
+          <a:blip xmlns:r="http://schemas.openxmlformats.org/officeDocument/2006/relationships" xmlns:a="http://schemas.openxmlformats.org/drawingml/2006/main" r:embed="R6077a0d5ddd846e2"/>
           <a:srcRect xmlns:a="http://schemas.openxmlformats.org/drawingml/2006/main" l="0" t="0" r="1346" b="0"/>
           <a:stretch xmlns:a="http://schemas.openxmlformats.org/drawingml/2006/main"/>
         </p:blipFill>
@@ -3251,7 +3296,7 @@
           <p:nvPr/>
         </p:nvPicPr>
         <p:blipFill>
-          <a:blip xmlns:r="http://schemas.openxmlformats.org/officeDocument/2006/relationships" xmlns:a="http://schemas.openxmlformats.org/drawingml/2006/main" r:embed="R0e09ef031473464b"/>
+          <a:blip xmlns:r="http://schemas.openxmlformats.org/officeDocument/2006/relationships" xmlns:a="http://schemas.openxmlformats.org/drawingml/2006/main" r:embed="R9d737ee0da6c41b4"/>
           <a:stretch xmlns:a="http://schemas.openxmlformats.org/drawingml/2006/main">
             <a:fillRect l="0" t="0" r="0" b="0"/>
           </a:stretch>
@@ -3347,7 +3392,7 @@
           <p:nvPr/>
         </p:nvPicPr>
         <p:blipFill>
-          <a:blip xmlns:r="http://schemas.openxmlformats.org/officeDocument/2006/relationships" xmlns:a="http://schemas.openxmlformats.org/drawingml/2006/main" r:embed="R0237d69c59ac4446">
+          <a:blip xmlns:r="http://schemas.openxmlformats.org/officeDocument/2006/relationships" xmlns:a="http://schemas.openxmlformats.org/drawingml/2006/main" r:embed="R5774b424a07c46fb">
             <a:duotone>
               <a:prstClr val="black"/>
               <a:schemeClr val="accent1">
@@ -3514,7 +3559,7 @@
           <p:nvPr/>
         </p:nvPicPr>
         <p:blipFill rotWithShape="1">
-          <a:blip xmlns:r="http://schemas.openxmlformats.org/officeDocument/2006/relationships" xmlns:a="http://schemas.openxmlformats.org/drawingml/2006/main" r:embed="Re7ca7b706e6b4035">
+          <a:blip xmlns:r="http://schemas.openxmlformats.org/officeDocument/2006/relationships" xmlns:a="http://schemas.openxmlformats.org/drawingml/2006/main" r:embed="R019bbbd9ece2450c">
             <a:alphaModFix amt="20000"/>
             <a:duotone>
               <a:schemeClr val="accent4">
@@ -3612,10 +3657,10 @@
   </p:cSld>
   <p:clrMap bg1="lt1" tx1="dk1" bg2="lt2" tx2="dk2" accent1="accent1" accent2="accent2" accent3="accent3" accent4="accent4" accent5="accent5" accent6="accent6" hlink="hlink" folHlink="folHlink"/>
   <p:sldLayoutIdLst>
-    <p:sldLayoutId xmlns:r="http://schemas.openxmlformats.org/officeDocument/2006/relationships" id="2147483649" r:id="R86560956852a4fd4"/>
-    <p:sldLayoutId xmlns:r="http://schemas.openxmlformats.org/officeDocument/2006/relationships" id="2147483650" r:id="Rd5775811abd54495"/>
-    <p:sldLayoutId xmlns:r="http://schemas.openxmlformats.org/officeDocument/2006/relationships" id="2147483651" r:id="Rf35a47168ce24fc5"/>
-    <p:sldLayoutId xmlns:r="http://schemas.openxmlformats.org/officeDocument/2006/relationships" id="2147483652" r:id="R6831f833e91c4a4a"/>
+    <p:sldLayoutId xmlns:r="http://schemas.openxmlformats.org/officeDocument/2006/relationships" id="2147483649" r:id="R64bb2e450bc4457d"/>
+    <p:sldLayoutId xmlns:r="http://schemas.openxmlformats.org/officeDocument/2006/relationships" id="2147483650" r:id="Rae941e7c87de43de"/>
+    <p:sldLayoutId xmlns:r="http://schemas.openxmlformats.org/officeDocument/2006/relationships" id="2147483651" r:id="R57c8105c8c28451b"/>
+    <p:sldLayoutId xmlns:r="http://schemas.openxmlformats.org/officeDocument/2006/relationships" id="2147483652" r:id="R9b1c174a68804c95"/>
   </p:sldLayoutIdLst>
   <p:hf hdr="0" ftr="0" dt="0"/>
   <p:txStyles>
@@ -4416,7 +4461,7 @@
           <p:cNvPr id="6" name="p10-l-0">
             <a:extLst xmlns:a="http://schemas.openxmlformats.org/drawingml/2006/main">
               <a:ext uri="{FF2B5EF4-FFF2-40B4-BE49-F238E27FC236}">
-                <a16:creationId xmlns:a16="http://schemas.microsoft.com/office/drawing/2014/main" id="{BC8CB6FC-61AF-4DBA-AB46-8931937BC06A}"/>
+                <a16:creationId xmlns:a16="http://schemas.microsoft.com/office/drawing/2014/main" id="{5A20145F-E425-48B0-9338-16E955C9C54D}"/>
               </a:ext>
             </a:extLst>
           </p:cNvPr>
@@ -4473,7 +4518,7 @@
           <p:cNvPr id="7" name="p10-d-0">
             <a:extLst xmlns:a="http://schemas.openxmlformats.org/drawingml/2006/main">
               <a:ext uri="{FF2B5EF4-FFF2-40B4-BE49-F238E27FC236}">
-                <a16:creationId xmlns:a16="http://schemas.microsoft.com/office/drawing/2014/main" id="{AA826B87-CB2B-4C35-AA5D-144290E719D1}"/>
+                <a16:creationId xmlns:a16="http://schemas.microsoft.com/office/drawing/2014/main" id="{95F5D93B-786D-487D-9575-1F7EDD6A6DFC}"/>
               </a:ext>
             </a:extLst>
           </p:cNvPr>
@@ -4558,7 +4603,7 @@
           <p:cNvPr id="8" name="p10-l-1">
             <a:extLst xmlns:a="http://schemas.openxmlformats.org/drawingml/2006/main">
               <a:ext uri="{FF2B5EF4-FFF2-40B4-BE49-F238E27FC236}">
-                <a16:creationId xmlns:a16="http://schemas.microsoft.com/office/drawing/2014/main" id="{A7DC6344-B774-41CF-81EB-08B10E5A56DD}"/>
+                <a16:creationId xmlns:a16="http://schemas.microsoft.com/office/drawing/2014/main" id="{8344EC74-1D59-40F4-854C-F4368BB44117}"/>
               </a:ext>
             </a:extLst>
           </p:cNvPr>
@@ -4615,7 +4660,7 @@
           <p:cNvPr id="9" name="p10-d-1">
             <a:extLst xmlns:a="http://schemas.openxmlformats.org/drawingml/2006/main">
               <a:ext uri="{FF2B5EF4-FFF2-40B4-BE49-F238E27FC236}">
-                <a16:creationId xmlns:a16="http://schemas.microsoft.com/office/drawing/2014/main" id="{9315F225-FA88-4186-8DEE-3011ACABD274}"/>
+                <a16:creationId xmlns:a16="http://schemas.microsoft.com/office/drawing/2014/main" id="{56D34F07-3E42-4E90-BFCC-823F34C79378}"/>
               </a:ext>
             </a:extLst>
           </p:cNvPr>
@@ -4700,7 +4745,7 @@
           <p:cNvPr id="10" name="p10-l-2">
             <a:extLst xmlns:a="http://schemas.openxmlformats.org/drawingml/2006/main">
               <a:ext uri="{FF2B5EF4-FFF2-40B4-BE49-F238E27FC236}">
-                <a16:creationId xmlns:a16="http://schemas.microsoft.com/office/drawing/2014/main" id="{89DD27E3-7C98-469B-869C-DE920BE43E0F}"/>
+                <a16:creationId xmlns:a16="http://schemas.microsoft.com/office/drawing/2014/main" id="{75BA32E0-0A86-4593-AA38-822A6B660FAA}"/>
               </a:ext>
             </a:extLst>
           </p:cNvPr>
@@ -4757,7 +4802,7 @@
           <p:cNvPr id="11" name="p10-d-2">
             <a:extLst xmlns:a="http://schemas.openxmlformats.org/drawingml/2006/main">
               <a:ext uri="{FF2B5EF4-FFF2-40B4-BE49-F238E27FC236}">
-                <a16:creationId xmlns:a16="http://schemas.microsoft.com/office/drawing/2014/main" id="{55A68708-395F-490B-91F0-227153250E51}"/>
+                <a16:creationId xmlns:a16="http://schemas.microsoft.com/office/drawing/2014/main" id="{21758890-0319-40B4-B643-06D5A661F2D8}"/>
               </a:ext>
             </a:extLst>
           </p:cNvPr>
@@ -4842,7 +4887,7 @@
           <p:cNvPr id="12" name="p10-l-3">
             <a:extLst xmlns:a="http://schemas.openxmlformats.org/drawingml/2006/main">
               <a:ext uri="{FF2B5EF4-FFF2-40B4-BE49-F238E27FC236}">
-                <a16:creationId xmlns:a16="http://schemas.microsoft.com/office/drawing/2014/main" id="{A3F8DD7C-AFB0-4C46-8FF3-B34DD3C42C9B}"/>
+                <a16:creationId xmlns:a16="http://schemas.microsoft.com/office/drawing/2014/main" id="{F6857EDA-72D7-4CD4-AF7E-60B3E5784AFD}"/>
               </a:ext>
             </a:extLst>
           </p:cNvPr>
@@ -4899,7 +4944,7 @@
           <p:cNvPr id="13" name="p10-d-3">
             <a:extLst xmlns:a="http://schemas.openxmlformats.org/drawingml/2006/main">
               <a:ext uri="{FF2B5EF4-FFF2-40B4-BE49-F238E27FC236}">
-                <a16:creationId xmlns:a16="http://schemas.microsoft.com/office/drawing/2014/main" id="{B57E6C28-B160-43B1-AF53-01F33A38A2A4}"/>
+                <a16:creationId xmlns:a16="http://schemas.microsoft.com/office/drawing/2014/main" id="{AEB2DB46-57B7-48E6-B2E7-E08EF9B9973C}"/>
               </a:ext>
             </a:extLst>
           </p:cNvPr>
@@ -4984,19 +5029,19 @@
           <p:cNvPr id="14" name="p10-case-title">
             <a:extLst xmlns:a="http://schemas.openxmlformats.org/drawingml/2006/main">
               <a:ext uri="{FF2B5EF4-FFF2-40B4-BE49-F238E27FC236}">
-                <a16:creationId xmlns:a16="http://schemas.microsoft.com/office/drawing/2014/main" id="{5687C371-D8EF-4FF2-8B46-4FA9FDAA3A0E}"/>
-              </a:ext>
-            </a:extLst>
-          </p:cNvPr>
-          <p:cNvSpPr>
-            <a:spLocks xmlns:a="http://schemas.openxmlformats.org/drawingml/2006/main" noGrp="1"/>
-          </p:cNvSpPr>
-          <p:nvPr/>
-        </p:nvSpPr>
-        <p:spPr>
-          <a:xfrm xmlns:a="http://schemas.openxmlformats.org/drawingml/2006/main">
-            <a:off x="857250" y="3371850"/>
-            <a:ext cx="2000250" cy="457200"/>
+                <a16:creationId xmlns:a16="http://schemas.microsoft.com/office/drawing/2014/main" id="{4589C024-D117-4050-BB05-5C33DDA2EF1D}"/>
+              </a:ext>
+            </a:extLst>
+          </p:cNvPr>
+          <p:cNvSpPr>
+            <a:spLocks xmlns:a="http://schemas.openxmlformats.org/drawingml/2006/main" noGrp="1"/>
+          </p:cNvSpPr>
+          <p:nvPr/>
+        </p:nvSpPr>
+        <p:spPr>
+          <a:xfrm xmlns:a="http://schemas.openxmlformats.org/drawingml/2006/main">
+            <a:off x="666750" y="3371850"/>
+            <a:ext cx="2381250" cy="457200"/>
           </a:xfrm>
           <a:prstGeom xmlns:a="http://schemas.openxmlformats.org/drawingml/2006/main" prst="rect">
             <a:avLst/>
@@ -5012,14 +5057,14 @@
           <a:lstStyle xmlns:a="http://schemas.openxmlformats.org/drawingml/2006/main"/>
           <a:p xmlns:a="http://schemas.openxmlformats.org/drawingml/2006/main">
             <a:pPr algn="ctr">
-              <a:defRPr sz="1800" b="1">
+              <a:defRPr sz="1650" b="1">
                 <a:solidFill>
                   <a:srgbClr val="C8161E"/>
                 </a:solidFill>
               </a:defRPr>
             </a:pPr>
             <a:r>
-              <a:rPr sz="1800" b="1">
+              <a:rPr sz="1650" b="1">
                 <a:solidFill>
                   <a:srgbClr val="C8161E"/>
                 </a:solidFill>
@@ -5027,7 +5072,7 @@
                 <a:ea typeface="Microsoft YaHei"/>
                 <a:cs typeface="Microsoft YaHei"/>
               </a:rPr>
-              <a:t>贯穿案例</a:t>
+              <a:t>虚构教学规格</a:t>
             </a:r>
           </a:p>
         </p:txBody>
@@ -5037,7 +5082,7 @@
           <p:cNvPr id="15" name="p10-case">
             <a:extLst xmlns:a="http://schemas.openxmlformats.org/drawingml/2006/main">
               <a:ext uri="{FF2B5EF4-FFF2-40B4-BE49-F238E27FC236}">
-                <a16:creationId xmlns:a16="http://schemas.microsoft.com/office/drawing/2014/main" id="{3906F806-976C-4FE4-AFC1-CADEC3F32DE5}"/>
+                <a16:creationId xmlns:a16="http://schemas.microsoft.com/office/drawing/2014/main" id="{F1D334BD-2849-4EAF-81B8-7DACB5372DA4}"/>
               </a:ext>
             </a:extLst>
           </p:cNvPr>
@@ -5120,7 +5165,7 @@
           <p:cNvPr id="16" name="p10-bottom">
             <a:extLst xmlns:a="http://schemas.openxmlformats.org/drawingml/2006/main">
               <a:ext uri="{FF2B5EF4-FFF2-40B4-BE49-F238E27FC236}">
-                <a16:creationId xmlns:a16="http://schemas.microsoft.com/office/drawing/2014/main" id="{C6D586D4-3B11-4A8F-9C6D-5E9E0BE12049}"/>
+                <a16:creationId xmlns:a16="http://schemas.microsoft.com/office/drawing/2014/main" id="{49E139BF-A3D6-4B9D-8BD7-F4D11F2A7EB5}"/>
               </a:ext>
             </a:extLst>
           </p:cNvPr>
@@ -5269,7 +5314,7 @@
           <p:cNvPr id="6" name="p11-line-0">
             <a:extLst xmlns:a="http://schemas.openxmlformats.org/drawingml/2006/main">
               <a:ext uri="{FF2B5EF4-FFF2-40B4-BE49-F238E27FC236}">
-                <a16:creationId xmlns:a16="http://schemas.microsoft.com/office/drawing/2014/main" id="{CBE583E0-A9E0-48F9-8EA9-F66654755F1E}"/>
+                <a16:creationId xmlns:a16="http://schemas.microsoft.com/office/drawing/2014/main" id="{0FA241AC-C343-475B-BBB9-F8B58411CD84}"/>
               </a:ext>
             </a:extLst>
           </p:cNvPr>
@@ -5300,7 +5345,7 @@
           <p:cNvPr id="7" name="p11-line-1">
             <a:extLst xmlns:a="http://schemas.openxmlformats.org/drawingml/2006/main">
               <a:ext uri="{FF2B5EF4-FFF2-40B4-BE49-F238E27FC236}">
-                <a16:creationId xmlns:a16="http://schemas.microsoft.com/office/drawing/2014/main" id="{C44696B3-8AAF-45B9-B2F6-27F37C6E1A5C}"/>
+                <a16:creationId xmlns:a16="http://schemas.microsoft.com/office/drawing/2014/main" id="{180F732C-1993-460B-813D-480AFDDB4EDC}"/>
               </a:ext>
             </a:extLst>
           </p:cNvPr>
@@ -5331,7 +5376,7 @@
           <p:cNvPr id="8" name="p11-line-2">
             <a:extLst xmlns:a="http://schemas.openxmlformats.org/drawingml/2006/main">
               <a:ext uri="{FF2B5EF4-FFF2-40B4-BE49-F238E27FC236}">
-                <a16:creationId xmlns:a16="http://schemas.microsoft.com/office/drawing/2014/main" id="{33FB3749-7514-4586-AB94-7DD6325ADF33}"/>
+                <a16:creationId xmlns:a16="http://schemas.microsoft.com/office/drawing/2014/main" id="{08B6533B-0145-4C4E-85EA-6FA92FD55FFC}"/>
               </a:ext>
             </a:extLst>
           </p:cNvPr>
@@ -5362,7 +5407,7 @@
           <p:cNvPr id="9" name="p11-line-3">
             <a:extLst xmlns:a="http://schemas.openxmlformats.org/drawingml/2006/main">
               <a:ext uri="{FF2B5EF4-FFF2-40B4-BE49-F238E27FC236}">
-                <a16:creationId xmlns:a16="http://schemas.microsoft.com/office/drawing/2014/main" id="{8AD3AFFC-9282-4BEC-96F6-ED2AA9C3DFA0}"/>
+                <a16:creationId xmlns:a16="http://schemas.microsoft.com/office/drawing/2014/main" id="{F049026B-9EF0-45EE-8939-C60827E412C7}"/>
               </a:ext>
             </a:extLst>
           </p:cNvPr>
@@ -5393,7 +5438,7 @@
           <p:cNvPr id="10" name="p11-line-4">
             <a:extLst xmlns:a="http://schemas.openxmlformats.org/drawingml/2006/main">
               <a:ext uri="{FF2B5EF4-FFF2-40B4-BE49-F238E27FC236}">
-                <a16:creationId xmlns:a16="http://schemas.microsoft.com/office/drawing/2014/main" id="{E746D260-258F-44F1-B49E-43F0CCF010F7}"/>
+                <a16:creationId xmlns:a16="http://schemas.microsoft.com/office/drawing/2014/main" id="{3DE39735-C80C-490B-A26B-89B765208913}"/>
               </a:ext>
             </a:extLst>
           </p:cNvPr>
@@ -5424,7 +5469,7 @@
           <p:cNvPr id="11" name="p11-label-0">
             <a:extLst xmlns:a="http://schemas.openxmlformats.org/drawingml/2006/main">
               <a:ext uri="{FF2B5EF4-FFF2-40B4-BE49-F238E27FC236}">
-                <a16:creationId xmlns:a16="http://schemas.microsoft.com/office/drawing/2014/main" id="{D7E6A999-0816-4812-9839-6FAE382CA328}"/>
+                <a16:creationId xmlns:a16="http://schemas.microsoft.com/office/drawing/2014/main" id="{5CC683B1-3023-4947-A9B3-BD57AE647E68}"/>
               </a:ext>
             </a:extLst>
           </p:cNvPr>
@@ -5481,7 +5526,7 @@
           <p:cNvPr id="12" name="p11-detail-0">
             <a:extLst xmlns:a="http://schemas.openxmlformats.org/drawingml/2006/main">
               <a:ext uri="{FF2B5EF4-FFF2-40B4-BE49-F238E27FC236}">
-                <a16:creationId xmlns:a16="http://schemas.microsoft.com/office/drawing/2014/main" id="{02C646A6-3AC6-49B5-81C3-E5FC79736F81}"/>
+                <a16:creationId xmlns:a16="http://schemas.microsoft.com/office/drawing/2014/main" id="{1D6ACF10-1CD0-4478-AEE4-FFBA9D40EF5E}"/>
               </a:ext>
             </a:extLst>
           </p:cNvPr>
@@ -5566,7 +5611,7 @@
           <p:cNvPr id="13" name="p11-label-1">
             <a:extLst xmlns:a="http://schemas.openxmlformats.org/drawingml/2006/main">
               <a:ext uri="{FF2B5EF4-FFF2-40B4-BE49-F238E27FC236}">
-                <a16:creationId xmlns:a16="http://schemas.microsoft.com/office/drawing/2014/main" id="{7BC87018-0647-4CB8-A5F7-29251B03D957}"/>
+                <a16:creationId xmlns:a16="http://schemas.microsoft.com/office/drawing/2014/main" id="{41B8A68A-1DE1-48B1-8F2E-C84E668060EE}"/>
               </a:ext>
             </a:extLst>
           </p:cNvPr>
@@ -5623,7 +5668,7 @@
           <p:cNvPr id="14" name="p11-detail-1">
             <a:extLst xmlns:a="http://schemas.openxmlformats.org/drawingml/2006/main">
               <a:ext uri="{FF2B5EF4-FFF2-40B4-BE49-F238E27FC236}">
-                <a16:creationId xmlns:a16="http://schemas.microsoft.com/office/drawing/2014/main" id="{3C6ADF62-8659-4990-9BE0-1FD1A9F2E807}"/>
+                <a16:creationId xmlns:a16="http://schemas.microsoft.com/office/drawing/2014/main" id="{30B2D705-1DF4-4E42-8CFA-686979DE9F98}"/>
               </a:ext>
             </a:extLst>
           </p:cNvPr>
@@ -5708,7 +5753,7 @@
           <p:cNvPr id="15" name="p11-label-2">
             <a:extLst xmlns:a="http://schemas.openxmlformats.org/drawingml/2006/main">
               <a:ext uri="{FF2B5EF4-FFF2-40B4-BE49-F238E27FC236}">
-                <a16:creationId xmlns:a16="http://schemas.microsoft.com/office/drawing/2014/main" id="{4AD453C4-CED9-4667-BF06-96A39FA4F0AF}"/>
+                <a16:creationId xmlns:a16="http://schemas.microsoft.com/office/drawing/2014/main" id="{AD54EAC6-EAC3-421C-9C6E-4E3E29CCFAAA}"/>
               </a:ext>
             </a:extLst>
           </p:cNvPr>
@@ -5765,7 +5810,7 @@
           <p:cNvPr id="16" name="p11-detail-2">
             <a:extLst xmlns:a="http://schemas.openxmlformats.org/drawingml/2006/main">
               <a:ext uri="{FF2B5EF4-FFF2-40B4-BE49-F238E27FC236}">
-                <a16:creationId xmlns:a16="http://schemas.microsoft.com/office/drawing/2014/main" id="{DB368EEA-4F8B-41E2-A958-80D5BA52F2FC}"/>
+                <a16:creationId xmlns:a16="http://schemas.microsoft.com/office/drawing/2014/main" id="{B7D0256F-1F4F-4029-A00B-AA6300092F37}"/>
               </a:ext>
             </a:extLst>
           </p:cNvPr>
@@ -5874,7 +5919,7 @@
           <p:cNvPr id="17" name="p11-label-3">
             <a:extLst xmlns:a="http://schemas.openxmlformats.org/drawingml/2006/main">
               <a:ext uri="{FF2B5EF4-FFF2-40B4-BE49-F238E27FC236}">
-                <a16:creationId xmlns:a16="http://schemas.microsoft.com/office/drawing/2014/main" id="{518873ED-3F26-467B-83FC-751EEDADB529}"/>
+                <a16:creationId xmlns:a16="http://schemas.microsoft.com/office/drawing/2014/main" id="{308FF67E-BE0D-4130-9FB7-17412715F81D}"/>
               </a:ext>
             </a:extLst>
           </p:cNvPr>
@@ -5931,7 +5976,7 @@
           <p:cNvPr id="18" name="p11-detail-3">
             <a:extLst xmlns:a="http://schemas.openxmlformats.org/drawingml/2006/main">
               <a:ext uri="{FF2B5EF4-FFF2-40B4-BE49-F238E27FC236}">
-                <a16:creationId xmlns:a16="http://schemas.microsoft.com/office/drawing/2014/main" id="{4FADE9D0-CD20-4340-A5EA-A926B0DB32AA}"/>
+                <a16:creationId xmlns:a16="http://schemas.microsoft.com/office/drawing/2014/main" id="{8978E6AD-3592-4B75-BD3C-637EDC938B30}"/>
               </a:ext>
             </a:extLst>
           </p:cNvPr>
@@ -6016,7 +6061,7 @@
           <p:cNvPr id="19" name="p11-label-4">
             <a:extLst xmlns:a="http://schemas.openxmlformats.org/drawingml/2006/main">
               <a:ext uri="{FF2B5EF4-FFF2-40B4-BE49-F238E27FC236}">
-                <a16:creationId xmlns:a16="http://schemas.microsoft.com/office/drawing/2014/main" id="{4E9191BB-EBA1-4CAA-B306-944AAA8FB812}"/>
+                <a16:creationId xmlns:a16="http://schemas.microsoft.com/office/drawing/2014/main" id="{E41490EC-32B2-4CC5-BE4D-60918B89AEA9}"/>
               </a:ext>
             </a:extLst>
           </p:cNvPr>
@@ -6073,7 +6118,7 @@
           <p:cNvPr id="20" name="p11-detail-4">
             <a:extLst xmlns:a="http://schemas.openxmlformats.org/drawingml/2006/main">
               <a:ext uri="{FF2B5EF4-FFF2-40B4-BE49-F238E27FC236}">
-                <a16:creationId xmlns:a16="http://schemas.microsoft.com/office/drawing/2014/main" id="{268894A6-B98F-4B24-B3CB-1DDE580B65E2}"/>
+                <a16:creationId xmlns:a16="http://schemas.microsoft.com/office/drawing/2014/main" id="{1663FE64-57E5-4B09-8707-CE4A195B623E}"/>
               </a:ext>
             </a:extLst>
           </p:cNvPr>
@@ -6158,7 +6203,7 @@
           <p:cNvPr id="21" name="p11-label-5">
             <a:extLst xmlns:a="http://schemas.openxmlformats.org/drawingml/2006/main">
               <a:ext uri="{FF2B5EF4-FFF2-40B4-BE49-F238E27FC236}">
-                <a16:creationId xmlns:a16="http://schemas.microsoft.com/office/drawing/2014/main" id="{0C6C9B25-C4EB-4F78-BC7B-2821C3EEB2DD}"/>
+                <a16:creationId xmlns:a16="http://schemas.microsoft.com/office/drawing/2014/main" id="{373E65BE-A934-4241-981F-6BCD531F3135}"/>
               </a:ext>
             </a:extLst>
           </p:cNvPr>
@@ -6215,7 +6260,7 @@
           <p:cNvPr id="22" name="p11-detail-5">
             <a:extLst xmlns:a="http://schemas.openxmlformats.org/drawingml/2006/main">
               <a:ext uri="{FF2B5EF4-FFF2-40B4-BE49-F238E27FC236}">
-                <a16:creationId xmlns:a16="http://schemas.microsoft.com/office/drawing/2014/main" id="{4396F54B-A7E9-4E1B-AAEE-C200EE8040B1}"/>
+                <a16:creationId xmlns:a16="http://schemas.microsoft.com/office/drawing/2014/main" id="{770D0328-FA9E-40AE-88CF-6C1FC12EAF28}"/>
               </a:ext>
             </a:extLst>
           </p:cNvPr>
@@ -6300,19 +6345,19 @@
           <p:cNvPr id="23" name="p11-def">
             <a:extLst xmlns:a="http://schemas.openxmlformats.org/drawingml/2006/main">
               <a:ext uri="{FF2B5EF4-FFF2-40B4-BE49-F238E27FC236}">
-                <a16:creationId xmlns:a16="http://schemas.microsoft.com/office/drawing/2014/main" id="{372620BB-5931-4B94-A66C-5DC707744034}"/>
-              </a:ext>
-            </a:extLst>
-          </p:cNvPr>
-          <p:cNvSpPr>
-            <a:spLocks xmlns:a="http://schemas.openxmlformats.org/drawingml/2006/main" noGrp="1"/>
-          </p:cNvSpPr>
-          <p:nvPr/>
-        </p:nvSpPr>
-        <p:spPr>
-          <a:xfrm xmlns:a="http://schemas.openxmlformats.org/drawingml/2006/main">
-            <a:off x="1771650" y="3600450"/>
-            <a:ext cx="8648700" cy="628650"/>
+                <a16:creationId xmlns:a16="http://schemas.microsoft.com/office/drawing/2014/main" id="{1F8041DF-D6F5-4DF8-A7C5-3E853D588D54}"/>
+              </a:ext>
+            </a:extLst>
+          </p:cNvPr>
+          <p:cNvSpPr>
+            <a:spLocks xmlns:a="http://schemas.openxmlformats.org/drawingml/2006/main" noGrp="1"/>
+          </p:cNvSpPr>
+          <p:nvPr/>
+        </p:nvSpPr>
+        <p:spPr>
+          <a:xfrm xmlns:a="http://schemas.openxmlformats.org/drawingml/2006/main">
+            <a:off x="1200150" y="3600450"/>
+            <a:ext cx="9791700" cy="628650"/>
           </a:xfrm>
           <a:prstGeom xmlns:a="http://schemas.openxmlformats.org/drawingml/2006/main" prst="rect">
             <a:avLst/>
@@ -6330,14 +6375,14 @@
           <a:lstStyle xmlns:a="http://schemas.openxmlformats.org/drawingml/2006/main"/>
           <a:p xmlns:a="http://schemas.openxmlformats.org/drawingml/2006/main">
             <a:pPr algn="ctr">
-              <a:defRPr sz="1800" b="1">
+              <a:defRPr sz="1575" b="1">
                 <a:solidFill>
                   <a:srgbClr val="18354E"/>
                 </a:solidFill>
               </a:defRPr>
             </a:pPr>
             <a:r>
-              <a:rPr sz="1800" b="1">
+              <a:rPr sz="1575" b="1">
                 <a:solidFill>
                   <a:srgbClr val="18354E"/>
                 </a:solidFill>
@@ -6345,7 +6390,7 @@
                 <a:ea typeface="Microsoft YaHei"/>
                 <a:cs typeface="Microsoft YaHei"/>
               </a:rPr>
-              <a:t>另一位研究者｜另一台机器｜同一运行入口｜得到可比结果</a:t>
+              <a:t>真实可运行课次工件｜experiment-spec.md → config.json → run.py → run-log.jsonl</a:t>
             </a:r>
           </a:p>
         </p:txBody>
@@ -6355,7 +6400,7 @@
           <p:cNvPr id="24" name="p11-limit">
             <a:extLst xmlns:a="http://schemas.openxmlformats.org/drawingml/2006/main">
               <a:ext uri="{FF2B5EF4-FFF2-40B4-BE49-F238E27FC236}">
-                <a16:creationId xmlns:a16="http://schemas.microsoft.com/office/drawing/2014/main" id="{241F1A7E-5561-426F-8959-E2BAE5615B85}"/>
+                <a16:creationId xmlns:a16="http://schemas.microsoft.com/office/drawing/2014/main" id="{622F40DF-6DA8-4293-91F8-5CF9635EB904}"/>
               </a:ext>
             </a:extLst>
           </p:cNvPr>
@@ -6385,14 +6430,14 @@
           <a:lstStyle xmlns:a="http://schemas.openxmlformats.org/drawingml/2006/main"/>
           <a:p xmlns:a="http://schemas.openxmlformats.org/drawingml/2006/main">
             <a:pPr algn="ctr">
-              <a:defRPr sz="1650" b="1">
+              <a:defRPr sz="1575" b="1">
                 <a:solidFill>
                   <a:srgbClr val="C8161E"/>
                 </a:solidFill>
               </a:defRPr>
             </a:pPr>
             <a:r>
-              <a:rPr sz="1650" b="1">
+              <a:rPr sz="1575" b="1">
                 <a:solidFill>
                   <a:srgbClr val="C8161E"/>
                 </a:solidFill>
@@ -6400,7 +6445,7 @@
                 <a:ea typeface="Microsoft YaHei"/>
                 <a:cs typeface="Microsoft YaHei"/>
               </a:rPr>
-              <a:t>数据限制也要可追溯：许可证、敏感内容、是否允许上传外部 API。</a:t>
+              <a:t>实跑核验：4 条合成记录｜2 条缺失｜遗漏率 0.5｜非实证研究结论</a:t>
             </a:r>
           </a:p>
         </p:txBody>
@@ -6504,7 +6549,7 @@
           <p:cNvPr id="6" name="p12-src-0">
             <a:extLst xmlns:a="http://schemas.openxmlformats.org/drawingml/2006/main">
               <a:ext uri="{FF2B5EF4-FFF2-40B4-BE49-F238E27FC236}">
-                <a16:creationId xmlns:a16="http://schemas.microsoft.com/office/drawing/2014/main" id="{B8714BB0-6664-46D5-AF50-FFE538655F9F}"/>
+                <a16:creationId xmlns:a16="http://schemas.microsoft.com/office/drawing/2014/main" id="{1679FB45-CB57-4947-9233-C166EE27DF20}"/>
               </a:ext>
             </a:extLst>
           </p:cNvPr>
@@ -6565,7 +6610,7 @@
           <p:cNvPr id="7" name="p12-src-1">
             <a:extLst xmlns:a="http://schemas.openxmlformats.org/drawingml/2006/main">
               <a:ext uri="{FF2B5EF4-FFF2-40B4-BE49-F238E27FC236}">
-                <a16:creationId xmlns:a16="http://schemas.microsoft.com/office/drawing/2014/main" id="{EAB2231C-DA3B-434A-8665-70AF76B25E37}"/>
+                <a16:creationId xmlns:a16="http://schemas.microsoft.com/office/drawing/2014/main" id="{D6EA45F0-9D5E-480C-A0AC-CB849F8F6B56}"/>
               </a:ext>
             </a:extLst>
           </p:cNvPr>
@@ -6626,7 +6671,7 @@
           <p:cNvPr id="8" name="p12-src-2">
             <a:extLst xmlns:a="http://schemas.openxmlformats.org/drawingml/2006/main">
               <a:ext uri="{FF2B5EF4-FFF2-40B4-BE49-F238E27FC236}">
-                <a16:creationId xmlns:a16="http://schemas.microsoft.com/office/drawing/2014/main" id="{B834C3DE-2B68-44B0-9EE2-FFDD74FB6FDF}"/>
+                <a16:creationId xmlns:a16="http://schemas.microsoft.com/office/drawing/2014/main" id="{22AC1F63-0A54-474C-A12B-3F534376225F}"/>
               </a:ext>
             </a:extLst>
           </p:cNvPr>
@@ -6687,7 +6732,7 @@
           <p:cNvPr id="9" name="p12-src-3">
             <a:extLst xmlns:a="http://schemas.openxmlformats.org/drawingml/2006/main">
               <a:ext uri="{FF2B5EF4-FFF2-40B4-BE49-F238E27FC236}">
-                <a16:creationId xmlns:a16="http://schemas.microsoft.com/office/drawing/2014/main" id="{945746C8-477D-4C36-9D2E-CCA08D729696}"/>
+                <a16:creationId xmlns:a16="http://schemas.microsoft.com/office/drawing/2014/main" id="{79A7DC58-7482-4A2E-98BE-841B55FE4001}"/>
               </a:ext>
             </a:extLst>
           </p:cNvPr>
@@ -6748,7 +6793,7 @@
           <p:cNvPr id="10" name="p12-line-0">
             <a:extLst xmlns:a="http://schemas.openxmlformats.org/drawingml/2006/main">
               <a:ext uri="{FF2B5EF4-FFF2-40B4-BE49-F238E27FC236}">
-                <a16:creationId xmlns:a16="http://schemas.microsoft.com/office/drawing/2014/main" id="{2C216FC8-3E34-439A-A65D-05E255A5FCB2}"/>
+                <a16:creationId xmlns:a16="http://schemas.microsoft.com/office/drawing/2014/main" id="{38983E10-3122-4E4E-A71D-D290F782CE26}"/>
               </a:ext>
             </a:extLst>
           </p:cNvPr>
@@ -6779,7 +6824,7 @@
           <p:cNvPr id="11" name="p12-line-1">
             <a:extLst xmlns:a="http://schemas.openxmlformats.org/drawingml/2006/main">
               <a:ext uri="{FF2B5EF4-FFF2-40B4-BE49-F238E27FC236}">
-                <a16:creationId xmlns:a16="http://schemas.microsoft.com/office/drawing/2014/main" id="{FE547DD9-6476-498A-855C-D5AC3767186F}"/>
+                <a16:creationId xmlns:a16="http://schemas.microsoft.com/office/drawing/2014/main" id="{961D7DA8-EEA5-423D-9B34-E4D806887138}"/>
               </a:ext>
             </a:extLst>
           </p:cNvPr>
@@ -6810,7 +6855,7 @@
           <p:cNvPr id="12" name="p12-line-2">
             <a:extLst xmlns:a="http://schemas.openxmlformats.org/drawingml/2006/main">
               <a:ext uri="{FF2B5EF4-FFF2-40B4-BE49-F238E27FC236}">
-                <a16:creationId xmlns:a16="http://schemas.microsoft.com/office/drawing/2014/main" id="{9C55E340-651E-4199-8EEB-1278526F4D59}"/>
+                <a16:creationId xmlns:a16="http://schemas.microsoft.com/office/drawing/2014/main" id="{18E6BCA5-370D-4995-9F2F-2F0CBAA47EB0}"/>
               </a:ext>
             </a:extLst>
           </p:cNvPr>
@@ -6841,7 +6886,7 @@
           <p:cNvPr id="13" name="p12-line-3">
             <a:extLst xmlns:a="http://schemas.openxmlformats.org/drawingml/2006/main">
               <a:ext uri="{FF2B5EF4-FFF2-40B4-BE49-F238E27FC236}">
-                <a16:creationId xmlns:a16="http://schemas.microsoft.com/office/drawing/2014/main" id="{51E73766-FDF3-456E-8025-B49401587485}"/>
+                <a16:creationId xmlns:a16="http://schemas.microsoft.com/office/drawing/2014/main" id="{F8F35CFA-08E5-4735-935B-6890CAA3E839}"/>
               </a:ext>
             </a:extLst>
           </p:cNvPr>
@@ -6872,7 +6917,7 @@
           <p:cNvPr id="14" name="p12-finding">
             <a:extLst xmlns:a="http://schemas.openxmlformats.org/drawingml/2006/main">
               <a:ext uri="{FF2B5EF4-FFF2-40B4-BE49-F238E27FC236}">
-                <a16:creationId xmlns:a16="http://schemas.microsoft.com/office/drawing/2014/main" id="{EC30B975-9A60-41D8-8892-3716E617C533}"/>
+                <a16:creationId xmlns:a16="http://schemas.microsoft.com/office/drawing/2014/main" id="{D4B2541D-5484-473B-88B0-875940321551}"/>
               </a:ext>
             </a:extLst>
           </p:cNvPr>
@@ -6927,7 +6972,7 @@
           <p:cNvPr id="15" name="p12-n-0">
             <a:extLst xmlns:a="http://schemas.openxmlformats.org/drawingml/2006/main">
               <a:ext uri="{FF2B5EF4-FFF2-40B4-BE49-F238E27FC236}">
-                <a16:creationId xmlns:a16="http://schemas.microsoft.com/office/drawing/2014/main" id="{82E8EEC4-55EB-4F0F-88D9-3EFD8845BF2F}"/>
+                <a16:creationId xmlns:a16="http://schemas.microsoft.com/office/drawing/2014/main" id="{A985027C-ACD8-43EB-8E19-AABCD6D5DF47}"/>
               </a:ext>
             </a:extLst>
           </p:cNvPr>
@@ -6984,7 +7029,7 @@
           <p:cNvPr id="16" name="p12-s-0">
             <a:extLst xmlns:a="http://schemas.openxmlformats.org/drawingml/2006/main">
               <a:ext uri="{FF2B5EF4-FFF2-40B4-BE49-F238E27FC236}">
-                <a16:creationId xmlns:a16="http://schemas.microsoft.com/office/drawing/2014/main" id="{4F9252A6-B041-4974-89F4-467CC56DE404}"/>
+                <a16:creationId xmlns:a16="http://schemas.microsoft.com/office/drawing/2014/main" id="{EF903436-902F-45BD-ACFE-C791193C60A8}"/>
               </a:ext>
             </a:extLst>
           </p:cNvPr>
@@ -7029,7 +7074,7 @@
                 <a:ea typeface="Microsoft YaHei"/>
                 <a:cs typeface="Microsoft YaHei"/>
               </a:rPr>
-              <a:t>记录所有种子来源与具体值</a:t>
+              <a:t>记录所有种子或等价条件</a:t>
             </a:r>
           </a:p>
         </p:txBody>
@@ -7039,7 +7084,7 @@
           <p:cNvPr id="17" name="p12-n-1">
             <a:extLst xmlns:a="http://schemas.openxmlformats.org/drawingml/2006/main">
               <a:ext uri="{FF2B5EF4-FFF2-40B4-BE49-F238E27FC236}">
-                <a16:creationId xmlns:a16="http://schemas.microsoft.com/office/drawing/2014/main" id="{41077ECD-B09B-42DF-A850-AA96D345DB19}"/>
+                <a16:creationId xmlns:a16="http://schemas.microsoft.com/office/drawing/2014/main" id="{93D774BB-108C-47B1-AFBD-2E4F3DFF5689}"/>
               </a:ext>
             </a:extLst>
           </p:cNvPr>
@@ -7096,7 +7141,7 @@
           <p:cNvPr id="18" name="p12-s-1">
             <a:extLst xmlns:a="http://schemas.openxmlformats.org/drawingml/2006/main">
               <a:ext uri="{FF2B5EF4-FFF2-40B4-BE49-F238E27FC236}">
-                <a16:creationId xmlns:a16="http://schemas.microsoft.com/office/drawing/2014/main" id="{F51F4798-D609-49C6-A2EF-99CA9D85B0A2}"/>
+                <a16:creationId xmlns:a16="http://schemas.microsoft.com/office/drawing/2014/main" id="{128CC042-F149-486E-A0D9-2ADF12E92F3B}"/>
               </a:ext>
             </a:extLst>
           </p:cNvPr>
@@ -7141,7 +7186,7 @@
                 <a:ea typeface="Microsoft YaHei"/>
                 <a:cs typeface="Microsoft YaHei"/>
               </a:rPr>
-              <a:t>关键比较至少 3 次不同种子</a:t>
+              <a:t>重复计划与主张强度匹配</a:t>
             </a:r>
           </a:p>
         </p:txBody>
@@ -7151,7 +7196,7 @@
           <p:cNvPr id="19" name="p12-n-2">
             <a:extLst xmlns:a="http://schemas.openxmlformats.org/drawingml/2006/main">
               <a:ext uri="{FF2B5EF4-FFF2-40B4-BE49-F238E27FC236}">
-                <a16:creationId xmlns:a16="http://schemas.microsoft.com/office/drawing/2014/main" id="{D78C955B-12AB-44AF-9603-88FC8CDC2F53}"/>
+                <a16:creationId xmlns:a16="http://schemas.microsoft.com/office/drawing/2014/main" id="{07430CCD-590E-4C8E-8E7C-973448408F95}"/>
               </a:ext>
             </a:extLst>
           </p:cNvPr>
@@ -7208,7 +7253,7 @@
           <p:cNvPr id="20" name="p12-s-2">
             <a:extLst xmlns:a="http://schemas.openxmlformats.org/drawingml/2006/main">
               <a:ext uri="{FF2B5EF4-FFF2-40B4-BE49-F238E27FC236}">
-                <a16:creationId xmlns:a16="http://schemas.microsoft.com/office/drawing/2014/main" id="{C742F75D-F4D2-4C48-A21D-65D1FC2A4D8A}"/>
+                <a16:creationId xmlns:a16="http://schemas.microsoft.com/office/drawing/2014/main" id="{BA373A60-2483-4D89-AC72-10F09A62D69B}"/>
               </a:ext>
             </a:extLst>
           </p:cNvPr>
@@ -7253,7 +7298,7 @@
                 <a:ea typeface="Microsoft YaHei"/>
                 <a:cs typeface="Microsoft YaHei"/>
               </a:rPr>
-              <a:t>报告均值与标准差</a:t>
+              <a:t>声称方差时说明汇总方式</a:t>
             </a:r>
           </a:p>
         </p:txBody>
@@ -7263,7 +7308,7 @@
           <p:cNvPr id="21" name="p12-n-3">
             <a:extLst xmlns:a="http://schemas.openxmlformats.org/drawingml/2006/main">
               <a:ext uri="{FF2B5EF4-FFF2-40B4-BE49-F238E27FC236}">
-                <a16:creationId xmlns:a16="http://schemas.microsoft.com/office/drawing/2014/main" id="{3386109C-6078-4BD7-9863-A36748E505A8}"/>
+                <a16:creationId xmlns:a16="http://schemas.microsoft.com/office/drawing/2014/main" id="{5E7C365C-D6E8-459B-86E0-EE0018276C05}"/>
               </a:ext>
             </a:extLst>
           </p:cNvPr>
@@ -7320,7 +7365,7 @@
           <p:cNvPr id="22" name="p12-s-3">
             <a:extLst xmlns:a="http://schemas.openxmlformats.org/drawingml/2006/main">
               <a:ext uri="{FF2B5EF4-FFF2-40B4-BE49-F238E27FC236}">
-                <a16:creationId xmlns:a16="http://schemas.microsoft.com/office/drawing/2014/main" id="{96764B63-87E6-4A98-A920-598E44F52B7D}"/>
+                <a16:creationId xmlns:a16="http://schemas.microsoft.com/office/drawing/2014/main" id="{E643874D-EACD-42D9-8530-17C1171533C3}"/>
               </a:ext>
             </a:extLst>
           </p:cNvPr>
@@ -7365,7 +7410,7 @@
                 <a:ea typeface="Microsoft YaHei"/>
                 <a:cs typeface="Microsoft YaHei"/>
               </a:rPr>
-              <a:t>只有 1 次时：说明原因，标记待验证</a:t>
+              <a:t>只有 1 次时：说明边界，不写稳定结论</a:t>
             </a:r>
           </a:p>
         </p:txBody>
@@ -7375,7 +7420,7 @@
           <p:cNvPr id="23" name="p12-bottom">
             <a:extLst xmlns:a="http://schemas.openxmlformats.org/drawingml/2006/main">
               <a:ext uri="{FF2B5EF4-FFF2-40B4-BE49-F238E27FC236}">
-                <a16:creationId xmlns:a16="http://schemas.microsoft.com/office/drawing/2014/main" id="{0319D1E8-6B4D-4B40-9DD2-E693445B2AA3}"/>
+                <a16:creationId xmlns:a16="http://schemas.microsoft.com/office/drawing/2014/main" id="{AE74D19D-AD92-4EA2-B7B4-1058A10F8407}"/>
               </a:ext>
             </a:extLst>
           </p:cNvPr>
@@ -7522,7 +7567,7 @@
           <p:cNvPr id="6" name="p13-l-0">
             <a:extLst xmlns:a="http://schemas.openxmlformats.org/drawingml/2006/main">
               <a:ext uri="{FF2B5EF4-FFF2-40B4-BE49-F238E27FC236}">
-                <a16:creationId xmlns:a16="http://schemas.microsoft.com/office/drawing/2014/main" id="{F5B575C1-1329-45E6-B345-A7BB4FEE1957}"/>
+                <a16:creationId xmlns:a16="http://schemas.microsoft.com/office/drawing/2014/main" id="{17AB5A89-A854-412A-95A8-036A713E4E38}"/>
               </a:ext>
             </a:extLst>
           </p:cNvPr>
@@ -7579,7 +7624,7 @@
           <p:cNvPr id="7" name="p13-d-0">
             <a:extLst xmlns:a="http://schemas.openxmlformats.org/drawingml/2006/main">
               <a:ext uri="{FF2B5EF4-FFF2-40B4-BE49-F238E27FC236}">
-                <a16:creationId xmlns:a16="http://schemas.microsoft.com/office/drawing/2014/main" id="{39C29C7F-4A0B-4F40-9F39-85787E021405}"/>
+                <a16:creationId xmlns:a16="http://schemas.microsoft.com/office/drawing/2014/main" id="{D1FAF18F-23C7-4C5E-9791-16B8226C64C6}"/>
               </a:ext>
             </a:extLst>
           </p:cNvPr>
@@ -7669,7 +7714,7 @@
           <p:cNvPr id="8" name="p13-l-1">
             <a:extLst xmlns:a="http://schemas.openxmlformats.org/drawingml/2006/main">
               <a:ext uri="{FF2B5EF4-FFF2-40B4-BE49-F238E27FC236}">
-                <a16:creationId xmlns:a16="http://schemas.microsoft.com/office/drawing/2014/main" id="{4E2671A9-C7E5-4D6D-9D12-5F00FB39BB3A}"/>
+                <a16:creationId xmlns:a16="http://schemas.microsoft.com/office/drawing/2014/main" id="{283C9041-1586-4727-95B4-B16819356C94}"/>
               </a:ext>
             </a:extLst>
           </p:cNvPr>
@@ -7726,7 +7771,7 @@
           <p:cNvPr id="9" name="p13-d-1">
             <a:extLst xmlns:a="http://schemas.openxmlformats.org/drawingml/2006/main">
               <a:ext uri="{FF2B5EF4-FFF2-40B4-BE49-F238E27FC236}">
-                <a16:creationId xmlns:a16="http://schemas.microsoft.com/office/drawing/2014/main" id="{C49E0011-EEB4-4F20-A1E4-749E9CB3A26F}"/>
+                <a16:creationId xmlns:a16="http://schemas.microsoft.com/office/drawing/2014/main" id="{2AB4FD55-71ED-4652-8A49-D1DA008B212C}"/>
               </a:ext>
             </a:extLst>
           </p:cNvPr>
@@ -7816,7 +7861,7 @@
           <p:cNvPr id="10" name="p13-l-2">
             <a:extLst xmlns:a="http://schemas.openxmlformats.org/drawingml/2006/main">
               <a:ext uri="{FF2B5EF4-FFF2-40B4-BE49-F238E27FC236}">
-                <a16:creationId xmlns:a16="http://schemas.microsoft.com/office/drawing/2014/main" id="{0CF1A92A-F677-44BD-B228-B5EFB4DC6698}"/>
+                <a16:creationId xmlns:a16="http://schemas.microsoft.com/office/drawing/2014/main" id="{9253B4C0-94FF-4962-8629-2326AB83261A}"/>
               </a:ext>
             </a:extLst>
           </p:cNvPr>
@@ -7873,7 +7918,7 @@
           <p:cNvPr id="11" name="p13-d-2">
             <a:extLst xmlns:a="http://schemas.openxmlformats.org/drawingml/2006/main">
               <a:ext uri="{FF2B5EF4-FFF2-40B4-BE49-F238E27FC236}">
-                <a16:creationId xmlns:a16="http://schemas.microsoft.com/office/drawing/2014/main" id="{FAFECCDB-139F-475B-B2C9-9079E751D511}"/>
+                <a16:creationId xmlns:a16="http://schemas.microsoft.com/office/drawing/2014/main" id="{D4805376-3293-4162-974E-868E29906D8F}"/>
               </a:ext>
             </a:extLst>
           </p:cNvPr>
@@ -7963,7 +8008,7 @@
           <p:cNvPr id="12" name="p13-arrow-1">
             <a:extLst xmlns:a="http://schemas.openxmlformats.org/drawingml/2006/main">
               <a:ext uri="{FF2B5EF4-FFF2-40B4-BE49-F238E27FC236}">
-                <a16:creationId xmlns:a16="http://schemas.microsoft.com/office/drawing/2014/main" id="{CC4EC26F-176A-465D-A8C9-01820621543A}"/>
+                <a16:creationId xmlns:a16="http://schemas.microsoft.com/office/drawing/2014/main" id="{A59F4B0B-72D5-4B6E-9D6A-7C685C4C93E7}"/>
               </a:ext>
             </a:extLst>
           </p:cNvPr>
@@ -7994,7 +8039,7 @@
           <p:cNvPr id="13" name="p13-arrow-2">
             <a:extLst xmlns:a="http://schemas.openxmlformats.org/drawingml/2006/main">
               <a:ext uri="{FF2B5EF4-FFF2-40B4-BE49-F238E27FC236}">
-                <a16:creationId xmlns:a16="http://schemas.microsoft.com/office/drawing/2014/main" id="{1A9EDB50-9830-40D8-AF07-AFA4F27DFF6D}"/>
+                <a16:creationId xmlns:a16="http://schemas.microsoft.com/office/drawing/2014/main" id="{0EC1B5F5-18BE-4085-ACAE-8DD18A9F2515}"/>
               </a:ext>
             </a:extLst>
           </p:cNvPr>
@@ -8025,7 +8070,7 @@
           <p:cNvPr id="14" name="p13-higher">
             <a:extLst xmlns:a="http://schemas.openxmlformats.org/drawingml/2006/main">
               <a:ext uri="{FF2B5EF4-FFF2-40B4-BE49-F238E27FC236}">
-                <a16:creationId xmlns:a16="http://schemas.microsoft.com/office/drawing/2014/main" id="{0DA4A542-1E1B-4EA7-A5AE-B6AEA5187462}"/>
+                <a16:creationId xmlns:a16="http://schemas.microsoft.com/office/drawing/2014/main" id="{CBD97CFB-7B50-4AC0-A022-9762D41497F0}"/>
               </a:ext>
             </a:extLst>
           </p:cNvPr>
@@ -8080,7 +8125,7 @@
           <p:cNvPr id="15" name="p13-bottom">
             <a:extLst xmlns:a="http://schemas.openxmlformats.org/drawingml/2006/main">
               <a:ext uri="{FF2B5EF4-FFF2-40B4-BE49-F238E27FC236}">
-                <a16:creationId xmlns:a16="http://schemas.microsoft.com/office/drawing/2014/main" id="{79D801B1-7CEA-4B3C-BD94-980BF811325F}"/>
+                <a16:creationId xmlns:a16="http://schemas.microsoft.com/office/drawing/2014/main" id="{D85021AD-1355-4D26-BC36-4A9D1975593E}"/>
               </a:ext>
             </a:extLst>
           </p:cNvPr>
@@ -8227,7 +8272,7 @@
           <p:cNvPr id="6" name="p14-map-h-0">
             <a:extLst xmlns:a="http://schemas.openxmlformats.org/drawingml/2006/main">
               <a:ext uri="{FF2B5EF4-FFF2-40B4-BE49-F238E27FC236}">
-                <a16:creationId xmlns:a16="http://schemas.microsoft.com/office/drawing/2014/main" id="{D717AEAD-661C-45CC-9220-2AFDAD74940B}"/>
+                <a16:creationId xmlns:a16="http://schemas.microsoft.com/office/drawing/2014/main" id="{3F2530EE-A01F-422B-A884-416638354F32}"/>
               </a:ext>
             </a:extLst>
           </p:cNvPr>
@@ -8282,7 +8327,7 @@
           <p:cNvPr id="7" name="p14-map-h-1">
             <a:extLst xmlns:a="http://schemas.openxmlformats.org/drawingml/2006/main">
               <a:ext uri="{FF2B5EF4-FFF2-40B4-BE49-F238E27FC236}">
-                <a16:creationId xmlns:a16="http://schemas.microsoft.com/office/drawing/2014/main" id="{A612A0AB-49B1-4C7F-A885-00354E5D1B0B}"/>
+                <a16:creationId xmlns:a16="http://schemas.microsoft.com/office/drawing/2014/main" id="{93E5BCCD-DEB8-4571-A950-1F09F86ACA50}"/>
               </a:ext>
             </a:extLst>
           </p:cNvPr>
@@ -8337,7 +8382,7 @@
           <p:cNvPr id="8" name="p14-map-h-2">
             <a:extLst xmlns:a="http://schemas.openxmlformats.org/drawingml/2006/main">
               <a:ext uri="{FF2B5EF4-FFF2-40B4-BE49-F238E27FC236}">
-                <a16:creationId xmlns:a16="http://schemas.microsoft.com/office/drawing/2014/main" id="{9A4C1AE9-97BB-48C8-8AF9-EE876BD6AA40}"/>
+                <a16:creationId xmlns:a16="http://schemas.microsoft.com/office/drawing/2014/main" id="{7B277FD0-FD67-4277-804B-1479FD156CE7}"/>
               </a:ext>
             </a:extLst>
           </p:cNvPr>
@@ -8392,7 +8437,7 @@
           <p:cNvPr id="9" name="p14-map-r0-0">
             <a:extLst xmlns:a="http://schemas.openxmlformats.org/drawingml/2006/main">
               <a:ext uri="{FF2B5EF4-FFF2-40B4-BE49-F238E27FC236}">
-                <a16:creationId xmlns:a16="http://schemas.microsoft.com/office/drawing/2014/main" id="{F2FE9FFF-9BAC-4640-B91F-0DE68912E078}"/>
+                <a16:creationId xmlns:a16="http://schemas.microsoft.com/office/drawing/2014/main" id="{8A64D547-4D1B-482A-BDB4-9A27A0B51B76}"/>
               </a:ext>
             </a:extLst>
           </p:cNvPr>
@@ -8453,7 +8498,7 @@
           <p:cNvPr id="10" name="p14-map-r0-1">
             <a:extLst xmlns:a="http://schemas.openxmlformats.org/drawingml/2006/main">
               <a:ext uri="{FF2B5EF4-FFF2-40B4-BE49-F238E27FC236}">
-                <a16:creationId xmlns:a16="http://schemas.microsoft.com/office/drawing/2014/main" id="{6E898482-1602-40A6-BC15-A5FCF389EF02}"/>
+                <a16:creationId xmlns:a16="http://schemas.microsoft.com/office/drawing/2014/main" id="{9C3B8688-945C-432F-8E68-CEC4A70BDAFA}"/>
               </a:ext>
             </a:extLst>
           </p:cNvPr>
@@ -8514,7 +8559,7 @@
           <p:cNvPr id="11" name="p14-map-r0-2">
             <a:extLst xmlns:a="http://schemas.openxmlformats.org/drawingml/2006/main">
               <a:ext uri="{FF2B5EF4-FFF2-40B4-BE49-F238E27FC236}">
-                <a16:creationId xmlns:a16="http://schemas.microsoft.com/office/drawing/2014/main" id="{C7EA0B2F-55BA-40E3-A0B3-CF9721512FBF}"/>
+                <a16:creationId xmlns:a16="http://schemas.microsoft.com/office/drawing/2014/main" id="{21241981-0C6F-4572-BC7B-8C60365D9A8A}"/>
               </a:ext>
             </a:extLst>
           </p:cNvPr>
@@ -8575,7 +8620,7 @@
           <p:cNvPr id="12" name="p14-map-r1-0">
             <a:extLst xmlns:a="http://schemas.openxmlformats.org/drawingml/2006/main">
               <a:ext uri="{FF2B5EF4-FFF2-40B4-BE49-F238E27FC236}">
-                <a16:creationId xmlns:a16="http://schemas.microsoft.com/office/drawing/2014/main" id="{21B337F9-0F35-4B53-8D02-0EEACF4D3652}"/>
+                <a16:creationId xmlns:a16="http://schemas.microsoft.com/office/drawing/2014/main" id="{19721F14-004A-472A-A09C-A759CA5FFF9B}"/>
               </a:ext>
             </a:extLst>
           </p:cNvPr>
@@ -8636,7 +8681,7 @@
           <p:cNvPr id="13" name="p14-map-r1-1">
             <a:extLst xmlns:a="http://schemas.openxmlformats.org/drawingml/2006/main">
               <a:ext uri="{FF2B5EF4-FFF2-40B4-BE49-F238E27FC236}">
-                <a16:creationId xmlns:a16="http://schemas.microsoft.com/office/drawing/2014/main" id="{FD24C9DD-2BB6-41AA-AB27-9B050C02FFD8}"/>
+                <a16:creationId xmlns:a16="http://schemas.microsoft.com/office/drawing/2014/main" id="{85FE1411-B4D5-409D-832B-EED65010CBB3}"/>
               </a:ext>
             </a:extLst>
           </p:cNvPr>
@@ -8697,7 +8742,7 @@
           <p:cNvPr id="14" name="p14-map-r1-2">
             <a:extLst xmlns:a="http://schemas.openxmlformats.org/drawingml/2006/main">
               <a:ext uri="{FF2B5EF4-FFF2-40B4-BE49-F238E27FC236}">
-                <a16:creationId xmlns:a16="http://schemas.microsoft.com/office/drawing/2014/main" id="{0E8C0A1C-EBD3-4D8A-B8DF-5D6211A7B8D0}"/>
+                <a16:creationId xmlns:a16="http://schemas.microsoft.com/office/drawing/2014/main" id="{5D91277E-F4E8-44CE-A332-188257B4DE9E}"/>
               </a:ext>
             </a:extLst>
           </p:cNvPr>
@@ -8758,7 +8803,7 @@
           <p:cNvPr id="15" name="p14-map-r2-0">
             <a:extLst xmlns:a="http://schemas.openxmlformats.org/drawingml/2006/main">
               <a:ext uri="{FF2B5EF4-FFF2-40B4-BE49-F238E27FC236}">
-                <a16:creationId xmlns:a16="http://schemas.microsoft.com/office/drawing/2014/main" id="{5BE0717F-0E24-4F24-AC43-1FF0A91258FF}"/>
+                <a16:creationId xmlns:a16="http://schemas.microsoft.com/office/drawing/2014/main" id="{1ABCCE81-0C43-4F5D-B6E4-448C8F1FD5F7}"/>
               </a:ext>
             </a:extLst>
           </p:cNvPr>
@@ -8819,7 +8864,7 @@
           <p:cNvPr id="16" name="p14-map-r2-1">
             <a:extLst xmlns:a="http://schemas.openxmlformats.org/drawingml/2006/main">
               <a:ext uri="{FF2B5EF4-FFF2-40B4-BE49-F238E27FC236}">
-                <a16:creationId xmlns:a16="http://schemas.microsoft.com/office/drawing/2014/main" id="{28E12065-1C97-420F-BD13-0FEB35CAADD1}"/>
+                <a16:creationId xmlns:a16="http://schemas.microsoft.com/office/drawing/2014/main" id="{023EE682-2F68-4D98-87DA-F0AF69386C4C}"/>
               </a:ext>
             </a:extLst>
           </p:cNvPr>
@@ -8880,7 +8925,7 @@
           <p:cNvPr id="17" name="p14-map-r2-2">
             <a:extLst xmlns:a="http://schemas.openxmlformats.org/drawingml/2006/main">
               <a:ext uri="{FF2B5EF4-FFF2-40B4-BE49-F238E27FC236}">
-                <a16:creationId xmlns:a16="http://schemas.microsoft.com/office/drawing/2014/main" id="{7DEEAF75-A367-4886-B33F-B74B5B1C1AD0}"/>
+                <a16:creationId xmlns:a16="http://schemas.microsoft.com/office/drawing/2014/main" id="{F3D2CFAE-911E-4C80-9B1E-4A805CEB6A0E}"/>
               </a:ext>
             </a:extLst>
           </p:cNvPr>
@@ -8941,7 +8986,7 @@
           <p:cNvPr id="18" name="p14-map-r3-0">
             <a:extLst xmlns:a="http://schemas.openxmlformats.org/drawingml/2006/main">
               <a:ext uri="{FF2B5EF4-FFF2-40B4-BE49-F238E27FC236}">
-                <a16:creationId xmlns:a16="http://schemas.microsoft.com/office/drawing/2014/main" id="{BD2D2375-786A-400D-9943-7040B5A51487}"/>
+                <a16:creationId xmlns:a16="http://schemas.microsoft.com/office/drawing/2014/main" id="{7DC1491F-6F1D-4B30-A4FB-3B48F924C7DE}"/>
               </a:ext>
             </a:extLst>
           </p:cNvPr>
@@ -9002,7 +9047,7 @@
           <p:cNvPr id="19" name="p14-map-r3-1">
             <a:extLst xmlns:a="http://schemas.openxmlformats.org/drawingml/2006/main">
               <a:ext uri="{FF2B5EF4-FFF2-40B4-BE49-F238E27FC236}">
-                <a16:creationId xmlns:a16="http://schemas.microsoft.com/office/drawing/2014/main" id="{CB95ED3E-8C6E-4A54-95CE-AA1EE8FA4817}"/>
+                <a16:creationId xmlns:a16="http://schemas.microsoft.com/office/drawing/2014/main" id="{A1768933-2363-4F4E-99A8-2EC641BC925E}"/>
               </a:ext>
             </a:extLst>
           </p:cNvPr>
@@ -9063,7 +9108,7 @@
           <p:cNvPr id="20" name="p14-map-r3-2">
             <a:extLst xmlns:a="http://schemas.openxmlformats.org/drawingml/2006/main">
               <a:ext uri="{FF2B5EF4-FFF2-40B4-BE49-F238E27FC236}">
-                <a16:creationId xmlns:a16="http://schemas.microsoft.com/office/drawing/2014/main" id="{05110549-B77D-485F-A082-D571C9E49ACE}"/>
+                <a16:creationId xmlns:a16="http://schemas.microsoft.com/office/drawing/2014/main" id="{81C8767C-CFA6-4CE7-9437-BC7AEC5081B3}"/>
               </a:ext>
             </a:extLst>
           </p:cNvPr>
@@ -9124,7 +9169,7 @@
           <p:cNvPr id="21" name="p14-new-title">
             <a:extLst xmlns:a="http://schemas.openxmlformats.org/drawingml/2006/main">
               <a:ext uri="{FF2B5EF4-FFF2-40B4-BE49-F238E27FC236}">
-                <a16:creationId xmlns:a16="http://schemas.microsoft.com/office/drawing/2014/main" id="{173D4D58-DE5E-4F77-821D-01E77B453F32}"/>
+                <a16:creationId xmlns:a16="http://schemas.microsoft.com/office/drawing/2014/main" id="{A465C6F6-7479-4731-A29E-59C834683791}"/>
               </a:ext>
             </a:extLst>
           </p:cNvPr>
@@ -9177,7 +9222,7 @@
           <p:cNvPr id="22" name="p14-new">
             <a:extLst xmlns:a="http://schemas.openxmlformats.org/drawingml/2006/main">
               <a:ext uri="{FF2B5EF4-FFF2-40B4-BE49-F238E27FC236}">
-                <a16:creationId xmlns:a16="http://schemas.microsoft.com/office/drawing/2014/main" id="{B4C5482D-3B5E-4392-8C82-96EE5018199B}"/>
+                <a16:creationId xmlns:a16="http://schemas.microsoft.com/office/drawing/2014/main" id="{E275F0C0-E4C3-4DDA-BA38-373297DE2BF3}"/>
               </a:ext>
             </a:extLst>
           </p:cNvPr>
@@ -9232,7 +9277,7 @@
           <p:cNvPr id="23" name="p14-bottom">
             <a:extLst xmlns:a="http://schemas.openxmlformats.org/drawingml/2006/main">
               <a:ext uri="{FF2B5EF4-FFF2-40B4-BE49-F238E27FC236}">
-                <a16:creationId xmlns:a16="http://schemas.microsoft.com/office/drawing/2014/main" id="{09778A7C-09C4-41BE-AB7C-404B5856AB5C}"/>
+                <a16:creationId xmlns:a16="http://schemas.microsoft.com/office/drawing/2014/main" id="{86536815-86F8-4141-821B-B9810F5EE4DF}"/>
               </a:ext>
             </a:extLst>
           </p:cNvPr>
@@ -9379,7 +9424,7 @@
           <p:cNvPr id="6" name="p15-n-0">
             <a:extLst xmlns:a="http://schemas.openxmlformats.org/drawingml/2006/main">
               <a:ext uri="{FF2B5EF4-FFF2-40B4-BE49-F238E27FC236}">
-                <a16:creationId xmlns:a16="http://schemas.microsoft.com/office/drawing/2014/main" id="{52BDAE00-B4E3-4FA3-978C-405E2B55CDB8}"/>
+                <a16:creationId xmlns:a16="http://schemas.microsoft.com/office/drawing/2014/main" id="{7E875042-5F86-45EE-9B69-FFE4E06069D6}"/>
               </a:ext>
             </a:extLst>
           </p:cNvPr>
@@ -9436,7 +9481,7 @@
           <p:cNvPr id="7" name="p15-g-0">
             <a:extLst xmlns:a="http://schemas.openxmlformats.org/drawingml/2006/main">
               <a:ext uri="{FF2B5EF4-FFF2-40B4-BE49-F238E27FC236}">
-                <a16:creationId xmlns:a16="http://schemas.microsoft.com/office/drawing/2014/main" id="{0DBA15E4-D742-4A90-A029-CB066ABA31BB}"/>
+                <a16:creationId xmlns:a16="http://schemas.microsoft.com/office/drawing/2014/main" id="{7591E100-0CED-4873-9DD6-6DF3115917A9}"/>
               </a:ext>
             </a:extLst>
           </p:cNvPr>
@@ -9495,7 +9540,7 @@
           <p:cNvPr id="8" name="p15-n-1">
             <a:extLst xmlns:a="http://schemas.openxmlformats.org/drawingml/2006/main">
               <a:ext uri="{FF2B5EF4-FFF2-40B4-BE49-F238E27FC236}">
-                <a16:creationId xmlns:a16="http://schemas.microsoft.com/office/drawing/2014/main" id="{55E5B220-E8EA-442E-A41A-9539740407C7}"/>
+                <a16:creationId xmlns:a16="http://schemas.microsoft.com/office/drawing/2014/main" id="{201148DB-C491-4443-9A77-E6CAC0A27EE2}"/>
               </a:ext>
             </a:extLst>
           </p:cNvPr>
@@ -9552,7 +9597,7 @@
           <p:cNvPr id="9" name="p15-g-1">
             <a:extLst xmlns:a="http://schemas.openxmlformats.org/drawingml/2006/main">
               <a:ext uri="{FF2B5EF4-FFF2-40B4-BE49-F238E27FC236}">
-                <a16:creationId xmlns:a16="http://schemas.microsoft.com/office/drawing/2014/main" id="{FCC21AE3-79CA-40D6-8914-B1F7F223E1E9}"/>
+                <a16:creationId xmlns:a16="http://schemas.microsoft.com/office/drawing/2014/main" id="{EDB7E98E-1585-4979-8DCE-F94F4D8E0626}"/>
               </a:ext>
             </a:extLst>
           </p:cNvPr>
@@ -9611,7 +9656,7 @@
           <p:cNvPr id="10" name="p15-n-2">
             <a:extLst xmlns:a="http://schemas.openxmlformats.org/drawingml/2006/main">
               <a:ext uri="{FF2B5EF4-FFF2-40B4-BE49-F238E27FC236}">
-                <a16:creationId xmlns:a16="http://schemas.microsoft.com/office/drawing/2014/main" id="{53B3E3E1-06D8-4BC5-A875-AF29F904B1E7}"/>
+                <a16:creationId xmlns:a16="http://schemas.microsoft.com/office/drawing/2014/main" id="{B9EA6223-57FB-4D1F-9B44-E55D9B18DCEF}"/>
               </a:ext>
             </a:extLst>
           </p:cNvPr>
@@ -9668,7 +9713,7 @@
           <p:cNvPr id="11" name="p15-g-2">
             <a:extLst xmlns:a="http://schemas.openxmlformats.org/drawingml/2006/main">
               <a:ext uri="{FF2B5EF4-FFF2-40B4-BE49-F238E27FC236}">
-                <a16:creationId xmlns:a16="http://schemas.microsoft.com/office/drawing/2014/main" id="{9238896E-E172-4EFE-BE21-C15A8C716FE6}"/>
+                <a16:creationId xmlns:a16="http://schemas.microsoft.com/office/drawing/2014/main" id="{90A1F1E9-6979-44A2-A288-6726F1AAD0EE}"/>
               </a:ext>
             </a:extLst>
           </p:cNvPr>
@@ -9727,7 +9772,7 @@
           <p:cNvPr id="12" name="p15-n-3">
             <a:extLst xmlns:a="http://schemas.openxmlformats.org/drawingml/2006/main">
               <a:ext uri="{FF2B5EF4-FFF2-40B4-BE49-F238E27FC236}">
-                <a16:creationId xmlns:a16="http://schemas.microsoft.com/office/drawing/2014/main" id="{50965312-7B7C-4240-968E-56D3DE85F5F2}"/>
+                <a16:creationId xmlns:a16="http://schemas.microsoft.com/office/drawing/2014/main" id="{599FD449-0836-4B75-8615-01EC4CFDF518}"/>
               </a:ext>
             </a:extLst>
           </p:cNvPr>
@@ -9784,7 +9829,7 @@
           <p:cNvPr id="13" name="p15-g-3">
             <a:extLst xmlns:a="http://schemas.openxmlformats.org/drawingml/2006/main">
               <a:ext uri="{FF2B5EF4-FFF2-40B4-BE49-F238E27FC236}">
-                <a16:creationId xmlns:a16="http://schemas.microsoft.com/office/drawing/2014/main" id="{3CFCC917-D3B3-4D2B-A954-A9ABE95E68B5}"/>
+                <a16:creationId xmlns:a16="http://schemas.microsoft.com/office/drawing/2014/main" id="{94F2A8C1-E13C-414A-9A70-3E3250910E8D}"/>
               </a:ext>
             </a:extLst>
           </p:cNvPr>
@@ -9843,7 +9888,7 @@
           <p:cNvPr id="14" name="p15-n-4">
             <a:extLst xmlns:a="http://schemas.openxmlformats.org/drawingml/2006/main">
               <a:ext uri="{FF2B5EF4-FFF2-40B4-BE49-F238E27FC236}">
-                <a16:creationId xmlns:a16="http://schemas.microsoft.com/office/drawing/2014/main" id="{35DCBD7A-DF6C-4192-AEFB-2B2335A0C2AD}"/>
+                <a16:creationId xmlns:a16="http://schemas.microsoft.com/office/drawing/2014/main" id="{3CD8291D-A949-4D33-B4C6-5E0A12A95C2A}"/>
               </a:ext>
             </a:extLst>
           </p:cNvPr>
@@ -9900,7 +9945,7 @@
           <p:cNvPr id="15" name="p15-g-4">
             <a:extLst xmlns:a="http://schemas.openxmlformats.org/drawingml/2006/main">
               <a:ext uri="{FF2B5EF4-FFF2-40B4-BE49-F238E27FC236}">
-                <a16:creationId xmlns:a16="http://schemas.microsoft.com/office/drawing/2014/main" id="{BCFFFA34-BD56-4D21-852C-D5841694BDE9}"/>
+                <a16:creationId xmlns:a16="http://schemas.microsoft.com/office/drawing/2014/main" id="{E5252B74-598A-496A-95FB-2C1BC91239FD}"/>
               </a:ext>
             </a:extLst>
           </p:cNvPr>
@@ -9959,7 +10004,7 @@
           <p:cNvPr id="16" name="p15-n-5">
             <a:extLst xmlns:a="http://schemas.openxmlformats.org/drawingml/2006/main">
               <a:ext uri="{FF2B5EF4-FFF2-40B4-BE49-F238E27FC236}">
-                <a16:creationId xmlns:a16="http://schemas.microsoft.com/office/drawing/2014/main" id="{7DD01C41-ED0C-473C-908C-43D5DEB48B4D}"/>
+                <a16:creationId xmlns:a16="http://schemas.microsoft.com/office/drawing/2014/main" id="{824918DC-54FC-4605-A5C1-F01019B81990}"/>
               </a:ext>
             </a:extLst>
           </p:cNvPr>
@@ -10016,7 +10061,7 @@
           <p:cNvPr id="17" name="p15-g-5">
             <a:extLst xmlns:a="http://schemas.openxmlformats.org/drawingml/2006/main">
               <a:ext uri="{FF2B5EF4-FFF2-40B4-BE49-F238E27FC236}">
-                <a16:creationId xmlns:a16="http://schemas.microsoft.com/office/drawing/2014/main" id="{3190B755-201E-4B3C-89CB-0020BE7ECCD9}"/>
+                <a16:creationId xmlns:a16="http://schemas.microsoft.com/office/drawing/2014/main" id="{0F55299B-D614-4706-953F-D4E53D0DB69A}"/>
               </a:ext>
             </a:extLst>
           </p:cNvPr>
@@ -10075,7 +10120,7 @@
           <p:cNvPr id="18" name="p15-n-6">
             <a:extLst xmlns:a="http://schemas.openxmlformats.org/drawingml/2006/main">
               <a:ext uri="{FF2B5EF4-FFF2-40B4-BE49-F238E27FC236}">
-                <a16:creationId xmlns:a16="http://schemas.microsoft.com/office/drawing/2014/main" id="{4448C351-4378-440F-B87C-A030E188D482}"/>
+                <a16:creationId xmlns:a16="http://schemas.microsoft.com/office/drawing/2014/main" id="{837EE9A0-9569-403A-8709-D75B723A07D2}"/>
               </a:ext>
             </a:extLst>
           </p:cNvPr>
@@ -10132,7 +10177,7 @@
           <p:cNvPr id="19" name="p15-g-6">
             <a:extLst xmlns:a="http://schemas.openxmlformats.org/drawingml/2006/main">
               <a:ext uri="{FF2B5EF4-FFF2-40B4-BE49-F238E27FC236}">
-                <a16:creationId xmlns:a16="http://schemas.microsoft.com/office/drawing/2014/main" id="{6A929B13-E30D-42D6-B444-7E8AC9EF446D}"/>
+                <a16:creationId xmlns:a16="http://schemas.microsoft.com/office/drawing/2014/main" id="{ED566B1A-1A66-4552-BB08-286FA4B090BD}"/>
               </a:ext>
             </a:extLst>
           </p:cNvPr>
@@ -10191,7 +10236,7 @@
           <p:cNvPr id="20" name="p15-n-7">
             <a:extLst xmlns:a="http://schemas.openxmlformats.org/drawingml/2006/main">
               <a:ext uri="{FF2B5EF4-FFF2-40B4-BE49-F238E27FC236}">
-                <a16:creationId xmlns:a16="http://schemas.microsoft.com/office/drawing/2014/main" id="{9EE85293-4D4D-4DBF-8A25-5B003FBA5096}"/>
+                <a16:creationId xmlns:a16="http://schemas.microsoft.com/office/drawing/2014/main" id="{FCE25BD8-CDF3-4631-A412-4808592F1E2A}"/>
               </a:ext>
             </a:extLst>
           </p:cNvPr>
@@ -10248,7 +10293,7 @@
           <p:cNvPr id="21" name="p15-g-7">
             <a:extLst xmlns:a="http://schemas.openxmlformats.org/drawingml/2006/main">
               <a:ext uri="{FF2B5EF4-FFF2-40B4-BE49-F238E27FC236}">
-                <a16:creationId xmlns:a16="http://schemas.microsoft.com/office/drawing/2014/main" id="{1B105996-AFE7-43DF-9D83-2A4A270D0CB0}"/>
+                <a16:creationId xmlns:a16="http://schemas.microsoft.com/office/drawing/2014/main" id="{61D68D2C-C34D-4E2A-BB2E-2A94B71A0927}"/>
               </a:ext>
             </a:extLst>
           </p:cNvPr>
@@ -10307,7 +10352,7 @@
           <p:cNvPr id="22" name="p15-scope">
             <a:extLst xmlns:a="http://schemas.openxmlformats.org/drawingml/2006/main">
               <a:ext uri="{FF2B5EF4-FFF2-40B4-BE49-F238E27FC236}">
-                <a16:creationId xmlns:a16="http://schemas.microsoft.com/office/drawing/2014/main" id="{6D531A7E-3D51-4CE2-A5CC-3AB917F1ED0A}"/>
+                <a16:creationId xmlns:a16="http://schemas.microsoft.com/office/drawing/2014/main" id="{281B9E2F-0077-44F3-A596-2780D9030930}"/>
               </a:ext>
             </a:extLst>
           </p:cNvPr>
@@ -10456,7 +10501,7 @@
           <p:cNvPr id="6" name="p16-j2-title">
             <a:extLst xmlns:a="http://schemas.openxmlformats.org/drawingml/2006/main">
               <a:ext uri="{FF2B5EF4-FFF2-40B4-BE49-F238E27FC236}">
-                <a16:creationId xmlns:a16="http://schemas.microsoft.com/office/drawing/2014/main" id="{45A4202D-91E7-4AC6-AEF9-BE36DA3C7FA4}"/>
+                <a16:creationId xmlns:a16="http://schemas.microsoft.com/office/drawing/2014/main" id="{D9B14429-C6FE-4ACC-8711-BDD18F18DF1B}"/>
               </a:ext>
             </a:extLst>
           </p:cNvPr>
@@ -10484,14 +10529,14 @@
           <a:lstStyle xmlns:a="http://schemas.openxmlformats.org/drawingml/2006/main"/>
           <a:p xmlns:a="http://schemas.openxmlformats.org/drawingml/2006/main">
             <a:pPr algn="ctr">
-              <a:defRPr sz="1875" b="1">
+              <a:defRPr sz="1800" b="1">
                 <a:solidFill>
                   <a:srgbClr val="C8161E"/>
                 </a:solidFill>
               </a:defRPr>
             </a:pPr>
             <a:r>
-              <a:rPr sz="1875" b="1">
+              <a:rPr sz="1800" b="1">
                 <a:solidFill>
                   <a:srgbClr val="C8161E"/>
                 </a:solidFill>
@@ -10499,7 +10544,7 @@
                 <a:ea typeface="Microsoft YaHei"/>
                 <a:cs typeface="Microsoft YaHei"/>
               </a:rPr>
-              <a:t>J2：选择朴素 baseline，而不是强 baseline</a:t>
+              <a:t>虚构教学判断 J2：选朴素 baseline</a:t>
             </a:r>
           </a:p>
         </p:txBody>
@@ -10509,7 +10554,7 @@
           <p:cNvPr id="7" name="p16-j2-h-0">
             <a:extLst xmlns:a="http://schemas.openxmlformats.org/drawingml/2006/main">
               <a:ext uri="{FF2B5EF4-FFF2-40B4-BE49-F238E27FC236}">
-                <a16:creationId xmlns:a16="http://schemas.microsoft.com/office/drawing/2014/main" id="{2FD79501-01D3-48D0-BCFD-B83BBA663284}"/>
+                <a16:creationId xmlns:a16="http://schemas.microsoft.com/office/drawing/2014/main" id="{728CC9BF-DAB8-4DA4-BAFA-C88BBB632029}"/>
               </a:ext>
             </a:extLst>
           </p:cNvPr>
@@ -10564,7 +10609,7 @@
           <p:cNvPr id="8" name="p16-j2-h-1">
             <a:extLst xmlns:a="http://schemas.openxmlformats.org/drawingml/2006/main">
               <a:ext uri="{FF2B5EF4-FFF2-40B4-BE49-F238E27FC236}">
-                <a16:creationId xmlns:a16="http://schemas.microsoft.com/office/drawing/2014/main" id="{BBA15E23-B8B0-4EDB-AE30-A6F2E6DFA573}"/>
+                <a16:creationId xmlns:a16="http://schemas.microsoft.com/office/drawing/2014/main" id="{D7B757A1-68C1-4E1A-88A7-3A4B2AEC0EB6}"/>
               </a:ext>
             </a:extLst>
           </p:cNvPr>
@@ -10619,7 +10664,7 @@
           <p:cNvPr id="9" name="p16-j2-r0-0">
             <a:extLst xmlns:a="http://schemas.openxmlformats.org/drawingml/2006/main">
               <a:ext uri="{FF2B5EF4-FFF2-40B4-BE49-F238E27FC236}">
-                <a16:creationId xmlns:a16="http://schemas.microsoft.com/office/drawing/2014/main" id="{7022CB12-6F68-4D53-B153-54D957FD24A2}"/>
+                <a16:creationId xmlns:a16="http://schemas.microsoft.com/office/drawing/2014/main" id="{223AD9EB-9A3C-4D91-B951-0701AC080935}"/>
               </a:ext>
             </a:extLst>
           </p:cNvPr>
@@ -10655,14 +10700,14 @@
                 <a:spcPct val="108000"/>
               </a:lnSpc>
               <a:buNone/>
-              <a:defRPr sz="1275" b="1">
+              <a:defRPr sz="1350" b="1">
                 <a:solidFill>
                   <a:srgbClr val="C8161E"/>
                 </a:solidFill>
               </a:defRPr>
             </a:pPr>
             <a:r>
-              <a:rPr sz="1275" b="1">
+              <a:rPr sz="1350" b="1">
                 <a:solidFill>
                   <a:srgbClr val="C8161E"/>
                 </a:solidFill>
@@ -10680,7 +10725,7 @@
           <p:cNvPr id="10" name="p16-j2-r0-1">
             <a:extLst xmlns:a="http://schemas.openxmlformats.org/drawingml/2006/main">
               <a:ext uri="{FF2B5EF4-FFF2-40B4-BE49-F238E27FC236}">
-                <a16:creationId xmlns:a16="http://schemas.microsoft.com/office/drawing/2014/main" id="{27085893-6D13-4FEC-927C-E4C44CC25EF8}"/>
+                <a16:creationId xmlns:a16="http://schemas.microsoft.com/office/drawing/2014/main" id="{B8A07EC6-AF01-4FDB-8B08-5433FB4CBE2D}"/>
               </a:ext>
             </a:extLst>
           </p:cNvPr>
@@ -10716,14 +10761,14 @@
                 <a:spcPct val="108000"/>
               </a:lnSpc>
               <a:buNone/>
-              <a:defRPr sz="1275" b="0">
+              <a:defRPr sz="1350" b="0">
                 <a:solidFill>
                   <a:srgbClr val="263746"/>
                 </a:solidFill>
               </a:defRPr>
             </a:pPr>
             <a:r>
-              <a:rPr sz="1275" b="0">
+              <a:rPr sz="1350" b="0">
                 <a:solidFill>
                   <a:srgbClr val="263746"/>
                 </a:solidFill>
@@ -10741,7 +10786,7 @@
           <p:cNvPr id="11" name="p16-j2-r1-0">
             <a:extLst xmlns:a="http://schemas.openxmlformats.org/drawingml/2006/main">
               <a:ext uri="{FF2B5EF4-FFF2-40B4-BE49-F238E27FC236}">
-                <a16:creationId xmlns:a16="http://schemas.microsoft.com/office/drawing/2014/main" id="{0AC0F83D-96ED-4F1B-808B-C9D3D797AEF6}"/>
+                <a16:creationId xmlns:a16="http://schemas.microsoft.com/office/drawing/2014/main" id="{022545AF-5A86-4C36-A836-FF9F004BD791}"/>
               </a:ext>
             </a:extLst>
           </p:cNvPr>
@@ -10777,14 +10822,14 @@
                 <a:spcPct val="108000"/>
               </a:lnSpc>
               <a:buNone/>
-              <a:defRPr sz="1275" b="1">
+              <a:defRPr sz="1350" b="1">
                 <a:solidFill>
                   <a:srgbClr val="C8161E"/>
                 </a:solidFill>
               </a:defRPr>
             </a:pPr>
             <a:r>
-              <a:rPr sz="1275" b="1">
+              <a:rPr sz="1350" b="1">
                 <a:solidFill>
                   <a:srgbClr val="C8161E"/>
                 </a:solidFill>
@@ -10802,7 +10847,7 @@
           <p:cNvPr id="12" name="p16-j2-r1-1">
             <a:extLst xmlns:a="http://schemas.openxmlformats.org/drawingml/2006/main">
               <a:ext uri="{FF2B5EF4-FFF2-40B4-BE49-F238E27FC236}">
-                <a16:creationId xmlns:a16="http://schemas.microsoft.com/office/drawing/2014/main" id="{A1C20F4F-7D0A-4743-B9BB-FE086C7A5375}"/>
+                <a16:creationId xmlns:a16="http://schemas.microsoft.com/office/drawing/2014/main" id="{5203B42E-B844-4BAA-872D-89AD3E845453}"/>
               </a:ext>
             </a:extLst>
           </p:cNvPr>
@@ -10838,14 +10883,14 @@
                 <a:spcPct val="108000"/>
               </a:lnSpc>
               <a:buNone/>
-              <a:defRPr sz="1275" b="0">
+              <a:defRPr sz="1350" b="0">
                 <a:solidFill>
                   <a:srgbClr val="263746"/>
                 </a:solidFill>
               </a:defRPr>
             </a:pPr>
             <a:r>
-              <a:rPr sz="1275" b="0">
+              <a:rPr sz="1350" b="0">
                 <a:solidFill>
                   <a:srgbClr val="263746"/>
                 </a:solidFill>
@@ -10863,7 +10908,7 @@
           <p:cNvPr id="13" name="p16-j2-r2-0">
             <a:extLst xmlns:a="http://schemas.openxmlformats.org/drawingml/2006/main">
               <a:ext uri="{FF2B5EF4-FFF2-40B4-BE49-F238E27FC236}">
-                <a16:creationId xmlns:a16="http://schemas.microsoft.com/office/drawing/2014/main" id="{A12D1872-69CD-4A59-899E-310A1343590F}"/>
+                <a16:creationId xmlns:a16="http://schemas.microsoft.com/office/drawing/2014/main" id="{13EB585A-00BE-4763-8D69-E8ED788C97DB}"/>
               </a:ext>
             </a:extLst>
           </p:cNvPr>
@@ -10899,14 +10944,14 @@
                 <a:spcPct val="108000"/>
               </a:lnSpc>
               <a:buNone/>
-              <a:defRPr sz="1275" b="1">
+              <a:defRPr sz="1350" b="1">
                 <a:solidFill>
                   <a:srgbClr val="C8161E"/>
                 </a:solidFill>
               </a:defRPr>
             </a:pPr>
             <a:r>
-              <a:rPr sz="1275" b="1">
+              <a:rPr sz="1350" b="1">
                 <a:solidFill>
                   <a:srgbClr val="C8161E"/>
                 </a:solidFill>
@@ -10924,7 +10969,7 @@
           <p:cNvPr id="14" name="p16-j2-r2-1">
             <a:extLst xmlns:a="http://schemas.openxmlformats.org/drawingml/2006/main">
               <a:ext uri="{FF2B5EF4-FFF2-40B4-BE49-F238E27FC236}">
-                <a16:creationId xmlns:a16="http://schemas.microsoft.com/office/drawing/2014/main" id="{F0024579-0E62-47BB-BCD1-E1E6B92EB3E2}"/>
+                <a16:creationId xmlns:a16="http://schemas.microsoft.com/office/drawing/2014/main" id="{B14092E0-829D-4C88-A7B5-C0464EDCCA04}"/>
               </a:ext>
             </a:extLst>
           </p:cNvPr>
@@ -10960,14 +11005,14 @@
                 <a:spcPct val="108000"/>
               </a:lnSpc>
               <a:buNone/>
-              <a:defRPr sz="1275" b="0">
+              <a:defRPr sz="1350" b="0">
                 <a:solidFill>
                   <a:srgbClr val="263746"/>
                 </a:solidFill>
               </a:defRPr>
             </a:pPr>
             <a:r>
-              <a:rPr sz="1275" b="0">
+              <a:rPr sz="1350" b="0">
                 <a:solidFill>
                   <a:srgbClr val="263746"/>
                 </a:solidFill>
@@ -10985,7 +11030,7 @@
           <p:cNvPr id="15" name="p16-j2-r3-0">
             <a:extLst xmlns:a="http://schemas.openxmlformats.org/drawingml/2006/main">
               <a:ext uri="{FF2B5EF4-FFF2-40B4-BE49-F238E27FC236}">
-                <a16:creationId xmlns:a16="http://schemas.microsoft.com/office/drawing/2014/main" id="{21E68B4E-F148-4AB8-AEEA-ECAAFC576BF5}"/>
+                <a16:creationId xmlns:a16="http://schemas.microsoft.com/office/drawing/2014/main" id="{CF61474F-8BE0-452E-A07F-4D963F0AE565}"/>
               </a:ext>
             </a:extLst>
           </p:cNvPr>
@@ -11021,14 +11066,14 @@
                 <a:spcPct val="108000"/>
               </a:lnSpc>
               <a:buNone/>
-              <a:defRPr sz="1275" b="1">
+              <a:defRPr sz="1350" b="1">
                 <a:solidFill>
                   <a:srgbClr val="C8161E"/>
                 </a:solidFill>
               </a:defRPr>
             </a:pPr>
             <a:r>
-              <a:rPr sz="1275" b="1">
+              <a:rPr sz="1350" b="1">
                 <a:solidFill>
                   <a:srgbClr val="C8161E"/>
                 </a:solidFill>
@@ -11046,7 +11091,7 @@
           <p:cNvPr id="16" name="p16-j2-r3-1">
             <a:extLst xmlns:a="http://schemas.openxmlformats.org/drawingml/2006/main">
               <a:ext uri="{FF2B5EF4-FFF2-40B4-BE49-F238E27FC236}">
-                <a16:creationId xmlns:a16="http://schemas.microsoft.com/office/drawing/2014/main" id="{FDF7ACFA-87BD-4B66-A65B-03AE57F76DF4}"/>
+                <a16:creationId xmlns:a16="http://schemas.microsoft.com/office/drawing/2014/main" id="{696BD5C1-7E8A-433A-83B8-EF0D226003F0}"/>
               </a:ext>
             </a:extLst>
           </p:cNvPr>
@@ -11082,14 +11127,14 @@
                 <a:spcPct val="108000"/>
               </a:lnSpc>
               <a:buNone/>
-              <a:defRPr sz="1275" b="0">
+              <a:defRPr sz="1350" b="0">
                 <a:solidFill>
                   <a:srgbClr val="263746"/>
                 </a:solidFill>
               </a:defRPr>
             </a:pPr>
             <a:r>
-              <a:rPr sz="1275" b="0">
+              <a:rPr sz="1350" b="0">
                 <a:solidFill>
                   <a:srgbClr val="263746"/>
                 </a:solidFill>
@@ -11107,7 +11152,7 @@
           <p:cNvPr id="17" name="p16-j2-r4-0">
             <a:extLst xmlns:a="http://schemas.openxmlformats.org/drawingml/2006/main">
               <a:ext uri="{FF2B5EF4-FFF2-40B4-BE49-F238E27FC236}">
-                <a16:creationId xmlns:a16="http://schemas.microsoft.com/office/drawing/2014/main" id="{C6370992-CC64-40FA-A33B-638FD61D46AA}"/>
+                <a16:creationId xmlns:a16="http://schemas.microsoft.com/office/drawing/2014/main" id="{00AF2C7B-3E4E-4F7D-9C37-56E51BE27A41}"/>
               </a:ext>
             </a:extLst>
           </p:cNvPr>
@@ -11143,14 +11188,14 @@
                 <a:spcPct val="108000"/>
               </a:lnSpc>
               <a:buNone/>
-              <a:defRPr sz="1275" b="1">
+              <a:defRPr sz="1350" b="1">
                 <a:solidFill>
                   <a:srgbClr val="C8161E"/>
                 </a:solidFill>
               </a:defRPr>
             </a:pPr>
             <a:r>
-              <a:rPr sz="1275" b="1">
+              <a:rPr sz="1350" b="1">
                 <a:solidFill>
                   <a:srgbClr val="C8161E"/>
                 </a:solidFill>
@@ -11168,7 +11213,7 @@
           <p:cNvPr id="18" name="p16-j2-r4-1">
             <a:extLst xmlns:a="http://schemas.openxmlformats.org/drawingml/2006/main">
               <a:ext uri="{FF2B5EF4-FFF2-40B4-BE49-F238E27FC236}">
-                <a16:creationId xmlns:a16="http://schemas.microsoft.com/office/drawing/2014/main" id="{9F99DC8D-2413-4592-B0CC-649495194FE6}"/>
+                <a16:creationId xmlns:a16="http://schemas.microsoft.com/office/drawing/2014/main" id="{1977F2AF-A4EF-4AB7-8887-68D9FA91A667}"/>
               </a:ext>
             </a:extLst>
           </p:cNvPr>
@@ -11204,14 +11249,14 @@
                 <a:spcPct val="108000"/>
               </a:lnSpc>
               <a:buNone/>
-              <a:defRPr sz="1275" b="0">
+              <a:defRPr sz="1350" b="0">
                 <a:solidFill>
                   <a:srgbClr val="263746"/>
                 </a:solidFill>
               </a:defRPr>
             </a:pPr>
             <a:r>
-              <a:rPr sz="1275" b="0">
+              <a:rPr sz="1350" b="0">
                 <a:solidFill>
                   <a:srgbClr val="263746"/>
                 </a:solidFill>
@@ -11229,7 +11274,7 @@
           <p:cNvPr id="19" name="p16-peer-title">
             <a:extLst xmlns:a="http://schemas.openxmlformats.org/drawingml/2006/main">
               <a:ext uri="{FF2B5EF4-FFF2-40B4-BE49-F238E27FC236}">
-                <a16:creationId xmlns:a16="http://schemas.microsoft.com/office/drawing/2014/main" id="{9C07D848-309A-44CC-91AC-841E6C74671F}"/>
+                <a16:creationId xmlns:a16="http://schemas.microsoft.com/office/drawing/2014/main" id="{322BB108-2B46-429C-9424-04FADA59ECB7}"/>
               </a:ext>
             </a:extLst>
           </p:cNvPr>
@@ -11257,14 +11302,14 @@
           <a:lstStyle xmlns:a="http://schemas.openxmlformats.org/drawingml/2006/main"/>
           <a:p xmlns:a="http://schemas.openxmlformats.org/drawingml/2006/main">
             <a:pPr algn="ctr">
-              <a:defRPr sz="1875" b="1">
+              <a:defRPr sz="1725" b="1">
                 <a:solidFill>
                   <a:srgbClr val="18354E"/>
                 </a:solidFill>
               </a:defRPr>
             </a:pPr>
             <a:r>
-              <a:rPr sz="1875" b="1">
+              <a:rPr sz="1725" b="1">
                 <a:solidFill>
                   <a:srgbClr val="18354E"/>
                 </a:solidFill>
@@ -11272,7 +11317,7 @@
                 <a:ea typeface="Microsoft YaHei"/>
                 <a:cs typeface="Microsoft YaHei"/>
               </a:rPr>
-              <a:t>同伴反馈处理</a:t>
+              <a:t>虚构教学反馈处理</a:t>
             </a:r>
           </a:p>
         </p:txBody>
@@ -11282,7 +11327,7 @@
           <p:cNvPr id="20" name="p16-f-0">
             <a:extLst xmlns:a="http://schemas.openxmlformats.org/drawingml/2006/main">
               <a:ext uri="{FF2B5EF4-FFF2-40B4-BE49-F238E27FC236}">
-                <a16:creationId xmlns:a16="http://schemas.microsoft.com/office/drawing/2014/main" id="{9F54C485-5744-4272-9CEB-E72732F65180}"/>
+                <a16:creationId xmlns:a16="http://schemas.microsoft.com/office/drawing/2014/main" id="{8EDCD461-9414-4ABB-985D-0B0BB2D48A55}"/>
               </a:ext>
             </a:extLst>
           </p:cNvPr>
@@ -11337,7 +11382,7 @@
           <p:cNvPr id="21" name="p16-s-0">
             <a:extLst xmlns:a="http://schemas.openxmlformats.org/drawingml/2006/main">
               <a:ext uri="{FF2B5EF4-FFF2-40B4-BE49-F238E27FC236}">
-                <a16:creationId xmlns:a16="http://schemas.microsoft.com/office/drawing/2014/main" id="{F41BAA9B-C7EC-4B5B-878A-0FAC7AE7DEC8}"/>
+                <a16:creationId xmlns:a16="http://schemas.microsoft.com/office/drawing/2014/main" id="{A698B4A5-9B97-4C84-A4EF-E29D8CB56AF8}"/>
               </a:ext>
             </a:extLst>
           </p:cNvPr>
@@ -11367,14 +11412,14 @@
           <a:lstStyle xmlns:a="http://schemas.openxmlformats.org/drawingml/2006/main"/>
           <a:p xmlns:a="http://schemas.openxmlformats.org/drawingml/2006/main">
             <a:pPr algn="ctr">
-              <a:defRPr sz="1275" b="1">
+              <a:defRPr sz="1350" b="1">
                 <a:solidFill>
                   <a:srgbClr val="C8161E"/>
                 </a:solidFill>
               </a:defRPr>
             </a:pPr>
             <a:r>
-              <a:rPr sz="1275" b="1">
+              <a:rPr sz="1350" b="1">
                 <a:solidFill>
                   <a:srgbClr val="C8161E"/>
                 </a:solidFill>
@@ -11392,7 +11437,7 @@
           <p:cNvPr id="22" name="p16-f-1">
             <a:extLst xmlns:a="http://schemas.openxmlformats.org/drawingml/2006/main">
               <a:ext uri="{FF2B5EF4-FFF2-40B4-BE49-F238E27FC236}">
-                <a16:creationId xmlns:a16="http://schemas.microsoft.com/office/drawing/2014/main" id="{9313E240-6A23-4CF7-A202-8F2A16A1881E}"/>
+                <a16:creationId xmlns:a16="http://schemas.microsoft.com/office/drawing/2014/main" id="{969D0B59-A51B-4B7E-A438-3CA93C566D3F}"/>
               </a:ext>
             </a:extLst>
           </p:cNvPr>
@@ -11447,7 +11492,7 @@
           <p:cNvPr id="23" name="p16-s-1">
             <a:extLst xmlns:a="http://schemas.openxmlformats.org/drawingml/2006/main">
               <a:ext uri="{FF2B5EF4-FFF2-40B4-BE49-F238E27FC236}">
-                <a16:creationId xmlns:a16="http://schemas.microsoft.com/office/drawing/2014/main" id="{E8927455-40AE-413C-95F2-78B6A885C765}"/>
+                <a16:creationId xmlns:a16="http://schemas.microsoft.com/office/drawing/2014/main" id="{F25D56EC-E80B-4BD4-9B23-AF0A23427771}"/>
               </a:ext>
             </a:extLst>
           </p:cNvPr>
@@ -11477,14 +11522,14 @@
           <a:lstStyle xmlns:a="http://schemas.openxmlformats.org/drawingml/2006/main"/>
           <a:p xmlns:a="http://schemas.openxmlformats.org/drawingml/2006/main">
             <a:pPr algn="ctr">
-              <a:defRPr sz="1275" b="1">
+              <a:defRPr sz="1350" b="1">
                 <a:solidFill>
                   <a:srgbClr val="28745A"/>
                 </a:solidFill>
               </a:defRPr>
             </a:pPr>
             <a:r>
-              <a:rPr sz="1275" b="1">
+              <a:rPr sz="1350" b="1">
                 <a:solidFill>
                   <a:srgbClr val="28745A"/>
                 </a:solidFill>
@@ -11492,7 +11537,7 @@
                 <a:ea typeface="Microsoft YaHei"/>
                 <a:cs typeface="Microsoft YaHei"/>
               </a:rPr>
-              <a:t>采纳｜3 次 + 标准差</a:t>
+              <a:t>采纳｜事先写重复计划</a:t>
             </a:r>
           </a:p>
         </p:txBody>
@@ -11502,7 +11547,7 @@
           <p:cNvPr id="24" name="p16-f-2">
             <a:extLst xmlns:a="http://schemas.openxmlformats.org/drawingml/2006/main">
               <a:ext uri="{FF2B5EF4-FFF2-40B4-BE49-F238E27FC236}">
-                <a16:creationId xmlns:a16="http://schemas.microsoft.com/office/drawing/2014/main" id="{463381B4-3466-4DC5-AC74-0A2BB3756979}"/>
+                <a16:creationId xmlns:a16="http://schemas.microsoft.com/office/drawing/2014/main" id="{C191AAE8-5D84-41C6-B0E3-4AC8F9C95D20}"/>
               </a:ext>
             </a:extLst>
           </p:cNvPr>
@@ -11557,7 +11602,7 @@
           <p:cNvPr id="25" name="p16-s-2">
             <a:extLst xmlns:a="http://schemas.openxmlformats.org/drawingml/2006/main">
               <a:ext uri="{FF2B5EF4-FFF2-40B4-BE49-F238E27FC236}">
-                <a16:creationId xmlns:a16="http://schemas.microsoft.com/office/drawing/2014/main" id="{7B25CD1E-44DE-47D7-A90E-A8AD3A2BA948}"/>
+                <a16:creationId xmlns:a16="http://schemas.microsoft.com/office/drawing/2014/main" id="{4BFD1856-9FB1-4E7B-86C4-E893A790306C}"/>
               </a:ext>
             </a:extLst>
           </p:cNvPr>
@@ -11587,14 +11632,14 @@
           <a:lstStyle xmlns:a="http://schemas.openxmlformats.org/drawingml/2006/main"/>
           <a:p xmlns:a="http://schemas.openxmlformats.org/drawingml/2006/main">
             <a:pPr algn="ctr">
-              <a:defRPr sz="1275" b="1">
+              <a:defRPr sz="1350" b="1">
                 <a:solidFill>
                   <a:srgbClr val="A86C12"/>
                 </a:solidFill>
               </a:defRPr>
             </a:pPr>
             <a:r>
-              <a:rPr sz="1275" b="1">
+              <a:rPr sz="1350" b="1">
                 <a:solidFill>
                   <a:srgbClr val="A86C12"/>
                 </a:solidFill>
@@ -11612,7 +11657,7 @@
           <p:cNvPr id="26" name="p16-bottom">
             <a:extLst xmlns:a="http://schemas.openxmlformats.org/drawingml/2006/main">
               <a:ext uri="{FF2B5EF4-FFF2-40B4-BE49-F238E27FC236}">
-                <a16:creationId xmlns:a16="http://schemas.microsoft.com/office/drawing/2014/main" id="{98CA791E-37F4-440D-B8D1-5F849567AB7B}"/>
+                <a16:creationId xmlns:a16="http://schemas.microsoft.com/office/drawing/2014/main" id="{F92ECA8E-609F-40BB-A71F-0CCC9313119E}"/>
               </a:ext>
             </a:extLst>
           </p:cNvPr>
@@ -11761,19 +11806,19 @@
           <p:cNvPr id="6" name="p17-time">
             <a:extLst xmlns:a="http://schemas.openxmlformats.org/drawingml/2006/main">
               <a:ext uri="{FF2B5EF4-FFF2-40B4-BE49-F238E27FC236}">
-                <a16:creationId xmlns:a16="http://schemas.microsoft.com/office/drawing/2014/main" id="{7F78CEBD-4B93-4B01-A5B5-39EEFAF081A5}"/>
-              </a:ext>
-            </a:extLst>
-          </p:cNvPr>
-          <p:cNvSpPr>
-            <a:spLocks xmlns:a="http://schemas.openxmlformats.org/drawingml/2006/main" noGrp="1"/>
-          </p:cNvSpPr>
-          <p:nvPr/>
-        </p:nvSpPr>
-        <p:spPr>
-          <a:xfrm xmlns:a="http://schemas.openxmlformats.org/drawingml/2006/main">
-            <a:off x="8305800" y="857250"/>
-            <a:ext cx="3238500" cy="342900"/>
+                <a16:creationId xmlns:a16="http://schemas.microsoft.com/office/drawing/2014/main" id="{4E507AB8-E404-49A1-A930-1E37EAB3E31F}"/>
+              </a:ext>
+            </a:extLst>
+          </p:cNvPr>
+          <p:cNvSpPr>
+            <a:spLocks xmlns:a="http://schemas.openxmlformats.org/drawingml/2006/main" noGrp="1"/>
+          </p:cNvSpPr>
+          <p:nvPr/>
+        </p:nvSpPr>
+        <p:spPr>
+          <a:xfrm xmlns:a="http://schemas.openxmlformats.org/drawingml/2006/main">
+            <a:off x="8020050" y="857250"/>
+            <a:ext cx="3524250" cy="342900"/>
           </a:xfrm>
           <a:prstGeom xmlns:a="http://schemas.openxmlformats.org/drawingml/2006/main" prst="rect">
             <a:avLst/>
@@ -11789,14 +11834,14 @@
           <a:lstStyle xmlns:a="http://schemas.openxmlformats.org/drawingml/2006/main"/>
           <a:p xmlns:a="http://schemas.openxmlformats.org/drawingml/2006/main">
             <a:pPr algn="r">
-              <a:defRPr sz="1275" b="1">
+              <a:defRPr sz="1350" b="1">
                 <a:solidFill>
                   <a:srgbClr val="C8161E"/>
                 </a:solidFill>
               </a:defRPr>
             </a:pPr>
             <a:r>
-              <a:rPr sz="1275" b="1">
+              <a:rPr sz="1350" b="1">
                 <a:solidFill>
                   <a:srgbClr val="C8161E"/>
                 </a:solidFill>
@@ -11804,7 +11849,7 @@
                 <a:ea typeface="Microsoft YaHei"/>
                 <a:cs typeface="Microsoft YaHei"/>
               </a:rPr>
-              <a:t>52:00–60:00｜启动个人补全</a:t>
+              <a:t>40:00–60:00｜持续个人补全</a:t>
             </a:r>
           </a:p>
         </p:txBody>
@@ -11814,7 +11859,7 @@
           <p:cNvPr id="7" name="p17-n-0">
             <a:extLst xmlns:a="http://schemas.openxmlformats.org/drawingml/2006/main">
               <a:ext uri="{FF2B5EF4-FFF2-40B4-BE49-F238E27FC236}">
-                <a16:creationId xmlns:a16="http://schemas.microsoft.com/office/drawing/2014/main" id="{E7168834-DC6D-4EC1-B295-8705E8DFAEA8}"/>
+                <a16:creationId xmlns:a16="http://schemas.microsoft.com/office/drawing/2014/main" id="{E44F1852-D969-4A16-BB74-EBEEE51D9A14}"/>
               </a:ext>
             </a:extLst>
           </p:cNvPr>
@@ -11871,7 +11916,7 @@
           <p:cNvPr id="8" name="p17-t-0">
             <a:extLst xmlns:a="http://schemas.openxmlformats.org/drawingml/2006/main">
               <a:ext uri="{FF2B5EF4-FFF2-40B4-BE49-F238E27FC236}">
-                <a16:creationId xmlns:a16="http://schemas.microsoft.com/office/drawing/2014/main" id="{642B275A-EB71-4E56-9450-B58D4554DA4B}"/>
+                <a16:creationId xmlns:a16="http://schemas.microsoft.com/office/drawing/2014/main" id="{A80CC5AB-4647-497C-AC6B-58366B3B9951}"/>
               </a:ext>
             </a:extLst>
           </p:cNvPr>
@@ -11926,7 +11971,7 @@
           <p:cNvPr id="9" name="p17-n-1">
             <a:extLst xmlns:a="http://schemas.openxmlformats.org/drawingml/2006/main">
               <a:ext uri="{FF2B5EF4-FFF2-40B4-BE49-F238E27FC236}">
-                <a16:creationId xmlns:a16="http://schemas.microsoft.com/office/drawing/2014/main" id="{7574F507-6DEB-4639-8480-3114599BA13C}"/>
+                <a16:creationId xmlns:a16="http://schemas.microsoft.com/office/drawing/2014/main" id="{C57021BF-128A-48BB-86BA-48CD29A61716}"/>
               </a:ext>
             </a:extLst>
           </p:cNvPr>
@@ -11983,7 +12028,7 @@
           <p:cNvPr id="10" name="p17-t-1">
             <a:extLst xmlns:a="http://schemas.openxmlformats.org/drawingml/2006/main">
               <a:ext uri="{FF2B5EF4-FFF2-40B4-BE49-F238E27FC236}">
-                <a16:creationId xmlns:a16="http://schemas.microsoft.com/office/drawing/2014/main" id="{19D5170F-4239-496B-9EAF-FF5C32A3F4BF}"/>
+                <a16:creationId xmlns:a16="http://schemas.microsoft.com/office/drawing/2014/main" id="{7F1EA745-B4FE-4DDB-91B6-AEC07E735F55}"/>
               </a:ext>
             </a:extLst>
           </p:cNvPr>
@@ -12038,7 +12083,7 @@
           <p:cNvPr id="11" name="p17-n-2">
             <a:extLst xmlns:a="http://schemas.openxmlformats.org/drawingml/2006/main">
               <a:ext uri="{FF2B5EF4-FFF2-40B4-BE49-F238E27FC236}">
-                <a16:creationId xmlns:a16="http://schemas.microsoft.com/office/drawing/2014/main" id="{19A1D08E-38EE-45BF-A80A-0F8CF45AAC46}"/>
+                <a16:creationId xmlns:a16="http://schemas.microsoft.com/office/drawing/2014/main" id="{E5AC59A4-3A75-4F4A-8F2B-FAB25A4B637E}"/>
               </a:ext>
             </a:extLst>
           </p:cNvPr>
@@ -12095,7 +12140,7 @@
           <p:cNvPr id="12" name="p17-t-2">
             <a:extLst xmlns:a="http://schemas.openxmlformats.org/drawingml/2006/main">
               <a:ext uri="{FF2B5EF4-FFF2-40B4-BE49-F238E27FC236}">
-                <a16:creationId xmlns:a16="http://schemas.microsoft.com/office/drawing/2014/main" id="{87531649-AA36-4554-99C8-6566B8FA2BD5}"/>
+                <a16:creationId xmlns:a16="http://schemas.microsoft.com/office/drawing/2014/main" id="{15EAEBD9-0CDC-462E-BCF2-9ADB8C677956}"/>
               </a:ext>
             </a:extLst>
           </p:cNvPr>
@@ -12140,7 +12185,7 @@
                 <a:ea typeface="Microsoft YaHei"/>
                 <a:cs typeface="Microsoft YaHei"/>
               </a:rPr>
-              <a:t>写六类复现说明：齐到种子</a:t>
+              <a:t>写六类复现说明：种子或等价条件</a:t>
             </a:r>
           </a:p>
         </p:txBody>
@@ -12150,7 +12195,7 @@
           <p:cNvPr id="13" name="p17-n-3">
             <a:extLst xmlns:a="http://schemas.openxmlformats.org/drawingml/2006/main">
               <a:ext uri="{FF2B5EF4-FFF2-40B4-BE49-F238E27FC236}">
-                <a16:creationId xmlns:a16="http://schemas.microsoft.com/office/drawing/2014/main" id="{7A5E4669-6BF4-485E-959F-E1A91D344473}"/>
+                <a16:creationId xmlns:a16="http://schemas.microsoft.com/office/drawing/2014/main" id="{5C2CD8A7-2324-4B3E-9384-D5C052A89097}"/>
               </a:ext>
             </a:extLst>
           </p:cNvPr>
@@ -12207,7 +12252,7 @@
           <p:cNvPr id="14" name="p17-t-3">
             <a:extLst xmlns:a="http://schemas.openxmlformats.org/drawingml/2006/main">
               <a:ext uri="{FF2B5EF4-FFF2-40B4-BE49-F238E27FC236}">
-                <a16:creationId xmlns:a16="http://schemas.microsoft.com/office/drawing/2014/main" id="{4AD2D70A-8440-4C77-8E00-1E7884C03596}"/>
+                <a16:creationId xmlns:a16="http://schemas.microsoft.com/office/drawing/2014/main" id="{65BFBBBE-A1BC-45C1-B157-A2B07CA7AF4B}"/>
               </a:ext>
             </a:extLst>
           </p:cNvPr>
@@ -12252,7 +12297,7 @@
                 <a:ea typeface="Microsoft YaHei"/>
                 <a:cs typeface="Microsoft YaHei"/>
               </a:rPr>
-              <a:t>关键比较 ≥3 次，或说明为何 1 次</a:t>
+              <a:t>重复计划与要声称的强度匹配</a:t>
             </a:r>
           </a:p>
         </p:txBody>
@@ -12262,7 +12307,7 @@
           <p:cNvPr id="15" name="p17-n-4">
             <a:extLst xmlns:a="http://schemas.openxmlformats.org/drawingml/2006/main">
               <a:ext uri="{FF2B5EF4-FFF2-40B4-BE49-F238E27FC236}">
-                <a16:creationId xmlns:a16="http://schemas.microsoft.com/office/drawing/2014/main" id="{0CB16DEB-ADA6-4C0F-9A11-14B6E4480388}"/>
+                <a16:creationId xmlns:a16="http://schemas.microsoft.com/office/drawing/2014/main" id="{0BF4A136-975C-44B1-A80F-7D23AF950602}"/>
               </a:ext>
             </a:extLst>
           </p:cNvPr>
@@ -12319,7 +12364,7 @@
           <p:cNvPr id="16" name="p17-t-4">
             <a:extLst xmlns:a="http://schemas.openxmlformats.org/drawingml/2006/main">
               <a:ext uri="{FF2B5EF4-FFF2-40B4-BE49-F238E27FC236}">
-                <a16:creationId xmlns:a16="http://schemas.microsoft.com/office/drawing/2014/main" id="{0F939864-88B4-4618-B01E-F6EA1A1A04F4}"/>
+                <a16:creationId xmlns:a16="http://schemas.microsoft.com/office/drawing/2014/main" id="{FE9DBEE4-42EA-42D4-998E-05DF8329D066}"/>
               </a:ext>
             </a:extLst>
           </p:cNvPr>
@@ -12374,7 +12419,7 @@
           <p:cNvPr id="17" name="p17-n-5">
             <a:extLst xmlns:a="http://schemas.openxmlformats.org/drawingml/2006/main">
               <a:ext uri="{FF2B5EF4-FFF2-40B4-BE49-F238E27FC236}">
-                <a16:creationId xmlns:a16="http://schemas.microsoft.com/office/drawing/2014/main" id="{CAFA0421-CAAC-4BD1-9728-A131F4185073}"/>
+                <a16:creationId xmlns:a16="http://schemas.microsoft.com/office/drawing/2014/main" id="{C01711CD-3A26-4D1F-9BD8-A40DD78A5DEF}"/>
               </a:ext>
             </a:extLst>
           </p:cNvPr>
@@ -12431,7 +12476,7 @@
           <p:cNvPr id="18" name="p17-t-5">
             <a:extLst xmlns:a="http://schemas.openxmlformats.org/drawingml/2006/main">
               <a:ext uri="{FF2B5EF4-FFF2-40B4-BE49-F238E27FC236}">
-                <a16:creationId xmlns:a16="http://schemas.microsoft.com/office/drawing/2014/main" id="{F6AB0142-12CE-4FC0-B480-4D0B81270AB1}"/>
+                <a16:creationId xmlns:a16="http://schemas.microsoft.com/office/drawing/2014/main" id="{2C03B49D-7953-43D2-B565-D15C0084AD91}"/>
               </a:ext>
             </a:extLst>
           </p:cNvPr>
@@ -12486,7 +12531,7 @@
           <p:cNvPr id="19" name="p17-n-6">
             <a:extLst xmlns:a="http://schemas.openxmlformats.org/drawingml/2006/main">
               <a:ext uri="{FF2B5EF4-FFF2-40B4-BE49-F238E27FC236}">
-                <a16:creationId xmlns:a16="http://schemas.microsoft.com/office/drawing/2014/main" id="{A1821CEA-2FF0-4427-968E-5E9820887330}"/>
+                <a16:creationId xmlns:a16="http://schemas.microsoft.com/office/drawing/2014/main" id="{EAB25094-2023-459E-8D99-7C885406E863}"/>
               </a:ext>
             </a:extLst>
           </p:cNvPr>
@@ -12543,7 +12588,7 @@
           <p:cNvPr id="20" name="p17-t-6">
             <a:extLst xmlns:a="http://schemas.openxmlformats.org/drawingml/2006/main">
               <a:ext uri="{FF2B5EF4-FFF2-40B4-BE49-F238E27FC236}">
-                <a16:creationId xmlns:a16="http://schemas.microsoft.com/office/drawing/2014/main" id="{7685C5F6-C402-49DB-815C-7E10F23BBBF9}"/>
+                <a16:creationId xmlns:a16="http://schemas.microsoft.com/office/drawing/2014/main" id="{5B35D9D6-4C5F-4E45-880E-F6043130244C}"/>
               </a:ext>
             </a:extLst>
           </p:cNvPr>
@@ -12598,7 +12643,7 @@
           <p:cNvPr id="21" name="p17-n-7">
             <a:extLst xmlns:a="http://schemas.openxmlformats.org/drawingml/2006/main">
               <a:ext uri="{FF2B5EF4-FFF2-40B4-BE49-F238E27FC236}">
-                <a16:creationId xmlns:a16="http://schemas.microsoft.com/office/drawing/2014/main" id="{605A33B7-6EA7-4056-89D8-6AE4BD929D38}"/>
+                <a16:creationId xmlns:a16="http://schemas.microsoft.com/office/drawing/2014/main" id="{772BA560-0FE7-4024-A3B1-45520AFD604C}"/>
               </a:ext>
             </a:extLst>
           </p:cNvPr>
@@ -12655,7 +12700,7 @@
           <p:cNvPr id="22" name="p17-t-7">
             <a:extLst xmlns:a="http://schemas.openxmlformats.org/drawingml/2006/main">
               <a:ext uri="{FF2B5EF4-FFF2-40B4-BE49-F238E27FC236}">
-                <a16:creationId xmlns:a16="http://schemas.microsoft.com/office/drawing/2014/main" id="{D88D33DE-C3B5-4B1B-94D3-D7FDFFBF6BFD}"/>
+                <a16:creationId xmlns:a16="http://schemas.microsoft.com/office/drawing/2014/main" id="{663569BC-24B4-4C72-83E9-0D76AF445607}"/>
               </a:ext>
             </a:extLst>
           </p:cNvPr>
@@ -12710,7 +12755,7 @@
           <p:cNvPr id="23" name="p17-path">
             <a:extLst xmlns:a="http://schemas.openxmlformats.org/drawingml/2006/main">
               <a:ext uri="{FF2B5EF4-FFF2-40B4-BE49-F238E27FC236}">
-                <a16:creationId xmlns:a16="http://schemas.microsoft.com/office/drawing/2014/main" id="{8AD8D882-EB83-4789-ADF8-C23A6A1F41F2}"/>
+                <a16:creationId xmlns:a16="http://schemas.microsoft.com/office/drawing/2014/main" id="{D50314ED-7102-40B7-8584-BDDFCB5E46FC}"/>
               </a:ext>
             </a:extLst>
           </p:cNvPr>
@@ -12765,7 +12810,7 @@
           <p:cNvPr id="24" name="p17-files">
             <a:extLst xmlns:a="http://schemas.openxmlformats.org/drawingml/2006/main">
               <a:ext uri="{FF2B5EF4-FFF2-40B4-BE49-F238E27FC236}">
-                <a16:creationId xmlns:a16="http://schemas.microsoft.com/office/drawing/2014/main" id="{8739DBC2-B6D5-4BF1-89D6-891AAFE75005}"/>
+                <a16:creationId xmlns:a16="http://schemas.microsoft.com/office/drawing/2014/main" id="{59C528B4-94C1-4E2B-8CC3-E5E37BE5ECC8}"/>
               </a:ext>
             </a:extLst>
           </p:cNvPr>
@@ -12848,7 +12893,7 @@
           <p:cNvPr id="25" name="p17-fallback">
             <a:extLst xmlns:a="http://schemas.openxmlformats.org/drawingml/2006/main">
               <a:ext uri="{FF2B5EF4-FFF2-40B4-BE49-F238E27FC236}">
-                <a16:creationId xmlns:a16="http://schemas.microsoft.com/office/drawing/2014/main" id="{626723E8-DEF5-4505-B6BD-0234A774C072}"/>
+                <a16:creationId xmlns:a16="http://schemas.microsoft.com/office/drawing/2014/main" id="{97AC2F09-D353-4271-881D-05ADF4EE8222}"/>
               </a:ext>
             </a:extLst>
           </p:cNvPr>
@@ -12995,7 +13040,7 @@
           <p:cNvPr id="6" name="p18-time">
             <a:extLst xmlns:a="http://schemas.openxmlformats.org/drawingml/2006/main">
               <a:ext uri="{FF2B5EF4-FFF2-40B4-BE49-F238E27FC236}">
-                <a16:creationId xmlns:a16="http://schemas.microsoft.com/office/drawing/2014/main" id="{DC93A4B5-4537-4641-A166-89E18DCA2F4A}"/>
+                <a16:creationId xmlns:a16="http://schemas.microsoft.com/office/drawing/2014/main" id="{41B7BA43-C96B-4636-8499-E2E73857325A}"/>
               </a:ext>
             </a:extLst>
           </p:cNvPr>
@@ -13023,14 +13068,14 @@
           <a:lstStyle xmlns:a="http://schemas.openxmlformats.org/drawingml/2006/main"/>
           <a:p xmlns:a="http://schemas.openxmlformats.org/drawingml/2006/main">
             <a:pPr algn="r">
-              <a:defRPr sz="1275" b="1">
+              <a:defRPr sz="1350" b="1">
                 <a:solidFill>
                   <a:srgbClr val="C8161E"/>
                 </a:solidFill>
               </a:defRPr>
             </a:pPr>
             <a:r>
-              <a:rPr sz="1275" b="1">
+              <a:rPr sz="1350" b="1">
                 <a:solidFill>
                   <a:srgbClr val="C8161E"/>
                 </a:solidFill>
@@ -13038,7 +13083,7 @@
                 <a:ea typeface="Microsoft YaHei"/>
                 <a:cs typeface="Microsoft YaHei"/>
               </a:rPr>
-              <a:t>56:00–60:00｜实践停留页</a:t>
+              <a:t>43:00–60:00｜实践停留页</a:t>
             </a:r>
           </a:p>
         </p:txBody>
@@ -13048,7 +13093,7 @@
           <p:cNvPr id="7" name="p18-check-title">
             <a:extLst xmlns:a="http://schemas.openxmlformats.org/drawingml/2006/main">
               <a:ext uri="{FF2B5EF4-FFF2-40B4-BE49-F238E27FC236}">
-                <a16:creationId xmlns:a16="http://schemas.microsoft.com/office/drawing/2014/main" id="{7E10E114-D05A-42FF-99D8-1A2111E8BA5B}"/>
+                <a16:creationId xmlns:a16="http://schemas.microsoft.com/office/drawing/2014/main" id="{D1308D87-D5B3-4900-9ED0-CC6DBAAD1A35}"/>
               </a:ext>
             </a:extLst>
           </p:cNvPr>
@@ -13101,7 +13146,7 @@
           <p:cNvPr id="8" name="p18-c-0">
             <a:extLst xmlns:a="http://schemas.openxmlformats.org/drawingml/2006/main">
               <a:ext uri="{FF2B5EF4-FFF2-40B4-BE49-F238E27FC236}">
-                <a16:creationId xmlns:a16="http://schemas.microsoft.com/office/drawing/2014/main" id="{0654B100-ABE7-4013-9D73-A143CEBAEBDF}"/>
+                <a16:creationId xmlns:a16="http://schemas.microsoft.com/office/drawing/2014/main" id="{DCAF7152-799E-4275-9D9F-2BC7F1DD03DC}"/>
               </a:ext>
             </a:extLst>
           </p:cNvPr>
@@ -13133,14 +13178,14 @@
           <a:lstStyle xmlns:a="http://schemas.openxmlformats.org/drawingml/2006/main"/>
           <a:p xmlns:a="http://schemas.openxmlformats.org/drawingml/2006/main">
             <a:pPr algn="ctr">
-              <a:defRPr sz="1275" b="1">
+              <a:defRPr sz="1350" b="1">
                 <a:solidFill>
                   <a:srgbClr val="FFFFFF"/>
                 </a:solidFill>
               </a:defRPr>
             </a:pPr>
             <a:r>
-              <a:rPr sz="1275" b="1">
+              <a:rPr sz="1350" b="1">
                 <a:solidFill>
                   <a:srgbClr val="FFFFFF"/>
                 </a:solidFill>
@@ -13158,7 +13203,7 @@
           <p:cNvPr id="9" name="p18-t-0">
             <a:extLst xmlns:a="http://schemas.openxmlformats.org/drawingml/2006/main">
               <a:ext uri="{FF2B5EF4-FFF2-40B4-BE49-F238E27FC236}">
-                <a16:creationId xmlns:a16="http://schemas.microsoft.com/office/drawing/2014/main" id="{55787CCA-D528-45B5-A26F-93DD1D08211E}"/>
+                <a16:creationId xmlns:a16="http://schemas.microsoft.com/office/drawing/2014/main" id="{4B6B3AE2-1596-462C-8052-9E4DD98778CD}"/>
               </a:ext>
             </a:extLst>
           </p:cNvPr>
@@ -13213,7 +13258,7 @@
           <p:cNvPr id="10" name="p18-c-1">
             <a:extLst xmlns:a="http://schemas.openxmlformats.org/drawingml/2006/main">
               <a:ext uri="{FF2B5EF4-FFF2-40B4-BE49-F238E27FC236}">
-                <a16:creationId xmlns:a16="http://schemas.microsoft.com/office/drawing/2014/main" id="{412E08B2-BEB5-423C-ABA9-6585CBC386DF}"/>
+                <a16:creationId xmlns:a16="http://schemas.microsoft.com/office/drawing/2014/main" id="{E7316CEB-8624-4BEB-9D35-B73936636591}"/>
               </a:ext>
             </a:extLst>
           </p:cNvPr>
@@ -13245,14 +13290,14 @@
           <a:lstStyle xmlns:a="http://schemas.openxmlformats.org/drawingml/2006/main"/>
           <a:p xmlns:a="http://schemas.openxmlformats.org/drawingml/2006/main">
             <a:pPr algn="ctr">
-              <a:defRPr sz="1275" b="1">
+              <a:defRPr sz="1350" b="1">
                 <a:solidFill>
                   <a:srgbClr val="FFFFFF"/>
                 </a:solidFill>
               </a:defRPr>
             </a:pPr>
             <a:r>
-              <a:rPr sz="1275" b="1">
+              <a:rPr sz="1350" b="1">
                 <a:solidFill>
                   <a:srgbClr val="FFFFFF"/>
                 </a:solidFill>
@@ -13270,7 +13315,7 @@
           <p:cNvPr id="11" name="p18-t-1">
             <a:extLst xmlns:a="http://schemas.openxmlformats.org/drawingml/2006/main">
               <a:ext uri="{FF2B5EF4-FFF2-40B4-BE49-F238E27FC236}">
-                <a16:creationId xmlns:a16="http://schemas.microsoft.com/office/drawing/2014/main" id="{B60601C8-37BF-43B6-A017-FA6DF89AD496}"/>
+                <a16:creationId xmlns:a16="http://schemas.microsoft.com/office/drawing/2014/main" id="{A390B4B0-F4A3-4AF2-94DF-F295FABF78AD}"/>
               </a:ext>
             </a:extLst>
           </p:cNvPr>
@@ -13325,7 +13370,7 @@
           <p:cNvPr id="12" name="p18-c-2">
             <a:extLst xmlns:a="http://schemas.openxmlformats.org/drawingml/2006/main">
               <a:ext uri="{FF2B5EF4-FFF2-40B4-BE49-F238E27FC236}">
-                <a16:creationId xmlns:a16="http://schemas.microsoft.com/office/drawing/2014/main" id="{0FFAA00B-1811-458C-9A4E-44D59B120746}"/>
+                <a16:creationId xmlns:a16="http://schemas.microsoft.com/office/drawing/2014/main" id="{D1372FF2-8690-46EC-9A4D-CA45F9D00B09}"/>
               </a:ext>
             </a:extLst>
           </p:cNvPr>
@@ -13357,14 +13402,14 @@
           <a:lstStyle xmlns:a="http://schemas.openxmlformats.org/drawingml/2006/main"/>
           <a:p xmlns:a="http://schemas.openxmlformats.org/drawingml/2006/main">
             <a:pPr algn="ctr">
-              <a:defRPr sz="1275" b="1">
+              <a:defRPr sz="1350" b="1">
                 <a:solidFill>
                   <a:srgbClr val="FFFFFF"/>
                 </a:solidFill>
               </a:defRPr>
             </a:pPr>
             <a:r>
-              <a:rPr sz="1275" b="1">
+              <a:rPr sz="1350" b="1">
                 <a:solidFill>
                   <a:srgbClr val="FFFFFF"/>
                 </a:solidFill>
@@ -13382,7 +13427,7 @@
           <p:cNvPr id="13" name="p18-t-2">
             <a:extLst xmlns:a="http://schemas.openxmlformats.org/drawingml/2006/main">
               <a:ext uri="{FF2B5EF4-FFF2-40B4-BE49-F238E27FC236}">
-                <a16:creationId xmlns:a16="http://schemas.microsoft.com/office/drawing/2014/main" id="{ADEEE05F-EA4A-4815-AD18-48A7ABF65CC5}"/>
+                <a16:creationId xmlns:a16="http://schemas.microsoft.com/office/drawing/2014/main" id="{1F778CBD-58E5-4AC0-8725-052EE7067C92}"/>
               </a:ext>
             </a:extLst>
           </p:cNvPr>
@@ -13437,7 +13482,7 @@
           <p:cNvPr id="14" name="p18-c-3">
             <a:extLst xmlns:a="http://schemas.openxmlformats.org/drawingml/2006/main">
               <a:ext uri="{FF2B5EF4-FFF2-40B4-BE49-F238E27FC236}">
-                <a16:creationId xmlns:a16="http://schemas.microsoft.com/office/drawing/2014/main" id="{65AD6238-6763-4100-A37E-2DD00888A139}"/>
+                <a16:creationId xmlns:a16="http://schemas.microsoft.com/office/drawing/2014/main" id="{BABA5FC3-1C16-485B-969A-DDE4E56E1E6E}"/>
               </a:ext>
             </a:extLst>
           </p:cNvPr>
@@ -13469,14 +13514,14 @@
           <a:lstStyle xmlns:a="http://schemas.openxmlformats.org/drawingml/2006/main"/>
           <a:p xmlns:a="http://schemas.openxmlformats.org/drawingml/2006/main">
             <a:pPr algn="ctr">
-              <a:defRPr sz="1275" b="1">
+              <a:defRPr sz="1350" b="1">
                 <a:solidFill>
                   <a:srgbClr val="FFFFFF"/>
                 </a:solidFill>
               </a:defRPr>
             </a:pPr>
             <a:r>
-              <a:rPr sz="1275" b="1">
+              <a:rPr sz="1350" b="1">
                 <a:solidFill>
                   <a:srgbClr val="FFFFFF"/>
                 </a:solidFill>
@@ -13494,7 +13539,7 @@
           <p:cNvPr id="15" name="p18-t-3">
             <a:extLst xmlns:a="http://schemas.openxmlformats.org/drawingml/2006/main">
               <a:ext uri="{FF2B5EF4-FFF2-40B4-BE49-F238E27FC236}">
-                <a16:creationId xmlns:a16="http://schemas.microsoft.com/office/drawing/2014/main" id="{0E49C347-E0E9-4572-B141-21E516294344}"/>
+                <a16:creationId xmlns:a16="http://schemas.microsoft.com/office/drawing/2014/main" id="{23AA5DEF-69DB-4C8E-93B9-D178B8547E52}"/>
               </a:ext>
             </a:extLst>
           </p:cNvPr>
@@ -13549,7 +13594,7 @@
           <p:cNvPr id="16" name="p18-c-4">
             <a:extLst xmlns:a="http://schemas.openxmlformats.org/drawingml/2006/main">
               <a:ext uri="{FF2B5EF4-FFF2-40B4-BE49-F238E27FC236}">
-                <a16:creationId xmlns:a16="http://schemas.microsoft.com/office/drawing/2014/main" id="{A7C79C5E-93C2-4093-BD40-98C8C44A89D4}"/>
+                <a16:creationId xmlns:a16="http://schemas.microsoft.com/office/drawing/2014/main" id="{DAFADE7E-F94B-4DDB-9CBE-D5946AC724DE}"/>
               </a:ext>
             </a:extLst>
           </p:cNvPr>
@@ -13581,14 +13626,14 @@
           <a:lstStyle xmlns:a="http://schemas.openxmlformats.org/drawingml/2006/main"/>
           <a:p xmlns:a="http://schemas.openxmlformats.org/drawingml/2006/main">
             <a:pPr algn="ctr">
-              <a:defRPr sz="1275" b="1">
+              <a:defRPr sz="1350" b="1">
                 <a:solidFill>
                   <a:srgbClr val="FFFFFF"/>
                 </a:solidFill>
               </a:defRPr>
             </a:pPr>
             <a:r>
-              <a:rPr sz="1275" b="1">
+              <a:rPr sz="1350" b="1">
                 <a:solidFill>
                   <a:srgbClr val="FFFFFF"/>
                 </a:solidFill>
@@ -13606,7 +13651,7 @@
           <p:cNvPr id="17" name="p18-t-4">
             <a:extLst xmlns:a="http://schemas.openxmlformats.org/drawingml/2006/main">
               <a:ext uri="{FF2B5EF4-FFF2-40B4-BE49-F238E27FC236}">
-                <a16:creationId xmlns:a16="http://schemas.microsoft.com/office/drawing/2014/main" id="{6DAA8364-815C-4C05-95D0-7D4E3FE344D5}"/>
+                <a16:creationId xmlns:a16="http://schemas.microsoft.com/office/drawing/2014/main" id="{94C50D58-0B82-439B-9205-A1F659B75464}"/>
               </a:ext>
             </a:extLst>
           </p:cNvPr>
@@ -13661,7 +13706,7 @@
           <p:cNvPr id="18" name="p18-tree-title">
             <a:extLst xmlns:a="http://schemas.openxmlformats.org/drawingml/2006/main">
               <a:ext uri="{FF2B5EF4-FFF2-40B4-BE49-F238E27FC236}">
-                <a16:creationId xmlns:a16="http://schemas.microsoft.com/office/drawing/2014/main" id="{D715F09C-5AD0-481C-BEF3-B8CD68BBA562}"/>
+                <a16:creationId xmlns:a16="http://schemas.microsoft.com/office/drawing/2014/main" id="{31B1758C-D631-4AA3-B2F5-654F369C4F0C}"/>
               </a:ext>
             </a:extLst>
           </p:cNvPr>
@@ -13714,7 +13759,7 @@
           <p:cNvPr id="19" name="p18-tree">
             <a:extLst xmlns:a="http://schemas.openxmlformats.org/drawingml/2006/main">
               <a:ext uri="{FF2B5EF4-FFF2-40B4-BE49-F238E27FC236}">
-                <a16:creationId xmlns:a16="http://schemas.microsoft.com/office/drawing/2014/main" id="{47E96D23-7A94-4C9F-859E-E88D4357EEBB}"/>
+                <a16:creationId xmlns:a16="http://schemas.microsoft.com/office/drawing/2014/main" id="{C056CD68-E585-4775-9950-0EDEACFF9EB2}"/>
               </a:ext>
             </a:extLst>
           </p:cNvPr>
@@ -14017,7 +14062,7 @@
           <p:cNvPr id="20" name="p18-bottom">
             <a:extLst xmlns:a="http://schemas.openxmlformats.org/drawingml/2006/main">
               <a:ext uri="{FF2B5EF4-FFF2-40B4-BE49-F238E27FC236}">
-                <a16:creationId xmlns:a16="http://schemas.microsoft.com/office/drawing/2014/main" id="{9F4838BB-C664-43FA-9455-18F0C1010CAC}"/>
+                <a16:creationId xmlns:a16="http://schemas.microsoft.com/office/drawing/2014/main" id="{85BFFC04-6A9B-4673-992F-380157C304B3}"/>
               </a:ext>
             </a:extLst>
           </p:cNvPr>
@@ -14166,7 +14211,7 @@
           <p:cNvPr id="6" name="p19-time">
             <a:extLst xmlns:a="http://schemas.openxmlformats.org/drawingml/2006/main">
               <a:ext uri="{FF2B5EF4-FFF2-40B4-BE49-F238E27FC236}">
-                <a16:creationId xmlns:a16="http://schemas.microsoft.com/office/drawing/2014/main" id="{7DE1E884-B612-41FF-9AC3-05EA8CCA572E}"/>
+                <a16:creationId xmlns:a16="http://schemas.microsoft.com/office/drawing/2014/main" id="{80AA0EF1-E8D9-49E9-8FA6-7F66854FD4CA}"/>
               </a:ext>
             </a:extLst>
           </p:cNvPr>
@@ -14194,14 +14239,14 @@
           <a:lstStyle xmlns:a="http://schemas.openxmlformats.org/drawingml/2006/main"/>
           <a:p xmlns:a="http://schemas.openxmlformats.org/drawingml/2006/main">
             <a:pPr algn="r">
-              <a:defRPr sz="1275" b="1">
+              <a:defRPr sz="1350" b="1">
                 <a:solidFill>
                   <a:srgbClr val="C8161E"/>
                 </a:solidFill>
               </a:defRPr>
             </a:pPr>
             <a:r>
-              <a:rPr sz="1275" b="1">
+              <a:rPr sz="1350" b="1">
                 <a:solidFill>
                   <a:srgbClr val="C8161E"/>
                 </a:solidFill>
@@ -14219,7 +14264,7 @@
           <p:cNvPr id="7" name="p19-n-0">
             <a:extLst xmlns:a="http://schemas.openxmlformats.org/drawingml/2006/main">
               <a:ext uri="{FF2B5EF4-FFF2-40B4-BE49-F238E27FC236}">
-                <a16:creationId xmlns:a16="http://schemas.microsoft.com/office/drawing/2014/main" id="{AA6865D7-0D73-4C3A-B8CE-C1919775E04D}"/>
+                <a16:creationId xmlns:a16="http://schemas.microsoft.com/office/drawing/2014/main" id="{5EEA6BBE-EF64-4496-8280-143893C9737F}"/>
               </a:ext>
             </a:extLst>
           </p:cNvPr>
@@ -14276,7 +14321,7 @@
           <p:cNvPr id="8" name="p19-q-0">
             <a:extLst xmlns:a="http://schemas.openxmlformats.org/drawingml/2006/main">
               <a:ext uri="{FF2B5EF4-FFF2-40B4-BE49-F238E27FC236}">
-                <a16:creationId xmlns:a16="http://schemas.microsoft.com/office/drawing/2014/main" id="{C102442D-1F20-4347-ACE4-432DC84EFE81}"/>
+                <a16:creationId xmlns:a16="http://schemas.microsoft.com/office/drawing/2014/main" id="{C2B1BC4E-F239-4F59-A520-91507FD44E7B}"/>
               </a:ext>
             </a:extLst>
           </p:cNvPr>
@@ -14331,7 +14376,7 @@
           <p:cNvPr id="9" name="p19-n-1">
             <a:extLst xmlns:a="http://schemas.openxmlformats.org/drawingml/2006/main">
               <a:ext uri="{FF2B5EF4-FFF2-40B4-BE49-F238E27FC236}">
-                <a16:creationId xmlns:a16="http://schemas.microsoft.com/office/drawing/2014/main" id="{7F9C77AE-AC81-45BD-9C8E-A62F0C55E52E}"/>
+                <a16:creationId xmlns:a16="http://schemas.microsoft.com/office/drawing/2014/main" id="{8E344B58-C4F0-4C1F-B1EC-26C0D6E00C96}"/>
               </a:ext>
             </a:extLst>
           </p:cNvPr>
@@ -14388,7 +14433,7 @@
           <p:cNvPr id="10" name="p19-q-1">
             <a:extLst xmlns:a="http://schemas.openxmlformats.org/drawingml/2006/main">
               <a:ext uri="{FF2B5EF4-FFF2-40B4-BE49-F238E27FC236}">
-                <a16:creationId xmlns:a16="http://schemas.microsoft.com/office/drawing/2014/main" id="{1C22DF0F-1608-4073-926C-F48698ECB7C6}"/>
+                <a16:creationId xmlns:a16="http://schemas.microsoft.com/office/drawing/2014/main" id="{E0B02935-ADBB-4005-8F86-7FF5A4299E37}"/>
               </a:ext>
             </a:extLst>
           </p:cNvPr>
@@ -14433,7 +14478,7 @@
                 <a:ea typeface="Microsoft YaHei"/>
                 <a:cs typeface="Microsoft YaHei"/>
               </a:rPr>
-              <a:t>复现说明齐到种子？</a:t>
+              <a:t>种子或等价条件可追溯？</a:t>
             </a:r>
           </a:p>
         </p:txBody>
@@ -14443,7 +14488,7 @@
           <p:cNvPr id="11" name="p19-n-2">
             <a:extLst xmlns:a="http://schemas.openxmlformats.org/drawingml/2006/main">
               <a:ext uri="{FF2B5EF4-FFF2-40B4-BE49-F238E27FC236}">
-                <a16:creationId xmlns:a16="http://schemas.microsoft.com/office/drawing/2014/main" id="{DA4B2988-C962-4ACF-9887-1F48F4438D35}"/>
+                <a16:creationId xmlns:a16="http://schemas.microsoft.com/office/drawing/2014/main" id="{66058F24-3BD9-4154-864F-15CF67108CCB}"/>
               </a:ext>
             </a:extLst>
           </p:cNvPr>
@@ -14500,7 +14545,7 @@
           <p:cNvPr id="12" name="p19-q-2">
             <a:extLst xmlns:a="http://schemas.openxmlformats.org/drawingml/2006/main">
               <a:ext uri="{FF2B5EF4-FFF2-40B4-BE49-F238E27FC236}">
-                <a16:creationId xmlns:a16="http://schemas.microsoft.com/office/drawing/2014/main" id="{19428F41-B94E-4789-8FAB-D4D58A75C465}"/>
+                <a16:creationId xmlns:a16="http://schemas.microsoft.com/office/drawing/2014/main" id="{6B9CCA46-6ADA-4064-8781-F95722D6E401}"/>
               </a:ext>
             </a:extLst>
           </p:cNvPr>
@@ -14545,7 +14590,7 @@
                 <a:ea typeface="Microsoft YaHei"/>
                 <a:cs typeface="Microsoft YaHei"/>
               </a:rPr>
-              <a:t>≥3 次并报告方差？</a:t>
+              <a:t>重复计划支持主张强度？</a:t>
             </a:r>
           </a:p>
         </p:txBody>
@@ -14555,7 +14600,7 @@
           <p:cNvPr id="13" name="p19-n-3">
             <a:extLst xmlns:a="http://schemas.openxmlformats.org/drawingml/2006/main">
               <a:ext uri="{FF2B5EF4-FFF2-40B4-BE49-F238E27FC236}">
-                <a16:creationId xmlns:a16="http://schemas.microsoft.com/office/drawing/2014/main" id="{D7BDECF0-84B7-44C2-A057-F6E83CA7FE85}"/>
+                <a16:creationId xmlns:a16="http://schemas.microsoft.com/office/drawing/2014/main" id="{D2B87BA0-195E-46B9-9D78-674675B9EB01}"/>
               </a:ext>
             </a:extLst>
           </p:cNvPr>
@@ -14612,7 +14657,7 @@
           <p:cNvPr id="14" name="p19-q-3">
             <a:extLst xmlns:a="http://schemas.openxmlformats.org/drawingml/2006/main">
               <a:ext uri="{FF2B5EF4-FFF2-40B4-BE49-F238E27FC236}">
-                <a16:creationId xmlns:a16="http://schemas.microsoft.com/office/drawing/2014/main" id="{91FE443D-1137-490B-B14F-8F4598E52272}"/>
+                <a16:creationId xmlns:a16="http://schemas.microsoft.com/office/drawing/2014/main" id="{532B4327-D712-43B6-9DEB-383825FEEFC8}"/>
               </a:ext>
             </a:extLst>
           </p:cNvPr>
@@ -14667,7 +14712,7 @@
           <p:cNvPr id="15" name="p19-n-4">
             <a:extLst xmlns:a="http://schemas.openxmlformats.org/drawingml/2006/main">
               <a:ext uri="{FF2B5EF4-FFF2-40B4-BE49-F238E27FC236}">
-                <a16:creationId xmlns:a16="http://schemas.microsoft.com/office/drawing/2014/main" id="{DE88EDA2-BADA-4D2B-A5AE-DDA37CABBD9C}"/>
+                <a16:creationId xmlns:a16="http://schemas.microsoft.com/office/drawing/2014/main" id="{F5582850-2ABA-45EE-8557-7E91E6E47012}"/>
               </a:ext>
             </a:extLst>
           </p:cNvPr>
@@ -14724,7 +14769,7 @@
           <p:cNvPr id="16" name="p19-q-4">
             <a:extLst xmlns:a="http://schemas.openxmlformats.org/drawingml/2006/main">
               <a:ext uri="{FF2B5EF4-FFF2-40B4-BE49-F238E27FC236}">
-                <a16:creationId xmlns:a16="http://schemas.microsoft.com/office/drawing/2014/main" id="{9D7D109E-E7ED-4EBC-A1C6-FC5F1FAC5B2A}"/>
+                <a16:creationId xmlns:a16="http://schemas.microsoft.com/office/drawing/2014/main" id="{327CEE49-C5DE-4865-87BA-AD6AF10C7A65}"/>
               </a:ext>
             </a:extLst>
           </p:cNvPr>
@@ -14779,7 +14824,7 @@
           <p:cNvPr id="17" name="p19-n-5">
             <a:extLst xmlns:a="http://schemas.openxmlformats.org/drawingml/2006/main">
               <a:ext uri="{FF2B5EF4-FFF2-40B4-BE49-F238E27FC236}">
-                <a16:creationId xmlns:a16="http://schemas.microsoft.com/office/drawing/2014/main" id="{05AB839C-EBAF-4751-BA6B-364640FA998E}"/>
+                <a16:creationId xmlns:a16="http://schemas.microsoft.com/office/drawing/2014/main" id="{8680C665-D2C4-459B-A97B-F94B89A3CF79}"/>
               </a:ext>
             </a:extLst>
           </p:cNvPr>
@@ -14836,7 +14881,7 @@
           <p:cNvPr id="18" name="p19-q-5">
             <a:extLst xmlns:a="http://schemas.openxmlformats.org/drawingml/2006/main">
               <a:ext uri="{FF2B5EF4-FFF2-40B4-BE49-F238E27FC236}">
-                <a16:creationId xmlns:a16="http://schemas.microsoft.com/office/drawing/2014/main" id="{FB00730E-9449-40F7-8016-B2E39C27EBE9}"/>
+                <a16:creationId xmlns:a16="http://schemas.microsoft.com/office/drawing/2014/main" id="{9BBEA5F7-F154-4539-80B1-906AFDC7E28F}"/>
               </a:ext>
             </a:extLst>
           </p:cNvPr>
@@ -14891,7 +14936,7 @@
           <p:cNvPr id="19" name="p19-n-6">
             <a:extLst xmlns:a="http://schemas.openxmlformats.org/drawingml/2006/main">
               <a:ext uri="{FF2B5EF4-FFF2-40B4-BE49-F238E27FC236}">
-                <a16:creationId xmlns:a16="http://schemas.microsoft.com/office/drawing/2014/main" id="{0657BB02-E14A-406D-8697-CE11B6A53E6A}"/>
+                <a16:creationId xmlns:a16="http://schemas.microsoft.com/office/drawing/2014/main" id="{AFAFC975-26A4-4881-882A-BF406F0C7333}"/>
               </a:ext>
             </a:extLst>
           </p:cNvPr>
@@ -14948,7 +14993,7 @@
           <p:cNvPr id="20" name="p19-q-6">
             <a:extLst xmlns:a="http://schemas.openxmlformats.org/drawingml/2006/main">
               <a:ext uri="{FF2B5EF4-FFF2-40B4-BE49-F238E27FC236}">
-                <a16:creationId xmlns:a16="http://schemas.microsoft.com/office/drawing/2014/main" id="{F3D50A90-2460-4B57-83AF-35A1289C6AB2}"/>
+                <a16:creationId xmlns:a16="http://schemas.microsoft.com/office/drawing/2014/main" id="{E42CD99A-F4C0-4AC5-9098-CA659FC5A42D}"/>
               </a:ext>
             </a:extLst>
           </p:cNvPr>
@@ -14993,7 +15038,7 @@
                 <a:ea typeface="Microsoft YaHei"/>
                 <a:cs typeface="Microsoft YaHei"/>
               </a:rPr>
-              <a:t>失败预案至少三种？</a:t>
+              <a:t>最大风险有对应预案？</a:t>
             </a:r>
           </a:p>
         </p:txBody>
@@ -15003,7 +15048,7 @@
           <p:cNvPr id="21" name="p19-n-7">
             <a:extLst xmlns:a="http://schemas.openxmlformats.org/drawingml/2006/main">
               <a:ext uri="{FF2B5EF4-FFF2-40B4-BE49-F238E27FC236}">
-                <a16:creationId xmlns:a16="http://schemas.microsoft.com/office/drawing/2014/main" id="{8DA16509-CB56-452B-88DA-6454E510BA91}"/>
+                <a16:creationId xmlns:a16="http://schemas.microsoft.com/office/drawing/2014/main" id="{F251B03E-BD55-4D2B-8CA4-163E1C1776CD}"/>
               </a:ext>
             </a:extLst>
           </p:cNvPr>
@@ -15060,7 +15105,7 @@
           <p:cNvPr id="22" name="p19-q-7">
             <a:extLst xmlns:a="http://schemas.openxmlformats.org/drawingml/2006/main">
               <a:ext uri="{FF2B5EF4-FFF2-40B4-BE49-F238E27FC236}">
-                <a16:creationId xmlns:a16="http://schemas.microsoft.com/office/drawing/2014/main" id="{456C1184-C5A2-4AA9-82FC-1965CC3C1954}"/>
+                <a16:creationId xmlns:a16="http://schemas.microsoft.com/office/drawing/2014/main" id="{89FA864A-0693-4CF6-A469-0D9D0C46B1D3}"/>
               </a:ext>
             </a:extLst>
           </p:cNvPr>
@@ -15115,7 +15160,7 @@
           <p:cNvPr id="23" name="p19-author">
             <a:extLst xmlns:a="http://schemas.openxmlformats.org/drawingml/2006/main">
               <a:ext uri="{FF2B5EF4-FFF2-40B4-BE49-F238E27FC236}">
-                <a16:creationId xmlns:a16="http://schemas.microsoft.com/office/drawing/2014/main" id="{968273A1-8ACD-4592-9B00-76F1D09D9715}"/>
+                <a16:creationId xmlns:a16="http://schemas.microsoft.com/office/drawing/2014/main" id="{CC3F9FFD-4F87-40D3-9E80-80C003804D29}"/>
               </a:ext>
             </a:extLst>
           </p:cNvPr>
@@ -15170,7 +15215,7 @@
           <p:cNvPr id="24" name="p19-rule">
             <a:extLst xmlns:a="http://schemas.openxmlformats.org/drawingml/2006/main">
               <a:ext uri="{FF2B5EF4-FFF2-40B4-BE49-F238E27FC236}">
-                <a16:creationId xmlns:a16="http://schemas.microsoft.com/office/drawing/2014/main" id="{EB07A6C3-3A44-4759-811D-EB6A78599AC6}"/>
+                <a16:creationId xmlns:a16="http://schemas.microsoft.com/office/drawing/2014/main" id="{E10DDAC9-7F57-41B6-8A66-5B20CDCA851C}"/>
               </a:ext>
             </a:extLst>
           </p:cNvPr>
@@ -15225,7 +15270,7 @@
           <p:cNvPr id="25" name="p19-format">
             <a:extLst xmlns:a="http://schemas.openxmlformats.org/drawingml/2006/main">
               <a:ext uri="{FF2B5EF4-FFF2-40B4-BE49-F238E27FC236}">
-                <a16:creationId xmlns:a16="http://schemas.microsoft.com/office/drawing/2014/main" id="{80D5167C-0872-4964-96AF-6747E000D859}"/>
+                <a16:creationId xmlns:a16="http://schemas.microsoft.com/office/drawing/2014/main" id="{5268AFC8-EEBB-4806-A300-02374A830497}"/>
               </a:ext>
             </a:extLst>
           </p:cNvPr>
@@ -15372,7 +15417,7 @@
           <p:cNvPr id="6" name="p02-left-title">
             <a:extLst xmlns:a="http://schemas.openxmlformats.org/drawingml/2006/main">
               <a:ext uri="{FF2B5EF4-FFF2-40B4-BE49-F238E27FC236}">
-                <a16:creationId xmlns:a16="http://schemas.microsoft.com/office/drawing/2014/main" id="{E86E6935-820E-4624-943E-4750F6D826D8}"/>
+                <a16:creationId xmlns:a16="http://schemas.microsoft.com/office/drawing/2014/main" id="{1A6C9F8F-9377-48DB-847E-80656D02C0E5}"/>
               </a:ext>
             </a:extLst>
           </p:cNvPr>
@@ -15425,7 +15470,7 @@
           <p:cNvPr id="7" name="p02-l-0">
             <a:extLst xmlns:a="http://schemas.openxmlformats.org/drawingml/2006/main">
               <a:ext uri="{FF2B5EF4-FFF2-40B4-BE49-F238E27FC236}">
-                <a16:creationId xmlns:a16="http://schemas.microsoft.com/office/drawing/2014/main" id="{E186AF6B-6725-42B5-A1E6-60F534C36D98}"/>
+                <a16:creationId xmlns:a16="http://schemas.microsoft.com/office/drawing/2014/main" id="{A5697036-A951-4636-871D-BD11BB41B821}"/>
               </a:ext>
             </a:extLst>
           </p:cNvPr>
@@ -15510,7 +15555,7 @@
           <p:cNvPr id="8" name="p02-l-1">
             <a:extLst xmlns:a="http://schemas.openxmlformats.org/drawingml/2006/main">
               <a:ext uri="{FF2B5EF4-FFF2-40B4-BE49-F238E27FC236}">
-                <a16:creationId xmlns:a16="http://schemas.microsoft.com/office/drawing/2014/main" id="{209B1D89-48AA-40ED-88D4-790CCBAE7382}"/>
+                <a16:creationId xmlns:a16="http://schemas.microsoft.com/office/drawing/2014/main" id="{5DC5B8C1-F8C8-4643-BE31-191C05C95A16}"/>
               </a:ext>
             </a:extLst>
           </p:cNvPr>
@@ -15595,7 +15640,7 @@
           <p:cNvPr id="9" name="p02-l-2">
             <a:extLst xmlns:a="http://schemas.openxmlformats.org/drawingml/2006/main">
               <a:ext uri="{FF2B5EF4-FFF2-40B4-BE49-F238E27FC236}">
-                <a16:creationId xmlns:a16="http://schemas.microsoft.com/office/drawing/2014/main" id="{02AEB78E-A8F1-419B-9A83-7D753B772BD2}"/>
+                <a16:creationId xmlns:a16="http://schemas.microsoft.com/office/drawing/2014/main" id="{EF00F88D-96A4-48A0-82CB-996F328F339E}"/>
               </a:ext>
             </a:extLst>
           </p:cNvPr>
@@ -15680,7 +15725,7 @@
           <p:cNvPr id="10" name="p02-l-3">
             <a:extLst xmlns:a="http://schemas.openxmlformats.org/drawingml/2006/main">
               <a:ext uri="{FF2B5EF4-FFF2-40B4-BE49-F238E27FC236}">
-                <a16:creationId xmlns:a16="http://schemas.microsoft.com/office/drawing/2014/main" id="{DB0AB5F8-324E-41B7-8726-8097561FDC9B}"/>
+                <a16:creationId xmlns:a16="http://schemas.microsoft.com/office/drawing/2014/main" id="{5D48105F-DED2-4A0D-92D1-9A2281AD78F4}"/>
               </a:ext>
             </a:extLst>
           </p:cNvPr>
@@ -15765,7 +15810,7 @@
           <p:cNvPr id="11" name="p02-mid">
             <a:extLst xmlns:a="http://schemas.openxmlformats.org/drawingml/2006/main">
               <a:ext uri="{FF2B5EF4-FFF2-40B4-BE49-F238E27FC236}">
-                <a16:creationId xmlns:a16="http://schemas.microsoft.com/office/drawing/2014/main" id="{74E08252-8936-43CC-AE66-2ABCE40ABAB7}"/>
+                <a16:creationId xmlns:a16="http://schemas.microsoft.com/office/drawing/2014/main" id="{BB8B98D9-DD7E-4323-BF47-2D340DB9C5C8}"/>
               </a:ext>
             </a:extLst>
           </p:cNvPr>
@@ -15796,7 +15841,7 @@
           <p:cNvPr id="12" name="p02-arrow">
             <a:extLst xmlns:a="http://schemas.openxmlformats.org/drawingml/2006/main">
               <a:ext uri="{FF2B5EF4-FFF2-40B4-BE49-F238E27FC236}">
-                <a16:creationId xmlns:a16="http://schemas.microsoft.com/office/drawing/2014/main" id="{D40B8153-C32B-45F3-854F-300112017D74}"/>
+                <a16:creationId xmlns:a16="http://schemas.microsoft.com/office/drawing/2014/main" id="{F915BE0E-5716-4E9C-8DC6-B8EDB2F7BD12}"/>
               </a:ext>
             </a:extLst>
           </p:cNvPr>
@@ -15853,7 +15898,7 @@
           <p:cNvPr id="13" name="p02-right-title">
             <a:extLst xmlns:a="http://schemas.openxmlformats.org/drawingml/2006/main">
               <a:ext uri="{FF2B5EF4-FFF2-40B4-BE49-F238E27FC236}">
-                <a16:creationId xmlns:a16="http://schemas.microsoft.com/office/drawing/2014/main" id="{276E0CCE-6FBE-47D5-B497-4B8E09762477}"/>
+                <a16:creationId xmlns:a16="http://schemas.microsoft.com/office/drawing/2014/main" id="{AB13F838-832B-439B-87F2-94BE5662174B}"/>
               </a:ext>
             </a:extLst>
           </p:cNvPr>
@@ -15906,7 +15951,7 @@
           <p:cNvPr id="14" name="p02-n-0">
             <a:extLst xmlns:a="http://schemas.openxmlformats.org/drawingml/2006/main">
               <a:ext uri="{FF2B5EF4-FFF2-40B4-BE49-F238E27FC236}">
-                <a16:creationId xmlns:a16="http://schemas.microsoft.com/office/drawing/2014/main" id="{A5B4EE79-826D-48C5-8C57-1499F6765F67}"/>
+                <a16:creationId xmlns:a16="http://schemas.microsoft.com/office/drawing/2014/main" id="{4603244B-3694-4CFB-AED8-8CB29B04C463}"/>
               </a:ext>
             </a:extLst>
           </p:cNvPr>
@@ -15938,14 +15983,14 @@
           <a:lstStyle xmlns:a="http://schemas.openxmlformats.org/drawingml/2006/main"/>
           <a:p xmlns:a="http://schemas.openxmlformats.org/drawingml/2006/main">
             <a:pPr algn="ctr">
-              <a:defRPr sz="1200" b="1">
+              <a:defRPr sz="1350" b="1">
                 <a:solidFill>
                   <a:srgbClr val="FFFFFF"/>
                 </a:solidFill>
               </a:defRPr>
             </a:pPr>
             <a:r>
-              <a:rPr sz="1200" b="1">
+              <a:rPr sz="1350" b="1">
                 <a:solidFill>
                   <a:srgbClr val="FFFFFF"/>
                 </a:solidFill>
@@ -15963,7 +16008,7 @@
           <p:cNvPr id="15" name="p02-r-0">
             <a:extLst xmlns:a="http://schemas.openxmlformats.org/drawingml/2006/main">
               <a:ext uri="{FF2B5EF4-FFF2-40B4-BE49-F238E27FC236}">
-                <a16:creationId xmlns:a16="http://schemas.microsoft.com/office/drawing/2014/main" id="{552C9650-2838-47E2-87F1-DF0B32216F4A}"/>
+                <a16:creationId xmlns:a16="http://schemas.microsoft.com/office/drawing/2014/main" id="{1BFEE184-247E-4488-B847-F455282F4A54}"/>
               </a:ext>
             </a:extLst>
           </p:cNvPr>
@@ -16018,7 +16063,7 @@
           <p:cNvPr id="16" name="p02-n-1">
             <a:extLst xmlns:a="http://schemas.openxmlformats.org/drawingml/2006/main">
               <a:ext uri="{FF2B5EF4-FFF2-40B4-BE49-F238E27FC236}">
-                <a16:creationId xmlns:a16="http://schemas.microsoft.com/office/drawing/2014/main" id="{A8F57D14-5293-4D52-BF2D-6AF540200EB4}"/>
+                <a16:creationId xmlns:a16="http://schemas.microsoft.com/office/drawing/2014/main" id="{8359A68B-4C11-48B9-8286-7CF7C7F3A49E}"/>
               </a:ext>
             </a:extLst>
           </p:cNvPr>
@@ -16050,14 +16095,14 @@
           <a:lstStyle xmlns:a="http://schemas.openxmlformats.org/drawingml/2006/main"/>
           <a:p xmlns:a="http://schemas.openxmlformats.org/drawingml/2006/main">
             <a:pPr algn="ctr">
-              <a:defRPr sz="1200" b="1">
+              <a:defRPr sz="1350" b="1">
                 <a:solidFill>
                   <a:srgbClr val="FFFFFF"/>
                 </a:solidFill>
               </a:defRPr>
             </a:pPr>
             <a:r>
-              <a:rPr sz="1200" b="1">
+              <a:rPr sz="1350" b="1">
                 <a:solidFill>
                   <a:srgbClr val="FFFFFF"/>
                 </a:solidFill>
@@ -16075,7 +16120,7 @@
           <p:cNvPr id="17" name="p02-r-1">
             <a:extLst xmlns:a="http://schemas.openxmlformats.org/drawingml/2006/main">
               <a:ext uri="{FF2B5EF4-FFF2-40B4-BE49-F238E27FC236}">
-                <a16:creationId xmlns:a16="http://schemas.microsoft.com/office/drawing/2014/main" id="{0C8CCBA5-91E2-4D05-9F73-231593F5551A}"/>
+                <a16:creationId xmlns:a16="http://schemas.microsoft.com/office/drawing/2014/main" id="{52F977A0-ED6E-45C3-B8E0-234BF37A28BC}"/>
               </a:ext>
             </a:extLst>
           </p:cNvPr>
@@ -16130,7 +16175,7 @@
           <p:cNvPr id="18" name="p02-n-2">
             <a:extLst xmlns:a="http://schemas.openxmlformats.org/drawingml/2006/main">
               <a:ext uri="{FF2B5EF4-FFF2-40B4-BE49-F238E27FC236}">
-                <a16:creationId xmlns:a16="http://schemas.microsoft.com/office/drawing/2014/main" id="{46CA16A4-C126-420D-8EAA-42B0E501CAC0}"/>
+                <a16:creationId xmlns:a16="http://schemas.microsoft.com/office/drawing/2014/main" id="{5F5446D2-CDD5-49E8-9DD1-8FBBEE72A33B}"/>
               </a:ext>
             </a:extLst>
           </p:cNvPr>
@@ -16162,14 +16207,14 @@
           <a:lstStyle xmlns:a="http://schemas.openxmlformats.org/drawingml/2006/main"/>
           <a:p xmlns:a="http://schemas.openxmlformats.org/drawingml/2006/main">
             <a:pPr algn="ctr">
-              <a:defRPr sz="1200" b="1">
+              <a:defRPr sz="1350" b="1">
                 <a:solidFill>
                   <a:srgbClr val="FFFFFF"/>
                 </a:solidFill>
               </a:defRPr>
             </a:pPr>
             <a:r>
-              <a:rPr sz="1200" b="1">
+              <a:rPr sz="1350" b="1">
                 <a:solidFill>
                   <a:srgbClr val="FFFFFF"/>
                 </a:solidFill>
@@ -16187,7 +16232,7 @@
           <p:cNvPr id="19" name="p02-r-2">
             <a:extLst xmlns:a="http://schemas.openxmlformats.org/drawingml/2006/main">
               <a:ext uri="{FF2B5EF4-FFF2-40B4-BE49-F238E27FC236}">
-                <a16:creationId xmlns:a16="http://schemas.microsoft.com/office/drawing/2014/main" id="{C0258C84-B4FF-429E-A812-F287B2132045}"/>
+                <a16:creationId xmlns:a16="http://schemas.microsoft.com/office/drawing/2014/main" id="{D564BAF4-7F9B-42CE-8BF8-29481399E296}"/>
               </a:ext>
             </a:extLst>
           </p:cNvPr>
@@ -16242,7 +16287,7 @@
           <p:cNvPr id="20" name="p02-n-3">
             <a:extLst xmlns:a="http://schemas.openxmlformats.org/drawingml/2006/main">
               <a:ext uri="{FF2B5EF4-FFF2-40B4-BE49-F238E27FC236}">
-                <a16:creationId xmlns:a16="http://schemas.microsoft.com/office/drawing/2014/main" id="{9352C013-3F64-4DE2-AEEC-F00CB2145579}"/>
+                <a16:creationId xmlns:a16="http://schemas.microsoft.com/office/drawing/2014/main" id="{054AA6A1-B595-474F-912A-D60672D10301}"/>
               </a:ext>
             </a:extLst>
           </p:cNvPr>
@@ -16274,14 +16319,14 @@
           <a:lstStyle xmlns:a="http://schemas.openxmlformats.org/drawingml/2006/main"/>
           <a:p xmlns:a="http://schemas.openxmlformats.org/drawingml/2006/main">
             <a:pPr algn="ctr">
-              <a:defRPr sz="1200" b="1">
+              <a:defRPr sz="1350" b="1">
                 <a:solidFill>
                   <a:srgbClr val="FFFFFF"/>
                 </a:solidFill>
               </a:defRPr>
             </a:pPr>
             <a:r>
-              <a:rPr sz="1200" b="1">
+              <a:rPr sz="1350" b="1">
                 <a:solidFill>
                   <a:srgbClr val="FFFFFF"/>
                 </a:solidFill>
@@ -16299,7 +16344,7 @@
           <p:cNvPr id="21" name="p02-r-3">
             <a:extLst xmlns:a="http://schemas.openxmlformats.org/drawingml/2006/main">
               <a:ext uri="{FF2B5EF4-FFF2-40B4-BE49-F238E27FC236}">
-                <a16:creationId xmlns:a16="http://schemas.microsoft.com/office/drawing/2014/main" id="{A038FE85-8C7B-4583-A64C-7EC8059F5E47}"/>
+                <a16:creationId xmlns:a16="http://schemas.microsoft.com/office/drawing/2014/main" id="{E19E78E2-861E-4F14-A66A-A2863401141F}"/>
               </a:ext>
             </a:extLst>
           </p:cNvPr>
@@ -16354,7 +16399,7 @@
           <p:cNvPr id="22" name="p02-n-4">
             <a:extLst xmlns:a="http://schemas.openxmlformats.org/drawingml/2006/main">
               <a:ext uri="{FF2B5EF4-FFF2-40B4-BE49-F238E27FC236}">
-                <a16:creationId xmlns:a16="http://schemas.microsoft.com/office/drawing/2014/main" id="{E92B4B19-2148-456A-9EF9-3C43E4D72CD4}"/>
+                <a16:creationId xmlns:a16="http://schemas.microsoft.com/office/drawing/2014/main" id="{70964233-9E6C-426B-9B8C-D89F15A0EB7A}"/>
               </a:ext>
             </a:extLst>
           </p:cNvPr>
@@ -16386,14 +16431,14 @@
           <a:lstStyle xmlns:a="http://schemas.openxmlformats.org/drawingml/2006/main"/>
           <a:p xmlns:a="http://schemas.openxmlformats.org/drawingml/2006/main">
             <a:pPr algn="ctr">
-              <a:defRPr sz="1200" b="1">
+              <a:defRPr sz="1350" b="1">
                 <a:solidFill>
                   <a:srgbClr val="FFFFFF"/>
                 </a:solidFill>
               </a:defRPr>
             </a:pPr>
             <a:r>
-              <a:rPr sz="1200" b="1">
+              <a:rPr sz="1350" b="1">
                 <a:solidFill>
                   <a:srgbClr val="FFFFFF"/>
                 </a:solidFill>
@@ -16411,7 +16456,7 @@
           <p:cNvPr id="23" name="p02-r-4">
             <a:extLst xmlns:a="http://schemas.openxmlformats.org/drawingml/2006/main">
               <a:ext uri="{FF2B5EF4-FFF2-40B4-BE49-F238E27FC236}">
-                <a16:creationId xmlns:a16="http://schemas.microsoft.com/office/drawing/2014/main" id="{86349F51-4EC2-4ABB-B9C9-61E7F0853508}"/>
+                <a16:creationId xmlns:a16="http://schemas.microsoft.com/office/drawing/2014/main" id="{C562A95C-FD14-4EB0-AB06-CCC900F03654}"/>
               </a:ext>
             </a:extLst>
           </p:cNvPr>
@@ -16466,7 +16511,7 @@
           <p:cNvPr id="24" name="p02-n-5">
             <a:extLst xmlns:a="http://schemas.openxmlformats.org/drawingml/2006/main">
               <a:ext uri="{FF2B5EF4-FFF2-40B4-BE49-F238E27FC236}">
-                <a16:creationId xmlns:a16="http://schemas.microsoft.com/office/drawing/2014/main" id="{6A2EFAC0-E827-4C51-9D30-1657146038D4}"/>
+                <a16:creationId xmlns:a16="http://schemas.microsoft.com/office/drawing/2014/main" id="{EB9E82AC-04B0-42DD-96DA-8642BA73BE71}"/>
               </a:ext>
             </a:extLst>
           </p:cNvPr>
@@ -16498,14 +16543,14 @@
           <a:lstStyle xmlns:a="http://schemas.openxmlformats.org/drawingml/2006/main"/>
           <a:p xmlns:a="http://schemas.openxmlformats.org/drawingml/2006/main">
             <a:pPr algn="ctr">
-              <a:defRPr sz="1200" b="1">
+              <a:defRPr sz="1350" b="1">
                 <a:solidFill>
                   <a:srgbClr val="FFFFFF"/>
                 </a:solidFill>
               </a:defRPr>
             </a:pPr>
             <a:r>
-              <a:rPr sz="1200" b="1">
+              <a:rPr sz="1350" b="1">
                 <a:solidFill>
                   <a:srgbClr val="FFFFFF"/>
                 </a:solidFill>
@@ -16523,7 +16568,7 @@
           <p:cNvPr id="25" name="p02-r-5">
             <a:extLst xmlns:a="http://schemas.openxmlformats.org/drawingml/2006/main">
               <a:ext uri="{FF2B5EF4-FFF2-40B4-BE49-F238E27FC236}">
-                <a16:creationId xmlns:a16="http://schemas.microsoft.com/office/drawing/2014/main" id="{45E7E262-5C3B-4067-AFA0-E1262CBB8D65}"/>
+                <a16:creationId xmlns:a16="http://schemas.microsoft.com/office/drawing/2014/main" id="{82D7AC51-9221-4633-8470-BAE98597AD40}"/>
               </a:ext>
             </a:extLst>
           </p:cNvPr>
@@ -16578,7 +16623,7 @@
           <p:cNvPr id="26" name="p02-bottom">
             <a:extLst xmlns:a="http://schemas.openxmlformats.org/drawingml/2006/main">
               <a:ext uri="{FF2B5EF4-FFF2-40B4-BE49-F238E27FC236}">
-                <a16:creationId xmlns:a16="http://schemas.microsoft.com/office/drawing/2014/main" id="{652DB947-3DCE-441C-96F0-818271E49FA8}"/>
+                <a16:creationId xmlns:a16="http://schemas.microsoft.com/office/drawing/2014/main" id="{0B40E41E-7037-4F55-B18E-1BDCBCA1B4BD}"/>
               </a:ext>
             </a:extLst>
           </p:cNvPr>
@@ -16727,7 +16772,7 @@
           <p:cNvPr id="6" name="p20-submit-title">
             <a:extLst xmlns:a="http://schemas.openxmlformats.org/drawingml/2006/main">
               <a:ext uri="{FF2B5EF4-FFF2-40B4-BE49-F238E27FC236}">
-                <a16:creationId xmlns:a16="http://schemas.microsoft.com/office/drawing/2014/main" id="{EB859FBC-54F3-47FF-831C-930EC5F01538}"/>
+                <a16:creationId xmlns:a16="http://schemas.microsoft.com/office/drawing/2014/main" id="{780C45E9-A0DC-491D-9352-D2299286EEE7}"/>
               </a:ext>
             </a:extLst>
           </p:cNvPr>
@@ -16780,7 +16825,7 @@
           <p:cNvPr id="7" name="p20-submit">
             <a:extLst xmlns:a="http://schemas.openxmlformats.org/drawingml/2006/main">
               <a:ext uri="{FF2B5EF4-FFF2-40B4-BE49-F238E27FC236}">
-                <a16:creationId xmlns:a16="http://schemas.microsoft.com/office/drawing/2014/main" id="{BAD6D0E2-B8E6-4C81-AB57-2444322C5492}"/>
+                <a16:creationId xmlns:a16="http://schemas.microsoft.com/office/drawing/2014/main" id="{D24424FA-B13B-4260-8CD6-346894CCFE4E}"/>
               </a:ext>
             </a:extLst>
           </p:cNvPr>
@@ -16870,7 +16915,7 @@
           <p:cNvPr id="8" name="p20-back-title">
             <a:extLst xmlns:a="http://schemas.openxmlformats.org/drawingml/2006/main">
               <a:ext uri="{FF2B5EF4-FFF2-40B4-BE49-F238E27FC236}">
-                <a16:creationId xmlns:a16="http://schemas.microsoft.com/office/drawing/2014/main" id="{EDEC5DF1-7B0F-4813-B391-EFB8CCA63159}"/>
+                <a16:creationId xmlns:a16="http://schemas.microsoft.com/office/drawing/2014/main" id="{90104CD3-0DA2-4DED-821B-CD837EAAC858}"/>
               </a:ext>
             </a:extLst>
           </p:cNvPr>
@@ -16923,7 +16968,7 @@
           <p:cNvPr id="9" name="p20-back">
             <a:extLst xmlns:a="http://schemas.openxmlformats.org/drawingml/2006/main">
               <a:ext uri="{FF2B5EF4-FFF2-40B4-BE49-F238E27FC236}">
-                <a16:creationId xmlns:a16="http://schemas.microsoft.com/office/drawing/2014/main" id="{513F0E7D-076E-4440-B99D-FF331DF54265}"/>
+                <a16:creationId xmlns:a16="http://schemas.microsoft.com/office/drawing/2014/main" id="{964CDFB7-D546-448D-AABC-E1C0965BCC73}"/>
               </a:ext>
             </a:extLst>
           </p:cNvPr>
@@ -17102,7 +17147,7 @@
           <p:cNvPr id="10" name="p20-next-title">
             <a:extLst xmlns:a="http://schemas.openxmlformats.org/drawingml/2006/main">
               <a:ext uri="{FF2B5EF4-FFF2-40B4-BE49-F238E27FC236}">
-                <a16:creationId xmlns:a16="http://schemas.microsoft.com/office/drawing/2014/main" id="{BE28D5E0-8302-41A7-BD79-5098AA35395F}"/>
+                <a16:creationId xmlns:a16="http://schemas.microsoft.com/office/drawing/2014/main" id="{B9D6BBBE-E26A-4766-8984-4F4D81CFDABE}"/>
               </a:ext>
             </a:extLst>
           </p:cNvPr>
@@ -17155,7 +17200,7 @@
           <p:cNvPr id="11" name="p20-l1">
             <a:extLst xmlns:a="http://schemas.openxmlformats.org/drawingml/2006/main">
               <a:ext uri="{FF2B5EF4-FFF2-40B4-BE49-F238E27FC236}">
-                <a16:creationId xmlns:a16="http://schemas.microsoft.com/office/drawing/2014/main" id="{932F9A48-C5CB-4B52-A907-089D4E43F9C2}"/>
+                <a16:creationId xmlns:a16="http://schemas.microsoft.com/office/drawing/2014/main" id="{28E71B77-A959-46DB-A139-93A2BD0A89F7}"/>
               </a:ext>
             </a:extLst>
           </p:cNvPr>
@@ -17186,7 +17231,7 @@
           <p:cNvPr id="12" name="p20-l2">
             <a:extLst xmlns:a="http://schemas.openxmlformats.org/drawingml/2006/main">
               <a:ext uri="{FF2B5EF4-FFF2-40B4-BE49-F238E27FC236}">
-                <a16:creationId xmlns:a16="http://schemas.microsoft.com/office/drawing/2014/main" id="{F2E0C6AF-1E12-4ABC-B14D-5D2A44B84B21}"/>
+                <a16:creationId xmlns:a16="http://schemas.microsoft.com/office/drawing/2014/main" id="{76FF8E22-EEDB-4B81-A07B-D024D6FECEAF}"/>
               </a:ext>
             </a:extLst>
           </p:cNvPr>
@@ -17217,7 +17262,7 @@
           <p:cNvPr id="13" name="p20-a">
             <a:extLst xmlns:a="http://schemas.openxmlformats.org/drawingml/2006/main">
               <a:ext uri="{FF2B5EF4-FFF2-40B4-BE49-F238E27FC236}">
-                <a16:creationId xmlns:a16="http://schemas.microsoft.com/office/drawing/2014/main" id="{A766ED5E-EE11-464D-9094-A70E8BD32FD0}"/>
+                <a16:creationId xmlns:a16="http://schemas.microsoft.com/office/drawing/2014/main" id="{B78E1A35-AE7D-4683-9B4A-8D6A36A7A8DE}"/>
               </a:ext>
             </a:extLst>
           </p:cNvPr>
@@ -17302,7 +17347,7 @@
           <p:cNvPr id="14" name="p20-b">
             <a:extLst xmlns:a="http://schemas.openxmlformats.org/drawingml/2006/main">
               <a:ext uri="{FF2B5EF4-FFF2-40B4-BE49-F238E27FC236}">
-                <a16:creationId xmlns:a16="http://schemas.microsoft.com/office/drawing/2014/main" id="{8B7FEF85-AFFC-48CF-95A0-EC7A173316C2}"/>
+                <a16:creationId xmlns:a16="http://schemas.microsoft.com/office/drawing/2014/main" id="{A845F660-384B-480E-B48E-60295D550AC0}"/>
               </a:ext>
             </a:extLst>
           </p:cNvPr>
@@ -17387,7 +17432,7 @@
           <p:cNvPr id="15" name="p20-c">
             <a:extLst xmlns:a="http://schemas.openxmlformats.org/drawingml/2006/main">
               <a:ext uri="{FF2B5EF4-FFF2-40B4-BE49-F238E27FC236}">
-                <a16:creationId xmlns:a16="http://schemas.microsoft.com/office/drawing/2014/main" id="{9C482A61-7CA7-40D8-A4C3-167DA5850F0E}"/>
+                <a16:creationId xmlns:a16="http://schemas.microsoft.com/office/drawing/2014/main" id="{42DD95C1-26BD-4E11-95A5-DCC220815B73}"/>
               </a:ext>
             </a:extLst>
           </p:cNvPr>
@@ -17472,7 +17517,7 @@
           <p:cNvPr id="16" name="p20-bottom">
             <a:extLst xmlns:a="http://schemas.openxmlformats.org/drawingml/2006/main">
               <a:ext uri="{FF2B5EF4-FFF2-40B4-BE49-F238E27FC236}">
-                <a16:creationId xmlns:a16="http://schemas.microsoft.com/office/drawing/2014/main" id="{0B594CD0-D80B-4DC8-98E3-B0115B2F3FE4}"/>
+                <a16:creationId xmlns:a16="http://schemas.microsoft.com/office/drawing/2014/main" id="{BD7ED5D6-9085-4926-A091-51996FAFA603}"/>
               </a:ext>
             </a:extLst>
           </p:cNvPr>
@@ -17619,7 +17664,7 @@
           <p:cNvPr id="6" name="p03-n-0">
             <a:extLst xmlns:a="http://schemas.openxmlformats.org/drawingml/2006/main">
               <a:ext uri="{FF2B5EF4-FFF2-40B4-BE49-F238E27FC236}">
-                <a16:creationId xmlns:a16="http://schemas.microsoft.com/office/drawing/2014/main" id="{1956D6DC-9278-4753-8CEE-9820E0F47DC3}"/>
+                <a16:creationId xmlns:a16="http://schemas.microsoft.com/office/drawing/2014/main" id="{990310C2-9E65-4B17-A1BC-6C66F07D994C}"/>
               </a:ext>
             </a:extLst>
           </p:cNvPr>
@@ -17676,7 +17721,7 @@
           <p:cNvPr id="7" name="p03-g-0">
             <a:extLst xmlns:a="http://schemas.openxmlformats.org/drawingml/2006/main">
               <a:ext uri="{FF2B5EF4-FFF2-40B4-BE49-F238E27FC236}">
-                <a16:creationId xmlns:a16="http://schemas.microsoft.com/office/drawing/2014/main" id="{22A31AD1-6125-4E29-ADAD-3744D78DFC36}"/>
+                <a16:creationId xmlns:a16="http://schemas.microsoft.com/office/drawing/2014/main" id="{0F354A95-2ADA-42B0-BA90-F9F7F346F646}"/>
               </a:ext>
             </a:extLst>
           </p:cNvPr>
@@ -17731,7 +17776,7 @@
           <p:cNvPr id="8" name="p03-n-1">
             <a:extLst xmlns:a="http://schemas.openxmlformats.org/drawingml/2006/main">
               <a:ext uri="{FF2B5EF4-FFF2-40B4-BE49-F238E27FC236}">
-                <a16:creationId xmlns:a16="http://schemas.microsoft.com/office/drawing/2014/main" id="{A68AB3C7-D612-4A2C-BE11-6E56B38D7332}"/>
+                <a16:creationId xmlns:a16="http://schemas.microsoft.com/office/drawing/2014/main" id="{98FE3881-D9B8-479C-818A-5FFA35BAE1BC}"/>
               </a:ext>
             </a:extLst>
           </p:cNvPr>
@@ -17788,7 +17833,7 @@
           <p:cNvPr id="9" name="p03-g-1">
             <a:extLst xmlns:a="http://schemas.openxmlformats.org/drawingml/2006/main">
               <a:ext uri="{FF2B5EF4-FFF2-40B4-BE49-F238E27FC236}">
-                <a16:creationId xmlns:a16="http://schemas.microsoft.com/office/drawing/2014/main" id="{0513DF7F-35A3-414B-8BC3-F1922E352B73}"/>
+                <a16:creationId xmlns:a16="http://schemas.microsoft.com/office/drawing/2014/main" id="{CC0C9BDE-7665-4945-B01A-A37828E9EC49}"/>
               </a:ext>
             </a:extLst>
           </p:cNvPr>
@@ -17843,7 +17888,7 @@
           <p:cNvPr id="10" name="p03-n-2">
             <a:extLst xmlns:a="http://schemas.openxmlformats.org/drawingml/2006/main">
               <a:ext uri="{FF2B5EF4-FFF2-40B4-BE49-F238E27FC236}">
-                <a16:creationId xmlns:a16="http://schemas.microsoft.com/office/drawing/2014/main" id="{F4546635-9448-4F3D-8119-AF5FBF5EEB6A}"/>
+                <a16:creationId xmlns:a16="http://schemas.microsoft.com/office/drawing/2014/main" id="{1EE7C3C1-05E2-4973-805B-082053C5D1B4}"/>
               </a:ext>
             </a:extLst>
           </p:cNvPr>
@@ -17900,7 +17945,7 @@
           <p:cNvPr id="11" name="p03-g-2">
             <a:extLst xmlns:a="http://schemas.openxmlformats.org/drawingml/2006/main">
               <a:ext uri="{FF2B5EF4-FFF2-40B4-BE49-F238E27FC236}">
-                <a16:creationId xmlns:a16="http://schemas.microsoft.com/office/drawing/2014/main" id="{F8F2032D-91A6-4EDD-8F59-6E1602DF70B3}"/>
+                <a16:creationId xmlns:a16="http://schemas.microsoft.com/office/drawing/2014/main" id="{85E21569-A545-4419-A60E-BA719FA7A7FD}"/>
               </a:ext>
             </a:extLst>
           </p:cNvPr>
@@ -17955,7 +18000,7 @@
           <p:cNvPr id="12" name="p03-n-3">
             <a:extLst xmlns:a="http://schemas.openxmlformats.org/drawingml/2006/main">
               <a:ext uri="{FF2B5EF4-FFF2-40B4-BE49-F238E27FC236}">
-                <a16:creationId xmlns:a16="http://schemas.microsoft.com/office/drawing/2014/main" id="{515612C7-39D4-4119-AAB1-50E846883CCC}"/>
+                <a16:creationId xmlns:a16="http://schemas.microsoft.com/office/drawing/2014/main" id="{C95E3E27-3314-4673-A745-EC8DE6B21AEE}"/>
               </a:ext>
             </a:extLst>
           </p:cNvPr>
@@ -18012,7 +18057,7 @@
           <p:cNvPr id="13" name="p03-g-3">
             <a:extLst xmlns:a="http://schemas.openxmlformats.org/drawingml/2006/main">
               <a:ext uri="{FF2B5EF4-FFF2-40B4-BE49-F238E27FC236}">
-                <a16:creationId xmlns:a16="http://schemas.microsoft.com/office/drawing/2014/main" id="{AEA363A9-2332-43FE-9F88-2C0DA0D49FA0}"/>
+                <a16:creationId xmlns:a16="http://schemas.microsoft.com/office/drawing/2014/main" id="{45276444-CDBC-43EF-AE88-47962AD75E55}"/>
               </a:ext>
             </a:extLst>
           </p:cNvPr>
@@ -18067,7 +18112,7 @@
           <p:cNvPr id="14" name="p03-n-4">
             <a:extLst xmlns:a="http://schemas.openxmlformats.org/drawingml/2006/main">
               <a:ext uri="{FF2B5EF4-FFF2-40B4-BE49-F238E27FC236}">
-                <a16:creationId xmlns:a16="http://schemas.microsoft.com/office/drawing/2014/main" id="{57256785-2F99-496C-8FA2-DB32F4AD3188}"/>
+                <a16:creationId xmlns:a16="http://schemas.microsoft.com/office/drawing/2014/main" id="{4DC4327F-452C-40B2-97EB-DB637FE90D7E}"/>
               </a:ext>
             </a:extLst>
           </p:cNvPr>
@@ -18124,7 +18169,7 @@
           <p:cNvPr id="15" name="p03-g-4">
             <a:extLst xmlns:a="http://schemas.openxmlformats.org/drawingml/2006/main">
               <a:ext uri="{FF2B5EF4-FFF2-40B4-BE49-F238E27FC236}">
-                <a16:creationId xmlns:a16="http://schemas.microsoft.com/office/drawing/2014/main" id="{FD87C5F3-C3F9-4ACC-90BE-0EFB7F849D3B}"/>
+                <a16:creationId xmlns:a16="http://schemas.microsoft.com/office/drawing/2014/main" id="{E94C70ED-131B-4B0D-91CE-ADCEAAD9AED7}"/>
               </a:ext>
             </a:extLst>
           </p:cNvPr>
@@ -18179,7 +18224,7 @@
           <p:cNvPr id="16" name="p03-n-5">
             <a:extLst xmlns:a="http://schemas.openxmlformats.org/drawingml/2006/main">
               <a:ext uri="{FF2B5EF4-FFF2-40B4-BE49-F238E27FC236}">
-                <a16:creationId xmlns:a16="http://schemas.microsoft.com/office/drawing/2014/main" id="{77FEDE8E-850B-4F2F-9C00-AFEC2DD7C348}"/>
+                <a16:creationId xmlns:a16="http://schemas.microsoft.com/office/drawing/2014/main" id="{7E02309C-EA13-4E6A-AFF1-BC01F6BA763A}"/>
               </a:ext>
             </a:extLst>
           </p:cNvPr>
@@ -18236,7 +18281,7 @@
           <p:cNvPr id="17" name="p03-g-5">
             <a:extLst xmlns:a="http://schemas.openxmlformats.org/drawingml/2006/main">
               <a:ext uri="{FF2B5EF4-FFF2-40B4-BE49-F238E27FC236}">
-                <a16:creationId xmlns:a16="http://schemas.microsoft.com/office/drawing/2014/main" id="{4E38E295-D0B2-48FE-AB0B-3B2B6C34B624}"/>
+                <a16:creationId xmlns:a16="http://schemas.microsoft.com/office/drawing/2014/main" id="{FBA4354C-D4F7-4BDE-9273-F949FB397C10}"/>
               </a:ext>
             </a:extLst>
           </p:cNvPr>
@@ -18291,7 +18336,7 @@
           <p:cNvPr id="18" name="p03-n-6">
             <a:extLst xmlns:a="http://schemas.openxmlformats.org/drawingml/2006/main">
               <a:ext uri="{FF2B5EF4-FFF2-40B4-BE49-F238E27FC236}">
-                <a16:creationId xmlns:a16="http://schemas.microsoft.com/office/drawing/2014/main" id="{6A14B352-0331-419D-80E8-C6DF34990187}"/>
+                <a16:creationId xmlns:a16="http://schemas.microsoft.com/office/drawing/2014/main" id="{132C5362-4835-4763-8693-558DDCAFC2F7}"/>
               </a:ext>
             </a:extLst>
           </p:cNvPr>
@@ -18348,7 +18393,7 @@
           <p:cNvPr id="19" name="p03-g-6">
             <a:extLst xmlns:a="http://schemas.openxmlformats.org/drawingml/2006/main">
               <a:ext uri="{FF2B5EF4-FFF2-40B4-BE49-F238E27FC236}">
-                <a16:creationId xmlns:a16="http://schemas.microsoft.com/office/drawing/2014/main" id="{A0137CA9-14DE-478E-A04E-1F5ED4423DBA}"/>
+                <a16:creationId xmlns:a16="http://schemas.microsoft.com/office/drawing/2014/main" id="{05F042F0-94E5-4D6F-BE52-80451728D39F}"/>
               </a:ext>
             </a:extLst>
           </p:cNvPr>
@@ -18403,7 +18448,7 @@
           <p:cNvPr id="20" name="p03-sep">
             <a:extLst xmlns:a="http://schemas.openxmlformats.org/drawingml/2006/main">
               <a:ext uri="{FF2B5EF4-FFF2-40B4-BE49-F238E27FC236}">
-                <a16:creationId xmlns:a16="http://schemas.microsoft.com/office/drawing/2014/main" id="{A22E0297-5BD4-4271-9963-DA438D320135}"/>
+                <a16:creationId xmlns:a16="http://schemas.microsoft.com/office/drawing/2014/main" id="{ADA1659C-174B-4B48-87F7-4C7C4F292C59}"/>
               </a:ext>
             </a:extLst>
           </p:cNvPr>
@@ -18434,7 +18479,7 @@
           <p:cNvPr id="21" name="p03-out-title">
             <a:extLst xmlns:a="http://schemas.openxmlformats.org/drawingml/2006/main">
               <a:ext uri="{FF2B5EF4-FFF2-40B4-BE49-F238E27FC236}">
-                <a16:creationId xmlns:a16="http://schemas.microsoft.com/office/drawing/2014/main" id="{69E53466-FF3A-48E2-B428-10DD8F818B9C}"/>
+                <a16:creationId xmlns:a16="http://schemas.microsoft.com/office/drawing/2014/main" id="{4DAF74BB-EF61-4D46-B0C3-2A72EDE2582E}"/>
               </a:ext>
             </a:extLst>
           </p:cNvPr>
@@ -18487,7 +18532,7 @@
           <p:cNvPr id="22" name="p03-out">
             <a:extLst xmlns:a="http://schemas.openxmlformats.org/drawingml/2006/main">
               <a:ext uri="{FF2B5EF4-FFF2-40B4-BE49-F238E27FC236}">
-                <a16:creationId xmlns:a16="http://schemas.microsoft.com/office/drawing/2014/main" id="{5C2BE00A-B72D-4F2D-95DD-D16911E13B77}"/>
+                <a16:creationId xmlns:a16="http://schemas.microsoft.com/office/drawing/2014/main" id="{79FDE32F-7C9A-4782-9D1C-A96557591C83}"/>
               </a:ext>
             </a:extLst>
           </p:cNvPr>
@@ -18680,7 +18725,7 @@
           <p:cNvPr id="23" name="p03-bottom">
             <a:extLst xmlns:a="http://schemas.openxmlformats.org/drawingml/2006/main">
               <a:ext uri="{FF2B5EF4-FFF2-40B4-BE49-F238E27FC236}">
-                <a16:creationId xmlns:a16="http://schemas.microsoft.com/office/drawing/2014/main" id="{7F281AA3-DC9E-4EC1-B6E9-CAD0FBA02435}"/>
+                <a16:creationId xmlns:a16="http://schemas.microsoft.com/office/drawing/2014/main" id="{B9102CE3-F7A3-4830-9743-5F66E2427D8B}"/>
               </a:ext>
             </a:extLst>
           </p:cNvPr>
@@ -18827,7 +18872,7 @@
           <p:cNvPr id="6" name="p04-def">
             <a:extLst xmlns:a="http://schemas.openxmlformats.org/drawingml/2006/main">
               <a:ext uri="{FF2B5EF4-FFF2-40B4-BE49-F238E27FC236}">
-                <a16:creationId xmlns:a16="http://schemas.microsoft.com/office/drawing/2014/main" id="{84CE6332-90F4-4CE9-8151-C5B991995955}"/>
+                <a16:creationId xmlns:a16="http://schemas.microsoft.com/office/drawing/2014/main" id="{82B13EF5-5D6F-4AB9-9898-BA317F8DC51C}"/>
               </a:ext>
             </a:extLst>
           </p:cNvPr>
@@ -18882,7 +18927,7 @@
           <p:cNvPr id="7" name="p04-l-0">
             <a:extLst xmlns:a="http://schemas.openxmlformats.org/drawingml/2006/main">
               <a:ext uri="{FF2B5EF4-FFF2-40B4-BE49-F238E27FC236}">
-                <a16:creationId xmlns:a16="http://schemas.microsoft.com/office/drawing/2014/main" id="{B29FABAE-A4CE-4AB6-8B3D-36FFD3FF5775}"/>
+                <a16:creationId xmlns:a16="http://schemas.microsoft.com/office/drawing/2014/main" id="{4F234D6E-FB89-47B1-ABDA-936F88EBDC14}"/>
               </a:ext>
             </a:extLst>
           </p:cNvPr>
@@ -18939,7 +18984,7 @@
           <p:cNvPr id="8" name="p04-t-0">
             <a:extLst xmlns:a="http://schemas.openxmlformats.org/drawingml/2006/main">
               <a:ext uri="{FF2B5EF4-FFF2-40B4-BE49-F238E27FC236}">
-                <a16:creationId xmlns:a16="http://schemas.microsoft.com/office/drawing/2014/main" id="{8F701B98-D7A3-4AAF-8438-99DFEC7B0904}"/>
+                <a16:creationId xmlns:a16="http://schemas.microsoft.com/office/drawing/2014/main" id="{D5FB3891-A8BA-41BB-B8E9-B5B87E546C2E}"/>
               </a:ext>
             </a:extLst>
           </p:cNvPr>
@@ -19019,7 +19064,7 @@
                 <a:ea typeface="Microsoft YaHei"/>
                 <a:cs typeface="Microsoft YaHei"/>
               </a:rPr>
-              <a:t>贯穿案例：自由摘要</a:t>
+              <a:t>贯穿案例：虚构教学例：自由摘要</a:t>
             </a:r>
           </a:p>
         </p:txBody>
@@ -19029,7 +19074,7 @@
           <p:cNvPr id="9" name="p04-l-1">
             <a:extLst xmlns:a="http://schemas.openxmlformats.org/drawingml/2006/main">
               <a:ext uri="{FF2B5EF4-FFF2-40B4-BE49-F238E27FC236}">
-                <a16:creationId xmlns:a16="http://schemas.microsoft.com/office/drawing/2014/main" id="{AB282627-38FF-4DE2-AA11-E9A5213BF958}"/>
+                <a16:creationId xmlns:a16="http://schemas.microsoft.com/office/drawing/2014/main" id="{3AD18C9C-1ECC-4180-85F8-54B51FF3CB9E}"/>
               </a:ext>
             </a:extLst>
           </p:cNvPr>
@@ -19086,7 +19131,7 @@
           <p:cNvPr id="10" name="p04-t-1">
             <a:extLst xmlns:a="http://schemas.openxmlformats.org/drawingml/2006/main">
               <a:ext uri="{FF2B5EF4-FFF2-40B4-BE49-F238E27FC236}">
-                <a16:creationId xmlns:a16="http://schemas.microsoft.com/office/drawing/2014/main" id="{CC0522D5-0260-4E5F-8AAE-1D7DDB220227}"/>
+                <a16:creationId xmlns:a16="http://schemas.microsoft.com/office/drawing/2014/main" id="{A638C11F-53C5-4A8C-8339-191128FC2719}"/>
               </a:ext>
             </a:extLst>
           </p:cNvPr>
@@ -19166,9 +19211,103 @@
                 <a:ea typeface="Microsoft YaHei"/>
                 <a:cs typeface="Microsoft YaHei"/>
               </a:rPr>
-              <a:t>贯穿案例：few-shot 摘要</a:t>
-            </a:r>
-          </a:p>
+              <a:t>贯穿案例：虚构教学例：few-shot 摘要</a:t>
+            </a:r>
+          </a:p>
+        </p:txBody>
+      </p:sp>
+      <p:sp>
+        <p:nvSpPr>
+          <p:cNvPr id="11" name="p04-l-2">
+            <a:extLst xmlns:a="http://schemas.openxmlformats.org/drawingml/2006/main">
+              <a:ext uri="{FF2B5EF4-FFF2-40B4-BE49-F238E27FC236}">
+                <a16:creationId xmlns:a16="http://schemas.microsoft.com/office/drawing/2014/main" id="{015E979E-943E-4EB0-AB99-D7F407A07601}"/>
+              </a:ext>
+            </a:extLst>
+          </p:cNvPr>
+          <p:cNvSpPr>
+            <a:spLocks xmlns:a="http://schemas.openxmlformats.org/drawingml/2006/main" noGrp="1"/>
+          </p:cNvSpPr>
+          <p:nvPr/>
+        </p:nvSpPr>
+        <p:spPr>
+          <a:xfrm xmlns:a="http://schemas.openxmlformats.org/drawingml/2006/main">
+            <a:off x="8324850" y="2038350"/>
+            <a:ext cx="1104900" cy="457200"/>
+          </a:xfrm>
+          <a:prstGeom xmlns:a="http://schemas.openxmlformats.org/drawingml/2006/main" prst="roundRect">
+            <a:avLst>
+              <a:gd name="adj" fmla="val 16667"/>
+            </a:avLst>
+          </a:prstGeom>
+          <a:solidFill xmlns:a="http://schemas.openxmlformats.org/drawingml/2006/main">
+            <a:srgbClr val="28745A"/>
+          </a:solidFill>
+          <a:ln xmlns:a="http://schemas.openxmlformats.org/drawingml/2006/main" w="0">
+            <a:noFill/>
+            <a:prstDash val="solid"/>
+          </a:ln>
+        </p:spPr>
+        <p:txBody>
+          <a:bodyPr xmlns:a="http://schemas.openxmlformats.org/drawingml/2006/main" lIns="76200" tIns="38100" rIns="76200" bIns="38100" anchor="ctr"/>
+          <a:lstStyle xmlns:a="http://schemas.openxmlformats.org/drawingml/2006/main"/>
+          <a:p xmlns:a="http://schemas.openxmlformats.org/drawingml/2006/main">
+            <a:pPr algn="ctr">
+              <a:defRPr sz="1500" b="1">
+                <a:solidFill>
+                  <a:srgbClr val="FFFFFF"/>
+                </a:solidFill>
+              </a:defRPr>
+            </a:pPr>
+            <a:r>
+              <a:rPr sz="1500" b="1">
+                <a:solidFill>
+                  <a:srgbClr val="FFFFFF"/>
+                </a:solidFill>
+                <a:latin typeface="Microsoft YaHei"/>
+                <a:ea typeface="Microsoft YaHei"/>
+                <a:cs typeface="Microsoft YaHei"/>
+              </a:rPr>
+              <a:t>消融</a:t>
+            </a:r>
+          </a:p>
+        </p:txBody>
+      </p:sp>
+      <p:sp>
+        <p:nvSpPr>
+          <p:cNvPr id="12" name="p04-t-2">
+            <a:extLst xmlns:a="http://schemas.openxmlformats.org/drawingml/2006/main">
+              <a:ext uri="{FF2B5EF4-FFF2-40B4-BE49-F238E27FC236}">
+                <a16:creationId xmlns:a16="http://schemas.microsoft.com/office/drawing/2014/main" id="{AA2FB49A-BE3B-4C91-B4D9-0C218365FF64}"/>
+              </a:ext>
+            </a:extLst>
+          </p:cNvPr>
+          <p:cNvSpPr>
+            <a:spLocks xmlns:a="http://schemas.openxmlformats.org/drawingml/2006/main" noGrp="1"/>
+          </p:cNvSpPr>
+          <p:nvPr/>
+        </p:nvSpPr>
+        <p:spPr>
+          <a:xfrm xmlns:a="http://schemas.openxmlformats.org/drawingml/2006/main">
+            <a:off x="8324850" y="2609850"/>
+            <a:ext cx="3390900" cy="1619250"/>
+          </a:xfrm>
+          <a:prstGeom xmlns:a="http://schemas.openxmlformats.org/drawingml/2006/main" prst="roundRect">
+            <a:avLst>
+              <a:gd name="adj" fmla="val 4706"/>
+            </a:avLst>
+          </a:prstGeom>
+          <a:solidFill xmlns:a="http://schemas.openxmlformats.org/drawingml/2006/main">
+            <a:srgbClr val="E7F2ED"/>
+          </a:solidFill>
+          <a:ln xmlns:a="http://schemas.openxmlformats.org/drawingml/2006/main" w="0">
+            <a:noFill/>
+            <a:prstDash val="solid"/>
+          </a:ln>
+        </p:spPr>
+        <p:txBody>
+          <a:bodyPr xmlns:a="http://schemas.openxmlformats.org/drawingml/2006/main" lIns="76200" tIns="38100" rIns="76200" bIns="38100" anchor="ctr"/>
+          <a:lstStyle xmlns:a="http://schemas.openxmlformats.org/drawingml/2006/main"/>
           <a:p xmlns:a="http://schemas.openxmlformats.org/drawingml/2006/main">
             <a:pPr algn="ctr">
               <a:lnSpc>
@@ -19177,116 +19316,27 @@
               <a:buNone/>
               <a:defRPr sz="1575" b="1">
                 <a:solidFill>
-                  <a:srgbClr val="C8161E"/>
+                  <a:srgbClr val="28745A"/>
                 </a:solidFill>
               </a:defRPr>
             </a:pPr>
             <a:r>
               <a:rPr sz="1575" b="1">
                 <a:solidFill>
-                  <a:srgbClr val="C8161E"/>
-                </a:solidFill>
-                <a:latin typeface="Microsoft YaHei"/>
-                <a:ea typeface="Microsoft YaHei"/>
-                <a:cs typeface="Microsoft YaHei"/>
-              </a:rPr>
-              <a:t>本课周期外</a:t>
-            </a:r>
-          </a:p>
-        </p:txBody>
-      </p:sp>
-      <p:sp>
-        <p:nvSpPr>
-          <p:cNvPr id="11" name="p04-l-2">
-            <a:extLst xmlns:a="http://schemas.openxmlformats.org/drawingml/2006/main">
-              <a:ext uri="{FF2B5EF4-FFF2-40B4-BE49-F238E27FC236}">
-                <a16:creationId xmlns:a16="http://schemas.microsoft.com/office/drawing/2014/main" id="{B83F9347-E046-4B9E-BC8D-C337564F28FA}"/>
-              </a:ext>
-            </a:extLst>
-          </p:cNvPr>
-          <p:cNvSpPr>
-            <a:spLocks xmlns:a="http://schemas.openxmlformats.org/drawingml/2006/main" noGrp="1"/>
-          </p:cNvSpPr>
-          <p:nvPr/>
-        </p:nvSpPr>
-        <p:spPr>
-          <a:xfrm xmlns:a="http://schemas.openxmlformats.org/drawingml/2006/main">
-            <a:off x="8324850" y="2038350"/>
-            <a:ext cx="1104900" cy="457200"/>
-          </a:xfrm>
-          <a:prstGeom xmlns:a="http://schemas.openxmlformats.org/drawingml/2006/main" prst="roundRect">
-            <a:avLst>
-              <a:gd name="adj" fmla="val 16667"/>
-            </a:avLst>
-          </a:prstGeom>
-          <a:solidFill xmlns:a="http://schemas.openxmlformats.org/drawingml/2006/main">
-            <a:srgbClr val="28745A"/>
-          </a:solidFill>
-          <a:ln xmlns:a="http://schemas.openxmlformats.org/drawingml/2006/main" w="0">
-            <a:noFill/>
-            <a:prstDash val="solid"/>
-          </a:ln>
-        </p:spPr>
-        <p:txBody>
-          <a:bodyPr xmlns:a="http://schemas.openxmlformats.org/drawingml/2006/main" lIns="76200" tIns="38100" rIns="76200" bIns="38100" anchor="ctr"/>
-          <a:lstStyle xmlns:a="http://schemas.openxmlformats.org/drawingml/2006/main"/>
-          <a:p xmlns:a="http://schemas.openxmlformats.org/drawingml/2006/main">
-            <a:pPr algn="ctr">
-              <a:defRPr sz="1500" b="1">
-                <a:solidFill>
-                  <a:srgbClr val="FFFFFF"/>
-                </a:solidFill>
-              </a:defRPr>
-            </a:pPr>
-            <a:r>
-              <a:rPr sz="1500" b="1">
-                <a:solidFill>
-                  <a:srgbClr val="FFFFFF"/>
-                </a:solidFill>
-                <a:latin typeface="Microsoft YaHei"/>
-                <a:ea typeface="Microsoft YaHei"/>
-                <a:cs typeface="Microsoft YaHei"/>
-              </a:rPr>
-              <a:t>消融</a:t>
-            </a:r>
-          </a:p>
-        </p:txBody>
-      </p:sp>
-      <p:sp>
-        <p:nvSpPr>
-          <p:cNvPr id="12" name="p04-t-2">
-            <a:extLst xmlns:a="http://schemas.openxmlformats.org/drawingml/2006/main">
-              <a:ext uri="{FF2B5EF4-FFF2-40B4-BE49-F238E27FC236}">
-                <a16:creationId xmlns:a16="http://schemas.microsoft.com/office/drawing/2014/main" id="{E479E208-6A04-4993-84A7-B6B73174E667}"/>
-              </a:ext>
-            </a:extLst>
-          </p:cNvPr>
-          <p:cNvSpPr>
-            <a:spLocks xmlns:a="http://schemas.openxmlformats.org/drawingml/2006/main" noGrp="1"/>
-          </p:cNvSpPr>
-          <p:nvPr/>
-        </p:nvSpPr>
-        <p:spPr>
-          <a:xfrm xmlns:a="http://schemas.openxmlformats.org/drawingml/2006/main">
-            <a:off x="8324850" y="2609850"/>
-            <a:ext cx="3390900" cy="1619250"/>
-          </a:xfrm>
-          <a:prstGeom xmlns:a="http://schemas.openxmlformats.org/drawingml/2006/main" prst="roundRect">
-            <a:avLst>
-              <a:gd name="adj" fmla="val 4706"/>
-            </a:avLst>
-          </a:prstGeom>
-          <a:solidFill xmlns:a="http://schemas.openxmlformats.org/drawingml/2006/main">
-            <a:srgbClr val="E7F2ED"/>
-          </a:solidFill>
-          <a:ln xmlns:a="http://schemas.openxmlformats.org/drawingml/2006/main" w="0">
-            <a:noFill/>
-            <a:prstDash val="solid"/>
-          </a:ln>
-        </p:spPr>
-        <p:txBody>
-          <a:bodyPr xmlns:a="http://schemas.openxmlformats.org/drawingml/2006/main" lIns="76200" tIns="38100" rIns="76200" bIns="38100" anchor="ctr"/>
-          <a:lstStyle xmlns:a="http://schemas.openxmlformats.org/drawingml/2006/main"/>
+                  <a:srgbClr val="28745A"/>
+                </a:solidFill>
+                <a:latin typeface="Microsoft YaHei"/>
+                <a:ea typeface="Microsoft YaHei"/>
+                <a:cs typeface="Microsoft YaHei"/>
+              </a:rPr>
+              <a:t>去掉一个关键模块</a:t>
+            </a:r>
+          </a:p>
+          <a:p xmlns:a="http://schemas.openxmlformats.org/drawingml/2006/main">
+            <a:r>
+              <a:t/>
+            </a:r>
+          </a:p>
           <a:p xmlns:a="http://schemas.openxmlformats.org/drawingml/2006/main">
             <a:pPr algn="ctr">
               <a:lnSpc>
@@ -19308,36 +19358,7 @@
                 <a:ea typeface="Microsoft YaHei"/>
                 <a:cs typeface="Microsoft YaHei"/>
               </a:rPr>
-              <a:t>去掉一个关键模块</a:t>
-            </a:r>
-          </a:p>
-          <a:p xmlns:a="http://schemas.openxmlformats.org/drawingml/2006/main">
-            <a:r>
-              <a:t/>
-            </a:r>
-          </a:p>
-          <a:p xmlns:a="http://schemas.openxmlformats.org/drawingml/2006/main">
-            <a:pPr algn="ctr">
-              <a:lnSpc>
-                <a:spcPct val="118000"/>
-              </a:lnSpc>
-              <a:buNone/>
-              <a:defRPr sz="1575" b="1">
-                <a:solidFill>
-                  <a:srgbClr val="28745A"/>
-                </a:solidFill>
-              </a:defRPr>
-            </a:pPr>
-            <a:r>
-              <a:rPr sz="1575" b="1">
-                <a:solidFill>
-                  <a:srgbClr val="28745A"/>
-                </a:solidFill>
-                <a:latin typeface="Microsoft YaHei"/>
-                <a:ea typeface="Microsoft YaHei"/>
-                <a:cs typeface="Microsoft YaHei"/>
-              </a:rPr>
-              <a:t>贯穿案例：阅读卡去原文位置</a:t>
+              <a:t>贯穿案例：虚构教学例：阅读卡去定位</a:t>
             </a:r>
           </a:p>
         </p:txBody>
@@ -19347,7 +19368,7 @@
           <p:cNvPr id="13" name="p04-bottom">
             <a:extLst xmlns:a="http://schemas.openxmlformats.org/drawingml/2006/main">
               <a:ext uri="{FF2B5EF4-FFF2-40B4-BE49-F238E27FC236}">
-                <a16:creationId xmlns:a16="http://schemas.microsoft.com/office/drawing/2014/main" id="{689208CF-9AC9-4DBF-B3EE-124FFEA55AD6}"/>
+                <a16:creationId xmlns:a16="http://schemas.microsoft.com/office/drawing/2014/main" id="{3506B52A-947B-4F5A-8BC9-92005F515E79}"/>
               </a:ext>
             </a:extLst>
           </p:cNvPr>
@@ -19496,7 +19517,7 @@
           <p:cNvPr id="6" name="p05-n-0">
             <a:extLst xmlns:a="http://schemas.openxmlformats.org/drawingml/2006/main">
               <a:ext uri="{FF2B5EF4-FFF2-40B4-BE49-F238E27FC236}">
-                <a16:creationId xmlns:a16="http://schemas.microsoft.com/office/drawing/2014/main" id="{43194346-DD28-4695-B36D-E12B615272F0}"/>
+                <a16:creationId xmlns:a16="http://schemas.microsoft.com/office/drawing/2014/main" id="{D35425B7-6606-4E0C-A8F2-BCB7CB5D8DBB}"/>
               </a:ext>
             </a:extLst>
           </p:cNvPr>
@@ -19553,7 +19574,7 @@
           <p:cNvPr id="7" name="p05-main-0">
             <a:extLst xmlns:a="http://schemas.openxmlformats.org/drawingml/2006/main">
               <a:ext uri="{FF2B5EF4-FFF2-40B4-BE49-F238E27FC236}">
-                <a16:creationId xmlns:a16="http://schemas.microsoft.com/office/drawing/2014/main" id="{D7B2253E-60D1-42F9-B441-5CA0EC2AB884}"/>
+                <a16:creationId xmlns:a16="http://schemas.microsoft.com/office/drawing/2014/main" id="{34BA12B2-51A7-4F6A-A02A-EEAAC8F75AB9}"/>
               </a:ext>
             </a:extLst>
           </p:cNvPr>
@@ -19608,7 +19629,7 @@
           <p:cNvPr id="8" name="p05-why-0">
             <a:extLst xmlns:a="http://schemas.openxmlformats.org/drawingml/2006/main">
               <a:ext uri="{FF2B5EF4-FFF2-40B4-BE49-F238E27FC236}">
-                <a16:creationId xmlns:a16="http://schemas.microsoft.com/office/drawing/2014/main" id="{C9B46E63-249E-46E8-9971-7E72772C5219}"/>
+                <a16:creationId xmlns:a16="http://schemas.microsoft.com/office/drawing/2014/main" id="{3D20078A-E430-4EFF-8DD4-BAAD64C4A7FE}"/>
               </a:ext>
             </a:extLst>
           </p:cNvPr>
@@ -19665,7 +19686,7 @@
           <p:cNvPr id="9" name="p05-n-1">
             <a:extLst xmlns:a="http://schemas.openxmlformats.org/drawingml/2006/main">
               <a:ext uri="{FF2B5EF4-FFF2-40B4-BE49-F238E27FC236}">
-                <a16:creationId xmlns:a16="http://schemas.microsoft.com/office/drawing/2014/main" id="{6F3351C4-9CDD-4703-BF6E-5067D3D6D825}"/>
+                <a16:creationId xmlns:a16="http://schemas.microsoft.com/office/drawing/2014/main" id="{B0E1ADA2-8CE0-4335-B4A1-DAA239BA9672}"/>
               </a:ext>
             </a:extLst>
           </p:cNvPr>
@@ -19722,7 +19743,7 @@
           <p:cNvPr id="10" name="p05-main-1">
             <a:extLst xmlns:a="http://schemas.openxmlformats.org/drawingml/2006/main">
               <a:ext uri="{FF2B5EF4-FFF2-40B4-BE49-F238E27FC236}">
-                <a16:creationId xmlns:a16="http://schemas.microsoft.com/office/drawing/2014/main" id="{8C088235-73F7-4732-AA0B-C5A58C707C46}"/>
+                <a16:creationId xmlns:a16="http://schemas.microsoft.com/office/drawing/2014/main" id="{D0D7B4FE-14A2-4A2F-B1BD-56C82F9BAD4D}"/>
               </a:ext>
             </a:extLst>
           </p:cNvPr>
@@ -19777,7 +19798,7 @@
           <p:cNvPr id="11" name="p05-why-1">
             <a:extLst xmlns:a="http://schemas.openxmlformats.org/drawingml/2006/main">
               <a:ext uri="{FF2B5EF4-FFF2-40B4-BE49-F238E27FC236}">
-                <a16:creationId xmlns:a16="http://schemas.microsoft.com/office/drawing/2014/main" id="{869FFA2D-A629-456A-8D6E-0C165F4F6A68}"/>
+                <a16:creationId xmlns:a16="http://schemas.microsoft.com/office/drawing/2014/main" id="{FCFF69ED-8B01-4AE4-AA88-8D5DF48A712D}"/>
               </a:ext>
             </a:extLst>
           </p:cNvPr>
@@ -19834,7 +19855,7 @@
           <p:cNvPr id="12" name="p05-n-2">
             <a:extLst xmlns:a="http://schemas.openxmlformats.org/drawingml/2006/main">
               <a:ext uri="{FF2B5EF4-FFF2-40B4-BE49-F238E27FC236}">
-                <a16:creationId xmlns:a16="http://schemas.microsoft.com/office/drawing/2014/main" id="{E232E359-CAAA-44F3-AFA8-472D5CB4FBB0}"/>
+                <a16:creationId xmlns:a16="http://schemas.microsoft.com/office/drawing/2014/main" id="{C9C778CF-E573-40A1-B40A-292A4060BC5A}"/>
               </a:ext>
             </a:extLst>
           </p:cNvPr>
@@ -19891,7 +19912,7 @@
           <p:cNvPr id="13" name="p05-main-2">
             <a:extLst xmlns:a="http://schemas.openxmlformats.org/drawingml/2006/main">
               <a:ext uri="{FF2B5EF4-FFF2-40B4-BE49-F238E27FC236}">
-                <a16:creationId xmlns:a16="http://schemas.microsoft.com/office/drawing/2014/main" id="{31BE3411-2014-4E80-84E1-D696E5678FAD}"/>
+                <a16:creationId xmlns:a16="http://schemas.microsoft.com/office/drawing/2014/main" id="{031AB1BD-BBF2-48EF-AAEE-4AD1DFD46DE8}"/>
               </a:ext>
             </a:extLst>
           </p:cNvPr>
@@ -19946,7 +19967,7 @@
           <p:cNvPr id="14" name="p05-why-2">
             <a:extLst xmlns:a="http://schemas.openxmlformats.org/drawingml/2006/main">
               <a:ext uri="{FF2B5EF4-FFF2-40B4-BE49-F238E27FC236}">
-                <a16:creationId xmlns:a16="http://schemas.microsoft.com/office/drawing/2014/main" id="{102DC252-4B41-4A85-B836-064813AC3DA8}"/>
+                <a16:creationId xmlns:a16="http://schemas.microsoft.com/office/drawing/2014/main" id="{88C7B4D3-2274-491E-B55A-1A7BA8C31FF5}"/>
               </a:ext>
             </a:extLst>
           </p:cNvPr>
@@ -20003,7 +20024,7 @@
           <p:cNvPr id="15" name="p05-n-3">
             <a:extLst xmlns:a="http://schemas.openxmlformats.org/drawingml/2006/main">
               <a:ext uri="{FF2B5EF4-FFF2-40B4-BE49-F238E27FC236}">
-                <a16:creationId xmlns:a16="http://schemas.microsoft.com/office/drawing/2014/main" id="{B3A263AE-FECD-4089-8E5A-7C100DB511BC}"/>
+                <a16:creationId xmlns:a16="http://schemas.microsoft.com/office/drawing/2014/main" id="{E307D272-D6D5-4B18-A4E5-DC2974B65718}"/>
               </a:ext>
             </a:extLst>
           </p:cNvPr>
@@ -20060,7 +20081,7 @@
           <p:cNvPr id="16" name="p05-main-3">
             <a:extLst xmlns:a="http://schemas.openxmlformats.org/drawingml/2006/main">
               <a:ext uri="{FF2B5EF4-FFF2-40B4-BE49-F238E27FC236}">
-                <a16:creationId xmlns:a16="http://schemas.microsoft.com/office/drawing/2014/main" id="{4C5AAA0B-3902-4FB7-9B34-445469FB9781}"/>
+                <a16:creationId xmlns:a16="http://schemas.microsoft.com/office/drawing/2014/main" id="{8F78DF74-FA50-4437-BDBB-33CFCD94DA7F}"/>
               </a:ext>
             </a:extLst>
           </p:cNvPr>
@@ -20115,7 +20136,7 @@
           <p:cNvPr id="17" name="p05-why-3">
             <a:extLst xmlns:a="http://schemas.openxmlformats.org/drawingml/2006/main">
               <a:ext uri="{FF2B5EF4-FFF2-40B4-BE49-F238E27FC236}">
-                <a16:creationId xmlns:a16="http://schemas.microsoft.com/office/drawing/2014/main" id="{7D4785D8-D62B-477E-9DE6-0220E0B7E474}"/>
+                <a16:creationId xmlns:a16="http://schemas.microsoft.com/office/drawing/2014/main" id="{29E73D5A-C59C-46A9-BAAE-B3EE3A2B866C}"/>
               </a:ext>
             </a:extLst>
           </p:cNvPr>
@@ -20172,7 +20193,7 @@
           <p:cNvPr id="18" name="p05-n-4">
             <a:extLst xmlns:a="http://schemas.openxmlformats.org/drawingml/2006/main">
               <a:ext uri="{FF2B5EF4-FFF2-40B4-BE49-F238E27FC236}">
-                <a16:creationId xmlns:a16="http://schemas.microsoft.com/office/drawing/2014/main" id="{F5A6C75D-4B7E-4B6E-AC77-039D03FDA79E}"/>
+                <a16:creationId xmlns:a16="http://schemas.microsoft.com/office/drawing/2014/main" id="{19B591A5-AFCC-4EFE-9826-22DEB58B921E}"/>
               </a:ext>
             </a:extLst>
           </p:cNvPr>
@@ -20229,7 +20250,7 @@
           <p:cNvPr id="19" name="p05-main-4">
             <a:extLst xmlns:a="http://schemas.openxmlformats.org/drawingml/2006/main">
               <a:ext uri="{FF2B5EF4-FFF2-40B4-BE49-F238E27FC236}">
-                <a16:creationId xmlns:a16="http://schemas.microsoft.com/office/drawing/2014/main" id="{7DF0FDA0-4D40-43CB-A21D-C40067F31744}"/>
+                <a16:creationId xmlns:a16="http://schemas.microsoft.com/office/drawing/2014/main" id="{9CC63FEF-526C-44D6-A8F1-E15E969CC112}"/>
               </a:ext>
             </a:extLst>
           </p:cNvPr>
@@ -20284,7 +20305,7 @@
           <p:cNvPr id="20" name="p05-why-4">
             <a:extLst xmlns:a="http://schemas.openxmlformats.org/drawingml/2006/main">
               <a:ext uri="{FF2B5EF4-FFF2-40B4-BE49-F238E27FC236}">
-                <a16:creationId xmlns:a16="http://schemas.microsoft.com/office/drawing/2014/main" id="{AA5788D7-4C6F-44A5-A9B6-044217F5DCE7}"/>
+                <a16:creationId xmlns:a16="http://schemas.microsoft.com/office/drawing/2014/main" id="{06CA5B73-2863-4448-9F41-916B86EC2C9B}"/>
               </a:ext>
             </a:extLst>
           </p:cNvPr>
@@ -20341,7 +20362,7 @@
           <p:cNvPr id="21" name="p05-bottom">
             <a:extLst xmlns:a="http://schemas.openxmlformats.org/drawingml/2006/main">
               <a:ext uri="{FF2B5EF4-FFF2-40B4-BE49-F238E27FC236}">
-                <a16:creationId xmlns:a16="http://schemas.microsoft.com/office/drawing/2014/main" id="{A22548CC-E4C2-48D8-BBB1-BD8BD4CFD6DD}"/>
+                <a16:creationId xmlns:a16="http://schemas.microsoft.com/office/drawing/2014/main" id="{6D4AB84F-2D25-4FA0-B7F6-F5AE076F7388}"/>
               </a:ext>
             </a:extLst>
           </p:cNvPr>
@@ -20488,7 +20509,7 @@
           <p:cNvPr id="6" name="p06-table-h-0">
             <a:extLst xmlns:a="http://schemas.openxmlformats.org/drawingml/2006/main">
               <a:ext uri="{FF2B5EF4-FFF2-40B4-BE49-F238E27FC236}">
-                <a16:creationId xmlns:a16="http://schemas.microsoft.com/office/drawing/2014/main" id="{00A13377-10C0-46E5-9A1E-1719C8F5894E}"/>
+                <a16:creationId xmlns:a16="http://schemas.microsoft.com/office/drawing/2014/main" id="{675D1066-5F41-46BE-A304-1E4F99A24690}"/>
               </a:ext>
             </a:extLst>
           </p:cNvPr>
@@ -20543,7 +20564,7 @@
           <p:cNvPr id="7" name="p06-table-h-1">
             <a:extLst xmlns:a="http://schemas.openxmlformats.org/drawingml/2006/main">
               <a:ext uri="{FF2B5EF4-FFF2-40B4-BE49-F238E27FC236}">
-                <a16:creationId xmlns:a16="http://schemas.microsoft.com/office/drawing/2014/main" id="{0E7614E4-6206-4633-A45B-F8D1D6803D15}"/>
+                <a16:creationId xmlns:a16="http://schemas.microsoft.com/office/drawing/2014/main" id="{6CD92C31-7F25-4991-9474-CE3007C68286}"/>
               </a:ext>
             </a:extLst>
           </p:cNvPr>
@@ -20598,7 +20619,7 @@
           <p:cNvPr id="8" name="p06-table-h-2">
             <a:extLst xmlns:a="http://schemas.openxmlformats.org/drawingml/2006/main">
               <a:ext uri="{FF2B5EF4-FFF2-40B4-BE49-F238E27FC236}">
-                <a16:creationId xmlns:a16="http://schemas.microsoft.com/office/drawing/2014/main" id="{B0213C31-3E48-4731-81D6-193695626DC4}"/>
+                <a16:creationId xmlns:a16="http://schemas.microsoft.com/office/drawing/2014/main" id="{505BAE0D-88E6-4E1D-ADDD-EA4B34FBD67B}"/>
               </a:ext>
             </a:extLst>
           </p:cNvPr>
@@ -20653,7 +20674,7 @@
           <p:cNvPr id="9" name="p06-table-r0-0">
             <a:extLst xmlns:a="http://schemas.openxmlformats.org/drawingml/2006/main">
               <a:ext uri="{FF2B5EF4-FFF2-40B4-BE49-F238E27FC236}">
-                <a16:creationId xmlns:a16="http://schemas.microsoft.com/office/drawing/2014/main" id="{4885C0C8-63A7-4A32-8602-90E13CE42711}"/>
+                <a16:creationId xmlns:a16="http://schemas.microsoft.com/office/drawing/2014/main" id="{BA0A83E9-4841-4735-8678-C29229A19747}"/>
               </a:ext>
             </a:extLst>
           </p:cNvPr>
@@ -20714,7 +20735,7 @@
           <p:cNvPr id="10" name="p06-table-r0-1">
             <a:extLst xmlns:a="http://schemas.openxmlformats.org/drawingml/2006/main">
               <a:ext uri="{FF2B5EF4-FFF2-40B4-BE49-F238E27FC236}">
-                <a16:creationId xmlns:a16="http://schemas.microsoft.com/office/drawing/2014/main" id="{A0EB4424-1CD7-4706-961B-15FA09028AB6}"/>
+                <a16:creationId xmlns:a16="http://schemas.microsoft.com/office/drawing/2014/main" id="{BCACF3E2-C437-448A-B711-F4E7D3B31F5D}"/>
               </a:ext>
             </a:extLst>
           </p:cNvPr>
@@ -20775,7 +20796,7 @@
           <p:cNvPr id="11" name="p06-table-r0-2">
             <a:extLst xmlns:a="http://schemas.openxmlformats.org/drawingml/2006/main">
               <a:ext uri="{FF2B5EF4-FFF2-40B4-BE49-F238E27FC236}">
-                <a16:creationId xmlns:a16="http://schemas.microsoft.com/office/drawing/2014/main" id="{F54DC6BD-FC82-422F-A9B6-D0BB796089F9}"/>
+                <a16:creationId xmlns:a16="http://schemas.microsoft.com/office/drawing/2014/main" id="{25155667-64C6-46E2-88B2-ABF19A508955}"/>
               </a:ext>
             </a:extLst>
           </p:cNvPr>
@@ -20836,7 +20857,7 @@
           <p:cNvPr id="12" name="p06-table-r1-0">
             <a:extLst xmlns:a="http://schemas.openxmlformats.org/drawingml/2006/main">
               <a:ext uri="{FF2B5EF4-FFF2-40B4-BE49-F238E27FC236}">
-                <a16:creationId xmlns:a16="http://schemas.microsoft.com/office/drawing/2014/main" id="{A21DC2C4-412F-48B4-90C3-172348597514}"/>
+                <a16:creationId xmlns:a16="http://schemas.microsoft.com/office/drawing/2014/main" id="{8DB9A505-308E-4877-A2D0-2CBB995A7256}"/>
               </a:ext>
             </a:extLst>
           </p:cNvPr>
@@ -20897,7 +20918,7 @@
           <p:cNvPr id="13" name="p06-table-r1-1">
             <a:extLst xmlns:a="http://schemas.openxmlformats.org/drawingml/2006/main">
               <a:ext uri="{FF2B5EF4-FFF2-40B4-BE49-F238E27FC236}">
-                <a16:creationId xmlns:a16="http://schemas.microsoft.com/office/drawing/2014/main" id="{6A112E4F-2D5F-4DBE-9C1F-DE64803D1F70}"/>
+                <a16:creationId xmlns:a16="http://schemas.microsoft.com/office/drawing/2014/main" id="{6D3C2B7F-F94C-41A9-949B-04537E062C9F}"/>
               </a:ext>
             </a:extLst>
           </p:cNvPr>
@@ -20958,7 +20979,7 @@
           <p:cNvPr id="14" name="p06-table-r1-2">
             <a:extLst xmlns:a="http://schemas.openxmlformats.org/drawingml/2006/main">
               <a:ext uri="{FF2B5EF4-FFF2-40B4-BE49-F238E27FC236}">
-                <a16:creationId xmlns:a16="http://schemas.microsoft.com/office/drawing/2014/main" id="{F2CDAA39-E5F9-4A51-AE3F-8C57C1BC04AF}"/>
+                <a16:creationId xmlns:a16="http://schemas.microsoft.com/office/drawing/2014/main" id="{1EF15142-C37C-41E1-8676-173E182E1EE0}"/>
               </a:ext>
             </a:extLst>
           </p:cNvPr>
@@ -21019,7 +21040,7 @@
           <p:cNvPr id="15" name="p06-table-r2-0">
             <a:extLst xmlns:a="http://schemas.openxmlformats.org/drawingml/2006/main">
               <a:ext uri="{FF2B5EF4-FFF2-40B4-BE49-F238E27FC236}">
-                <a16:creationId xmlns:a16="http://schemas.microsoft.com/office/drawing/2014/main" id="{F99EACE3-0CBB-484C-907A-6D12FAD5397D}"/>
+                <a16:creationId xmlns:a16="http://schemas.microsoft.com/office/drawing/2014/main" id="{DEC8002D-5DC0-4A61-AB69-045D43BBBB20}"/>
               </a:ext>
             </a:extLst>
           </p:cNvPr>
@@ -21080,7 +21101,7 @@
           <p:cNvPr id="16" name="p06-table-r2-1">
             <a:extLst xmlns:a="http://schemas.openxmlformats.org/drawingml/2006/main">
               <a:ext uri="{FF2B5EF4-FFF2-40B4-BE49-F238E27FC236}">
-                <a16:creationId xmlns:a16="http://schemas.microsoft.com/office/drawing/2014/main" id="{1CA958D4-1F15-4CE6-9601-9AAF100FB629}"/>
+                <a16:creationId xmlns:a16="http://schemas.microsoft.com/office/drawing/2014/main" id="{F3B93E20-21D7-4406-9D3B-27C1C420ABB4}"/>
               </a:ext>
             </a:extLst>
           </p:cNvPr>
@@ -21141,7 +21162,7 @@
           <p:cNvPr id="17" name="p06-table-r2-2">
             <a:extLst xmlns:a="http://schemas.openxmlformats.org/drawingml/2006/main">
               <a:ext uri="{FF2B5EF4-FFF2-40B4-BE49-F238E27FC236}">
-                <a16:creationId xmlns:a16="http://schemas.microsoft.com/office/drawing/2014/main" id="{529DFC5F-8982-452E-AC8B-94723EBA64D5}"/>
+                <a16:creationId xmlns:a16="http://schemas.microsoft.com/office/drawing/2014/main" id="{BA466560-CF34-430D-9712-71EFAEC28A59}"/>
               </a:ext>
             </a:extLst>
           </p:cNvPr>
@@ -21202,7 +21223,7 @@
           <p:cNvPr id="18" name="p06-table-r3-0">
             <a:extLst xmlns:a="http://schemas.openxmlformats.org/drawingml/2006/main">
               <a:ext uri="{FF2B5EF4-FFF2-40B4-BE49-F238E27FC236}">
-                <a16:creationId xmlns:a16="http://schemas.microsoft.com/office/drawing/2014/main" id="{E5AEDF72-18D2-4A91-8BE3-D77799909627}"/>
+                <a16:creationId xmlns:a16="http://schemas.microsoft.com/office/drawing/2014/main" id="{09E0095B-15B3-4804-8855-7410E767043D}"/>
               </a:ext>
             </a:extLst>
           </p:cNvPr>
@@ -21263,7 +21284,7 @@
           <p:cNvPr id="19" name="p06-table-r3-1">
             <a:extLst xmlns:a="http://schemas.openxmlformats.org/drawingml/2006/main">
               <a:ext uri="{FF2B5EF4-FFF2-40B4-BE49-F238E27FC236}">
-                <a16:creationId xmlns:a16="http://schemas.microsoft.com/office/drawing/2014/main" id="{066A8EA8-BC00-463D-AF8E-8AB24044E162}"/>
+                <a16:creationId xmlns:a16="http://schemas.microsoft.com/office/drawing/2014/main" id="{57468FAD-2858-4C61-8CF6-F51A49EEFDCA}"/>
               </a:ext>
             </a:extLst>
           </p:cNvPr>
@@ -21324,7 +21345,7 @@
           <p:cNvPr id="20" name="p06-table-r3-2">
             <a:extLst xmlns:a="http://schemas.openxmlformats.org/drawingml/2006/main">
               <a:ext uri="{FF2B5EF4-FFF2-40B4-BE49-F238E27FC236}">
-                <a16:creationId xmlns:a16="http://schemas.microsoft.com/office/drawing/2014/main" id="{DF6F25F4-07AE-460E-A2A9-A26139069590}"/>
+                <a16:creationId xmlns:a16="http://schemas.microsoft.com/office/drawing/2014/main" id="{0A202907-5377-4F6F-93EF-AD9ECD0C196A}"/>
               </a:ext>
             </a:extLst>
           </p:cNvPr>
@@ -21385,7 +21406,7 @@
           <p:cNvPr id="21" name="p06-table-r4-0">
             <a:extLst xmlns:a="http://schemas.openxmlformats.org/drawingml/2006/main">
               <a:ext uri="{FF2B5EF4-FFF2-40B4-BE49-F238E27FC236}">
-                <a16:creationId xmlns:a16="http://schemas.microsoft.com/office/drawing/2014/main" id="{E6DEBD74-FF9F-4115-B9F3-5C18876441D3}"/>
+                <a16:creationId xmlns:a16="http://schemas.microsoft.com/office/drawing/2014/main" id="{F1C6A195-50BF-4B00-8978-B7AFBBE09198}"/>
               </a:ext>
             </a:extLst>
           </p:cNvPr>
@@ -21446,7 +21467,7 @@
           <p:cNvPr id="22" name="p06-table-r4-1">
             <a:extLst xmlns:a="http://schemas.openxmlformats.org/drawingml/2006/main">
               <a:ext uri="{FF2B5EF4-FFF2-40B4-BE49-F238E27FC236}">
-                <a16:creationId xmlns:a16="http://schemas.microsoft.com/office/drawing/2014/main" id="{C5CFAF2A-8BEE-412F-AE4D-6386D1F5E21B}"/>
+                <a16:creationId xmlns:a16="http://schemas.microsoft.com/office/drawing/2014/main" id="{32DC0C3A-EB34-4881-8A96-B45EA6E3797D}"/>
               </a:ext>
             </a:extLst>
           </p:cNvPr>
@@ -21507,7 +21528,7 @@
           <p:cNvPr id="23" name="p06-table-r4-2">
             <a:extLst xmlns:a="http://schemas.openxmlformats.org/drawingml/2006/main">
               <a:ext uri="{FF2B5EF4-FFF2-40B4-BE49-F238E27FC236}">
-                <a16:creationId xmlns:a16="http://schemas.microsoft.com/office/drawing/2014/main" id="{D5D65DD6-D02F-45F0-AF6B-29925AC9E2A8}"/>
+                <a16:creationId xmlns:a16="http://schemas.microsoft.com/office/drawing/2014/main" id="{B27F7246-3760-4F1C-9F6D-68C0CF5C71FF}"/>
               </a:ext>
             </a:extLst>
           </p:cNvPr>
@@ -21568,7 +21589,7 @@
           <p:cNvPr id="24" name="p06-bottom">
             <a:extLst xmlns:a="http://schemas.openxmlformats.org/drawingml/2006/main">
               <a:ext uri="{FF2B5EF4-FFF2-40B4-BE49-F238E27FC236}">
-                <a16:creationId xmlns:a16="http://schemas.microsoft.com/office/drawing/2014/main" id="{1FD722C1-0852-49CD-8951-D25285155E12}"/>
+                <a16:creationId xmlns:a16="http://schemas.microsoft.com/office/drawing/2014/main" id="{3E264FD3-8314-461E-91B7-F5D677C4B800}"/>
               </a:ext>
             </a:extLst>
           </p:cNvPr>
@@ -21717,7 +21738,7 @@
           <p:cNvPr id="6" name="p07-watermark">
             <a:extLst xmlns:a="http://schemas.openxmlformats.org/drawingml/2006/main">
               <a:ext uri="{FF2B5EF4-FFF2-40B4-BE49-F238E27FC236}">
-                <a16:creationId xmlns:a16="http://schemas.microsoft.com/office/drawing/2014/main" id="{84B93B58-324B-46A2-B5F3-5981F1D0AA01}"/>
+                <a16:creationId xmlns:a16="http://schemas.microsoft.com/office/drawing/2014/main" id="{C1331B18-5E05-4852-AFF1-BB00A96D7D3F}"/>
               </a:ext>
             </a:extLst>
           </p:cNvPr>
@@ -21745,14 +21766,14 @@
           <a:lstStyle xmlns:a="http://schemas.openxmlformats.org/drawingml/2006/main"/>
           <a:p xmlns:a="http://schemas.openxmlformats.org/drawingml/2006/main">
             <a:pPr algn="r">
-              <a:defRPr sz="1125" b="1">
+              <a:defRPr sz="1350" b="1">
                 <a:solidFill>
                   <a:srgbClr val="C8161E"/>
                 </a:solidFill>
               </a:defRPr>
             </a:pPr>
             <a:r>
-              <a:rPr sz="1125" b="1">
+              <a:rPr sz="1350" b="1">
                 <a:solidFill>
                   <a:srgbClr val="C8161E"/>
                 </a:solidFill>
@@ -21770,7 +21791,7 @@
           <p:cNvPr id="7" name="p07-claim">
             <a:extLst xmlns:a="http://schemas.openxmlformats.org/drawingml/2006/main">
               <a:ext uri="{FF2B5EF4-FFF2-40B4-BE49-F238E27FC236}">
-                <a16:creationId xmlns:a16="http://schemas.microsoft.com/office/drawing/2014/main" id="{5B80FC82-8849-44CA-94B6-C393848E75F4}"/>
+                <a16:creationId xmlns:a16="http://schemas.microsoft.com/office/drawing/2014/main" id="{D47E0A9F-340E-420D-A681-D1400A9F3780}"/>
               </a:ext>
             </a:extLst>
           </p:cNvPr>
@@ -21831,7 +21852,7 @@
           <p:cNvPr id="8" name="p07-question">
             <a:extLst xmlns:a="http://schemas.openxmlformats.org/drawingml/2006/main">
               <a:ext uri="{FF2B5EF4-FFF2-40B4-BE49-F238E27FC236}">
-                <a16:creationId xmlns:a16="http://schemas.microsoft.com/office/drawing/2014/main" id="{145B6087-BA28-4029-B7DA-2FF147D26FDC}"/>
+                <a16:creationId xmlns:a16="http://schemas.microsoft.com/office/drawing/2014/main" id="{B8E93CFC-A9ED-4E7B-947A-77CB6ACA79C3}"/>
               </a:ext>
             </a:extLst>
           </p:cNvPr>
@@ -21884,7 +21905,7 @@
           <p:cNvPr id="9" name="p07-judgment">
             <a:extLst xmlns:a="http://schemas.openxmlformats.org/drawingml/2006/main">
               <a:ext uri="{FF2B5EF4-FFF2-40B4-BE49-F238E27FC236}">
-                <a16:creationId xmlns:a16="http://schemas.microsoft.com/office/drawing/2014/main" id="{A9EBBF98-2558-489B-98AC-D58DDC568A8F}"/>
+                <a16:creationId xmlns:a16="http://schemas.microsoft.com/office/drawing/2014/main" id="{8C3254B5-A091-4106-B406-725DB8BF1F0D}"/>
               </a:ext>
             </a:extLst>
           </p:cNvPr>
@@ -21939,7 +21960,7 @@
           <p:cNvPr id="10" name="p07-n-0">
             <a:extLst xmlns:a="http://schemas.openxmlformats.org/drawingml/2006/main">
               <a:ext uri="{FF2B5EF4-FFF2-40B4-BE49-F238E27FC236}">
-                <a16:creationId xmlns:a16="http://schemas.microsoft.com/office/drawing/2014/main" id="{4BF09B79-0CA9-44C9-A3A7-7F202A4CA803}"/>
+                <a16:creationId xmlns:a16="http://schemas.microsoft.com/office/drawing/2014/main" id="{907E3005-2465-4416-A4FA-035DAF272EDF}"/>
               </a:ext>
             </a:extLst>
           </p:cNvPr>
@@ -21996,7 +22017,7 @@
           <p:cNvPr id="11" name="p07-m-0">
             <a:extLst xmlns:a="http://schemas.openxmlformats.org/drawingml/2006/main">
               <a:ext uri="{FF2B5EF4-FFF2-40B4-BE49-F238E27FC236}">
-                <a16:creationId xmlns:a16="http://schemas.microsoft.com/office/drawing/2014/main" id="{73BE2D73-128A-4C58-B8F4-379ECF105EFF}"/>
+                <a16:creationId xmlns:a16="http://schemas.microsoft.com/office/drawing/2014/main" id="{794AFECF-4599-4B04-B62E-9358969C84DD}"/>
               </a:ext>
             </a:extLst>
           </p:cNvPr>
@@ -22051,7 +22072,7 @@
           <p:cNvPr id="12" name="p07-n-1">
             <a:extLst xmlns:a="http://schemas.openxmlformats.org/drawingml/2006/main">
               <a:ext uri="{FF2B5EF4-FFF2-40B4-BE49-F238E27FC236}">
-                <a16:creationId xmlns:a16="http://schemas.microsoft.com/office/drawing/2014/main" id="{4FDF9587-3EFF-4F17-8A34-49E5E2053213}"/>
+                <a16:creationId xmlns:a16="http://schemas.microsoft.com/office/drawing/2014/main" id="{01C11D9B-5B73-44DD-89A4-40335D0CAC18}"/>
               </a:ext>
             </a:extLst>
           </p:cNvPr>
@@ -22108,7 +22129,7 @@
           <p:cNvPr id="13" name="p07-m-1">
             <a:extLst xmlns:a="http://schemas.openxmlformats.org/drawingml/2006/main">
               <a:ext uri="{FF2B5EF4-FFF2-40B4-BE49-F238E27FC236}">
-                <a16:creationId xmlns:a16="http://schemas.microsoft.com/office/drawing/2014/main" id="{AD83CD28-2691-4DEB-9F66-B37761B9AEE7}"/>
+                <a16:creationId xmlns:a16="http://schemas.microsoft.com/office/drawing/2014/main" id="{E562DE7B-D963-4B0B-BC67-8DE20450A325}"/>
               </a:ext>
             </a:extLst>
           </p:cNvPr>
@@ -22163,7 +22184,7 @@
           <p:cNvPr id="14" name="p07-n-2">
             <a:extLst xmlns:a="http://schemas.openxmlformats.org/drawingml/2006/main">
               <a:ext uri="{FF2B5EF4-FFF2-40B4-BE49-F238E27FC236}">
-                <a16:creationId xmlns:a16="http://schemas.microsoft.com/office/drawing/2014/main" id="{A0A0F471-99B8-428D-8625-57D16BF3018E}"/>
+                <a16:creationId xmlns:a16="http://schemas.microsoft.com/office/drawing/2014/main" id="{E1C0A4EC-0AD0-465A-8762-15D774B8A5E2}"/>
               </a:ext>
             </a:extLst>
           </p:cNvPr>
@@ -22220,7 +22241,7 @@
           <p:cNvPr id="15" name="p07-m-2">
             <a:extLst xmlns:a="http://schemas.openxmlformats.org/drawingml/2006/main">
               <a:ext uri="{FF2B5EF4-FFF2-40B4-BE49-F238E27FC236}">
-                <a16:creationId xmlns:a16="http://schemas.microsoft.com/office/drawing/2014/main" id="{3FE69235-21A7-4281-B0D5-B4BD90A849F8}"/>
+                <a16:creationId xmlns:a16="http://schemas.microsoft.com/office/drawing/2014/main" id="{D5AEDC31-F8CB-4DE6-9A65-BBB97F11847D}"/>
               </a:ext>
             </a:extLst>
           </p:cNvPr>
@@ -22275,7 +22296,7 @@
           <p:cNvPr id="16" name="p07-n-3">
             <a:extLst xmlns:a="http://schemas.openxmlformats.org/drawingml/2006/main">
               <a:ext uri="{FF2B5EF4-FFF2-40B4-BE49-F238E27FC236}">
-                <a16:creationId xmlns:a16="http://schemas.microsoft.com/office/drawing/2014/main" id="{9445F247-562B-4717-AF8E-98E5ACCE6E06}"/>
+                <a16:creationId xmlns:a16="http://schemas.microsoft.com/office/drawing/2014/main" id="{EC5446E6-C508-4F07-B5D1-30BBA5BBFD87}"/>
               </a:ext>
             </a:extLst>
           </p:cNvPr>
@@ -22332,7 +22353,7 @@
           <p:cNvPr id="17" name="p07-m-3">
             <a:extLst xmlns:a="http://schemas.openxmlformats.org/drawingml/2006/main">
               <a:ext uri="{FF2B5EF4-FFF2-40B4-BE49-F238E27FC236}">
-                <a16:creationId xmlns:a16="http://schemas.microsoft.com/office/drawing/2014/main" id="{26C7E97E-F2F5-46E9-B36A-E0C5D6A89972}"/>
+                <a16:creationId xmlns:a16="http://schemas.microsoft.com/office/drawing/2014/main" id="{1B59A632-F9EA-4B27-B5BB-21F47D8967E5}"/>
               </a:ext>
             </a:extLst>
           </p:cNvPr>
@@ -22387,7 +22408,7 @@
           <p:cNvPr id="18" name="p07-n-4">
             <a:extLst xmlns:a="http://schemas.openxmlformats.org/drawingml/2006/main">
               <a:ext uri="{FF2B5EF4-FFF2-40B4-BE49-F238E27FC236}">
-                <a16:creationId xmlns:a16="http://schemas.microsoft.com/office/drawing/2014/main" id="{ED72D0FC-B4EB-4EF9-9595-3E8BF53EF377}"/>
+                <a16:creationId xmlns:a16="http://schemas.microsoft.com/office/drawing/2014/main" id="{3E91F92A-F8B8-43E0-9702-0C5DF2E820DB}"/>
               </a:ext>
             </a:extLst>
           </p:cNvPr>
@@ -22444,7 +22465,7 @@
           <p:cNvPr id="19" name="p07-m-4">
             <a:extLst xmlns:a="http://schemas.openxmlformats.org/drawingml/2006/main">
               <a:ext uri="{FF2B5EF4-FFF2-40B4-BE49-F238E27FC236}">
-                <a16:creationId xmlns:a16="http://schemas.microsoft.com/office/drawing/2014/main" id="{02EBC3C0-1E8B-4F9E-83F6-29E3D18C8807}"/>
+                <a16:creationId xmlns:a16="http://schemas.microsoft.com/office/drawing/2014/main" id="{B3CB04DE-6C90-47F8-B663-1E12C2E48627}"/>
               </a:ext>
             </a:extLst>
           </p:cNvPr>
@@ -22499,7 +22520,7 @@
           <p:cNvPr id="20" name="p07-n-5">
             <a:extLst xmlns:a="http://schemas.openxmlformats.org/drawingml/2006/main">
               <a:ext uri="{FF2B5EF4-FFF2-40B4-BE49-F238E27FC236}">
-                <a16:creationId xmlns:a16="http://schemas.microsoft.com/office/drawing/2014/main" id="{8D4D2814-BEE5-4C70-98FF-79B87C1801D5}"/>
+                <a16:creationId xmlns:a16="http://schemas.microsoft.com/office/drawing/2014/main" id="{376E08D8-7129-4ACF-979F-4BC7654BBD33}"/>
               </a:ext>
             </a:extLst>
           </p:cNvPr>
@@ -22556,7 +22577,7 @@
           <p:cNvPr id="21" name="p07-m-5">
             <a:extLst xmlns:a="http://schemas.openxmlformats.org/drawingml/2006/main">
               <a:ext uri="{FF2B5EF4-FFF2-40B4-BE49-F238E27FC236}">
-                <a16:creationId xmlns:a16="http://schemas.microsoft.com/office/drawing/2014/main" id="{3B1ECB19-8175-4977-9998-8760320121E2}"/>
+                <a16:creationId xmlns:a16="http://schemas.microsoft.com/office/drawing/2014/main" id="{A8E52AAA-B64B-4392-BE7E-C9CDA0B97E70}"/>
               </a:ext>
             </a:extLst>
           </p:cNvPr>
@@ -22611,7 +22632,7 @@
           <p:cNvPr id="22" name="p07-n-6">
             <a:extLst xmlns:a="http://schemas.openxmlformats.org/drawingml/2006/main">
               <a:ext uri="{FF2B5EF4-FFF2-40B4-BE49-F238E27FC236}">
-                <a16:creationId xmlns:a16="http://schemas.microsoft.com/office/drawing/2014/main" id="{7C878B2F-3BAF-4A27-AAAC-90AB7858DAAD}"/>
+                <a16:creationId xmlns:a16="http://schemas.microsoft.com/office/drawing/2014/main" id="{83254B64-89B7-4822-914D-63125A243A29}"/>
               </a:ext>
             </a:extLst>
           </p:cNvPr>
@@ -22668,7 +22689,7 @@
           <p:cNvPr id="23" name="p07-m-6">
             <a:extLst xmlns:a="http://schemas.openxmlformats.org/drawingml/2006/main">
               <a:ext uri="{FF2B5EF4-FFF2-40B4-BE49-F238E27FC236}">
-                <a16:creationId xmlns:a16="http://schemas.microsoft.com/office/drawing/2014/main" id="{C6735BE1-417E-4FAC-90DB-02DC787F8F73}"/>
+                <a16:creationId xmlns:a16="http://schemas.microsoft.com/office/drawing/2014/main" id="{DFD244BE-99B7-4F00-890C-4FD2A2AE0E9B}"/>
               </a:ext>
             </a:extLst>
           </p:cNvPr>
@@ -22723,7 +22744,7 @@
           <p:cNvPr id="24" name="p07-bottom">
             <a:extLst xmlns:a="http://schemas.openxmlformats.org/drawingml/2006/main">
               <a:ext uri="{FF2B5EF4-FFF2-40B4-BE49-F238E27FC236}">
-                <a16:creationId xmlns:a16="http://schemas.microsoft.com/office/drawing/2014/main" id="{FB8894A9-2085-49FC-AFB4-EE00CA75E591}"/>
+                <a16:creationId xmlns:a16="http://schemas.microsoft.com/office/drawing/2014/main" id="{28D95A17-7ED6-49F0-8532-09113615200E}"/>
               </a:ext>
             </a:extLst>
           </p:cNvPr>
@@ -22870,7 +22891,7 @@
           <p:cNvPr id="6" name="p08-table-h-0">
             <a:extLst xmlns:a="http://schemas.openxmlformats.org/drawingml/2006/main">
               <a:ext uri="{FF2B5EF4-FFF2-40B4-BE49-F238E27FC236}">
-                <a16:creationId xmlns:a16="http://schemas.microsoft.com/office/drawing/2014/main" id="{66BA173B-50CA-4003-95B3-AB7821F94E3C}"/>
+                <a16:creationId xmlns:a16="http://schemas.microsoft.com/office/drawing/2014/main" id="{BA781C06-51B5-4CC7-81FF-D6605EB77131}"/>
               </a:ext>
             </a:extLst>
           </p:cNvPr>
@@ -22925,7 +22946,7 @@
           <p:cNvPr id="7" name="p08-table-h-1">
             <a:extLst xmlns:a="http://schemas.openxmlformats.org/drawingml/2006/main">
               <a:ext uri="{FF2B5EF4-FFF2-40B4-BE49-F238E27FC236}">
-                <a16:creationId xmlns:a16="http://schemas.microsoft.com/office/drawing/2014/main" id="{90D5E8DF-1977-4C27-A37A-F90B4E471BE6}"/>
+                <a16:creationId xmlns:a16="http://schemas.microsoft.com/office/drawing/2014/main" id="{5B88325E-89EA-4391-B19F-D9A3B9CCF04B}"/>
               </a:ext>
             </a:extLst>
           </p:cNvPr>
@@ -22980,7 +23001,7 @@
           <p:cNvPr id="8" name="p08-table-r0-0">
             <a:extLst xmlns:a="http://schemas.openxmlformats.org/drawingml/2006/main">
               <a:ext uri="{FF2B5EF4-FFF2-40B4-BE49-F238E27FC236}">
-                <a16:creationId xmlns:a16="http://schemas.microsoft.com/office/drawing/2014/main" id="{2796BB43-0A1F-4995-9242-67C8F4EC0220}"/>
+                <a16:creationId xmlns:a16="http://schemas.microsoft.com/office/drawing/2014/main" id="{C36364A1-14A9-4BF5-8424-483758063744}"/>
               </a:ext>
             </a:extLst>
           </p:cNvPr>
@@ -23041,7 +23062,7 @@
           <p:cNvPr id="9" name="p08-table-r0-1">
             <a:extLst xmlns:a="http://schemas.openxmlformats.org/drawingml/2006/main">
               <a:ext uri="{FF2B5EF4-FFF2-40B4-BE49-F238E27FC236}">
-                <a16:creationId xmlns:a16="http://schemas.microsoft.com/office/drawing/2014/main" id="{B5429897-FF15-48FD-B562-388A8D10EE7F}"/>
+                <a16:creationId xmlns:a16="http://schemas.microsoft.com/office/drawing/2014/main" id="{17CD3342-1CDB-48AA-9E73-51E85E969788}"/>
               </a:ext>
             </a:extLst>
           </p:cNvPr>
@@ -23102,7 +23123,7 @@
           <p:cNvPr id="10" name="p08-table-r1-0">
             <a:extLst xmlns:a="http://schemas.openxmlformats.org/drawingml/2006/main">
               <a:ext uri="{FF2B5EF4-FFF2-40B4-BE49-F238E27FC236}">
-                <a16:creationId xmlns:a16="http://schemas.microsoft.com/office/drawing/2014/main" id="{30E22E3E-62F9-42AF-AB9A-7C92027B55A9}"/>
+                <a16:creationId xmlns:a16="http://schemas.microsoft.com/office/drawing/2014/main" id="{4E26E419-88F7-47D8-9D2D-FFF88F4C30C1}"/>
               </a:ext>
             </a:extLst>
           </p:cNvPr>
@@ -23163,7 +23184,7 @@
           <p:cNvPr id="11" name="p08-table-r1-1">
             <a:extLst xmlns:a="http://schemas.openxmlformats.org/drawingml/2006/main">
               <a:ext uri="{FF2B5EF4-FFF2-40B4-BE49-F238E27FC236}">
-                <a16:creationId xmlns:a16="http://schemas.microsoft.com/office/drawing/2014/main" id="{87F00992-2F68-43EA-8731-F45F9187761B}"/>
+                <a16:creationId xmlns:a16="http://schemas.microsoft.com/office/drawing/2014/main" id="{FBF3F12D-3876-4C84-84AC-EBF5F56E2D48}"/>
               </a:ext>
             </a:extLst>
           </p:cNvPr>
@@ -23224,7 +23245,7 @@
           <p:cNvPr id="12" name="p08-table-r2-0">
             <a:extLst xmlns:a="http://schemas.openxmlformats.org/drawingml/2006/main">
               <a:ext uri="{FF2B5EF4-FFF2-40B4-BE49-F238E27FC236}">
-                <a16:creationId xmlns:a16="http://schemas.microsoft.com/office/drawing/2014/main" id="{3E11D883-F6B7-4BD1-BEC7-38C7A35A48D7}"/>
+                <a16:creationId xmlns:a16="http://schemas.microsoft.com/office/drawing/2014/main" id="{EDFCCC34-C8A6-4314-9637-8CEF2FB5AC29}"/>
               </a:ext>
             </a:extLst>
           </p:cNvPr>
@@ -23285,7 +23306,7 @@
           <p:cNvPr id="13" name="p08-table-r2-1">
             <a:extLst xmlns:a="http://schemas.openxmlformats.org/drawingml/2006/main">
               <a:ext uri="{FF2B5EF4-FFF2-40B4-BE49-F238E27FC236}">
-                <a16:creationId xmlns:a16="http://schemas.microsoft.com/office/drawing/2014/main" id="{57E67F7F-F0FE-4E88-A765-0C50A47850A8}"/>
+                <a16:creationId xmlns:a16="http://schemas.microsoft.com/office/drawing/2014/main" id="{CC467191-740B-42F2-861C-048852E5DF1F}"/>
               </a:ext>
             </a:extLst>
           </p:cNvPr>
@@ -23346,7 +23367,7 @@
           <p:cNvPr id="14" name="p08-table-r3-0">
             <a:extLst xmlns:a="http://schemas.openxmlformats.org/drawingml/2006/main">
               <a:ext uri="{FF2B5EF4-FFF2-40B4-BE49-F238E27FC236}">
-                <a16:creationId xmlns:a16="http://schemas.microsoft.com/office/drawing/2014/main" id="{2CD95061-35FD-4F33-989E-6385E86F54E2}"/>
+                <a16:creationId xmlns:a16="http://schemas.microsoft.com/office/drawing/2014/main" id="{0A8933E1-4F2E-4924-80C8-421954473F5A}"/>
               </a:ext>
             </a:extLst>
           </p:cNvPr>
@@ -23407,7 +23428,7 @@
           <p:cNvPr id="15" name="p08-table-r3-1">
             <a:extLst xmlns:a="http://schemas.openxmlformats.org/drawingml/2006/main">
               <a:ext uri="{FF2B5EF4-FFF2-40B4-BE49-F238E27FC236}">
-                <a16:creationId xmlns:a16="http://schemas.microsoft.com/office/drawing/2014/main" id="{9240B3F3-D6EE-4EA5-9BF9-DBBFB8CDE76E}"/>
+                <a16:creationId xmlns:a16="http://schemas.microsoft.com/office/drawing/2014/main" id="{5E2F8D6B-D476-48CF-B314-76DBCCEFB62A}"/>
               </a:ext>
             </a:extLst>
           </p:cNvPr>
@@ -23468,7 +23489,7 @@
           <p:cNvPr id="16" name="p08-table-r4-0">
             <a:extLst xmlns:a="http://schemas.openxmlformats.org/drawingml/2006/main">
               <a:ext uri="{FF2B5EF4-FFF2-40B4-BE49-F238E27FC236}">
-                <a16:creationId xmlns:a16="http://schemas.microsoft.com/office/drawing/2014/main" id="{05C08EE5-0260-418A-ABF1-DF5DAF24E89E}"/>
+                <a16:creationId xmlns:a16="http://schemas.microsoft.com/office/drawing/2014/main" id="{2E24A04B-99F5-48FD-8C1C-E9450DAE8224}"/>
               </a:ext>
             </a:extLst>
           </p:cNvPr>
@@ -23529,7 +23550,7 @@
           <p:cNvPr id="17" name="p08-table-r4-1">
             <a:extLst xmlns:a="http://schemas.openxmlformats.org/drawingml/2006/main">
               <a:ext uri="{FF2B5EF4-FFF2-40B4-BE49-F238E27FC236}">
-                <a16:creationId xmlns:a16="http://schemas.microsoft.com/office/drawing/2014/main" id="{1571109C-6BC9-472B-9BDC-ACA47312F433}"/>
+                <a16:creationId xmlns:a16="http://schemas.microsoft.com/office/drawing/2014/main" id="{0CF764A4-22F9-46A9-8DCF-3E4542941CF0}"/>
               </a:ext>
             </a:extLst>
           </p:cNvPr>
@@ -23590,7 +23611,7 @@
           <p:cNvPr id="18" name="p08-table-r5-0">
             <a:extLst xmlns:a="http://schemas.openxmlformats.org/drawingml/2006/main">
               <a:ext uri="{FF2B5EF4-FFF2-40B4-BE49-F238E27FC236}">
-                <a16:creationId xmlns:a16="http://schemas.microsoft.com/office/drawing/2014/main" id="{865D3C49-80AD-4407-90DB-5A9E05895555}"/>
+                <a16:creationId xmlns:a16="http://schemas.microsoft.com/office/drawing/2014/main" id="{2E6812A4-1C71-4C4E-AC69-8F98009C497D}"/>
               </a:ext>
             </a:extLst>
           </p:cNvPr>
@@ -23651,7 +23672,7 @@
           <p:cNvPr id="19" name="p08-table-r5-1">
             <a:extLst xmlns:a="http://schemas.openxmlformats.org/drawingml/2006/main">
               <a:ext uri="{FF2B5EF4-FFF2-40B4-BE49-F238E27FC236}">
-                <a16:creationId xmlns:a16="http://schemas.microsoft.com/office/drawing/2014/main" id="{1F741817-54F5-493F-9302-CF9D158B6897}"/>
+                <a16:creationId xmlns:a16="http://schemas.microsoft.com/office/drawing/2014/main" id="{72CA9ED3-27B3-4515-8A78-AE98761F21FF}"/>
               </a:ext>
             </a:extLst>
           </p:cNvPr>
@@ -23712,7 +23733,7 @@
           <p:cNvPr id="20" name="p08-table-r6-0">
             <a:extLst xmlns:a="http://schemas.openxmlformats.org/drawingml/2006/main">
               <a:ext uri="{FF2B5EF4-FFF2-40B4-BE49-F238E27FC236}">
-                <a16:creationId xmlns:a16="http://schemas.microsoft.com/office/drawing/2014/main" id="{1D4CEC7D-E165-489C-9A1A-ED10D50D87CA}"/>
+                <a16:creationId xmlns:a16="http://schemas.microsoft.com/office/drawing/2014/main" id="{D915C28E-002D-491F-94AB-BDE29CCCF040}"/>
               </a:ext>
             </a:extLst>
           </p:cNvPr>
@@ -23773,7 +23794,7 @@
           <p:cNvPr id="21" name="p08-table-r6-1">
             <a:extLst xmlns:a="http://schemas.openxmlformats.org/drawingml/2006/main">
               <a:ext uri="{FF2B5EF4-FFF2-40B4-BE49-F238E27FC236}">
-                <a16:creationId xmlns:a16="http://schemas.microsoft.com/office/drawing/2014/main" id="{6801F6C5-0D18-45FB-9917-E81C11BA2A15}"/>
+                <a16:creationId xmlns:a16="http://schemas.microsoft.com/office/drawing/2014/main" id="{07B4E0F5-F7C3-407D-8E6C-D846B59DF35A}"/>
               </a:ext>
             </a:extLst>
           </p:cNvPr>
@@ -23834,7 +23855,7 @@
           <p:cNvPr id="22" name="p08-bottom">
             <a:extLst xmlns:a="http://schemas.openxmlformats.org/drawingml/2006/main">
               <a:ext uri="{FF2B5EF4-FFF2-40B4-BE49-F238E27FC236}">
-                <a16:creationId xmlns:a16="http://schemas.microsoft.com/office/drawing/2014/main" id="{9B3D38A7-48A8-4057-BBEA-8FD19C05D327}"/>
+                <a16:creationId xmlns:a16="http://schemas.microsoft.com/office/drawing/2014/main" id="{0763C646-A44F-47E4-BFFF-99BE717F2733}"/>
               </a:ext>
             </a:extLst>
           </p:cNvPr>
@@ -23877,7 +23898,7 @@
                 <a:ea typeface="Microsoft YaHei"/>
                 <a:cs typeface="Microsoft YaHei"/>
               </a:rPr>
-              <a:t>度量要写计算口径；种子要写具体值；停止条件要在看结果前写。</a:t>
+              <a:t>虚构教学规格｜度量写口径；种子写具体值；停止条件在看结果前写。</a:t>
             </a:r>
           </a:p>
         </p:txBody>
@@ -23981,7 +24002,7 @@
           <p:cNvPr id="6" name="p09-stop-title">
             <a:extLst xmlns:a="http://schemas.openxmlformats.org/drawingml/2006/main">
               <a:ext uri="{FF2B5EF4-FFF2-40B4-BE49-F238E27FC236}">
-                <a16:creationId xmlns:a16="http://schemas.microsoft.com/office/drawing/2014/main" id="{12948B65-03B7-426D-A54F-7725FD673D1E}"/>
+                <a16:creationId xmlns:a16="http://schemas.microsoft.com/office/drawing/2014/main" id="{6632A25F-F5E6-495D-8AA0-E81C40D455AB}"/>
               </a:ext>
             </a:extLst>
           </p:cNvPr>
@@ -24034,7 +24055,7 @@
           <p:cNvPr id="7" name="p09-stop">
             <a:extLst xmlns:a="http://schemas.openxmlformats.org/drawingml/2006/main">
               <a:ext uri="{FF2B5EF4-FFF2-40B4-BE49-F238E27FC236}">
-                <a16:creationId xmlns:a16="http://schemas.microsoft.com/office/drawing/2014/main" id="{25DC0C6F-CEC2-40D2-9868-21B80A0CF557}"/>
+                <a16:creationId xmlns:a16="http://schemas.microsoft.com/office/drawing/2014/main" id="{10063846-9590-4F35-ADEF-659F1E791E69}"/>
               </a:ext>
             </a:extLst>
           </p:cNvPr>
@@ -24148,7 +24169,7 @@
           <p:cNvPr id="8" name="p09-fail-title">
             <a:extLst xmlns:a="http://schemas.openxmlformats.org/drawingml/2006/main">
               <a:ext uri="{FF2B5EF4-FFF2-40B4-BE49-F238E27FC236}">
-                <a16:creationId xmlns:a16="http://schemas.microsoft.com/office/drawing/2014/main" id="{83DED1BF-38B5-4575-B45E-02EDDD520F5A}"/>
+                <a16:creationId xmlns:a16="http://schemas.microsoft.com/office/drawing/2014/main" id="{C8B25B7D-F11A-4C39-A6ED-96F7460AE336}"/>
               </a:ext>
             </a:extLst>
           </p:cNvPr>
@@ -24201,7 +24222,7 @@
           <p:cNvPr id="9" name="p09-i-0">
             <a:extLst xmlns:a="http://schemas.openxmlformats.org/drawingml/2006/main">
               <a:ext uri="{FF2B5EF4-FFF2-40B4-BE49-F238E27FC236}">
-                <a16:creationId xmlns:a16="http://schemas.microsoft.com/office/drawing/2014/main" id="{4D6C1ED2-7D8E-4558-A4A3-4DB0F778160D}"/>
+                <a16:creationId xmlns:a16="http://schemas.microsoft.com/office/drawing/2014/main" id="{5EFD0915-AE04-463C-A8FC-E9E97D212E78}"/>
               </a:ext>
             </a:extLst>
           </p:cNvPr>
@@ -24233,14 +24254,14 @@
           <a:lstStyle xmlns:a="http://schemas.openxmlformats.org/drawingml/2006/main"/>
           <a:p xmlns:a="http://schemas.openxmlformats.org/drawingml/2006/main">
             <a:pPr algn="ctr">
-              <a:defRPr sz="1275" b="1">
+              <a:defRPr sz="1350" b="1">
                 <a:solidFill>
                   <a:srgbClr val="FFFFFF"/>
                 </a:solidFill>
               </a:defRPr>
             </a:pPr>
             <a:r>
-              <a:rPr sz="1275" b="1">
+              <a:rPr sz="1350" b="1">
                 <a:solidFill>
                   <a:srgbClr val="FFFFFF"/>
                 </a:solidFill>
@@ -24258,7 +24279,7 @@
           <p:cNvPr id="10" name="p09-p-0">
             <a:extLst xmlns:a="http://schemas.openxmlformats.org/drawingml/2006/main">
               <a:ext uri="{FF2B5EF4-FFF2-40B4-BE49-F238E27FC236}">
-                <a16:creationId xmlns:a16="http://schemas.microsoft.com/office/drawing/2014/main" id="{08E72173-3955-4159-818F-0D10CCC4005D}"/>
+                <a16:creationId xmlns:a16="http://schemas.microsoft.com/office/drawing/2014/main" id="{F64E4E72-6C77-4362-A9A9-C8E472CB2DAD}"/>
               </a:ext>
             </a:extLst>
           </p:cNvPr>
@@ -24288,14 +24309,14 @@
           <a:lstStyle xmlns:a="http://schemas.openxmlformats.org/drawingml/2006/main"/>
           <a:p xmlns:a="http://schemas.openxmlformats.org/drawingml/2006/main">
             <a:pPr algn="ctr">
-              <a:defRPr sz="1275" b="1">
+              <a:defRPr sz="1350" b="1">
                 <a:solidFill>
                   <a:srgbClr val="263746"/>
                 </a:solidFill>
               </a:defRPr>
             </a:pPr>
             <a:r>
-              <a:rPr sz="1275" b="1">
+              <a:rPr sz="1350" b="1">
                 <a:solidFill>
                   <a:srgbClr val="263746"/>
                 </a:solidFill>
@@ -24313,7 +24334,7 @@
           <p:cNvPr id="11" name="p09-i-1">
             <a:extLst xmlns:a="http://schemas.openxmlformats.org/drawingml/2006/main">
               <a:ext uri="{FF2B5EF4-FFF2-40B4-BE49-F238E27FC236}">
-                <a16:creationId xmlns:a16="http://schemas.microsoft.com/office/drawing/2014/main" id="{4AC4462A-5489-46D4-9351-84F76A3C56CE}"/>
+                <a16:creationId xmlns:a16="http://schemas.microsoft.com/office/drawing/2014/main" id="{6073FB61-B906-4887-B8E4-25AE7FB501E8}"/>
               </a:ext>
             </a:extLst>
           </p:cNvPr>
@@ -24345,14 +24366,14 @@
           <a:lstStyle xmlns:a="http://schemas.openxmlformats.org/drawingml/2006/main"/>
           <a:p xmlns:a="http://schemas.openxmlformats.org/drawingml/2006/main">
             <a:pPr algn="ctr">
-              <a:defRPr sz="1275" b="1">
+              <a:defRPr sz="1350" b="1">
                 <a:solidFill>
                   <a:srgbClr val="FFFFFF"/>
                 </a:solidFill>
               </a:defRPr>
             </a:pPr>
             <a:r>
-              <a:rPr sz="1275" b="1">
+              <a:rPr sz="1350" b="1">
                 <a:solidFill>
                   <a:srgbClr val="FFFFFF"/>
                 </a:solidFill>
@@ -24370,7 +24391,7 @@
           <p:cNvPr id="12" name="p09-p-1">
             <a:extLst xmlns:a="http://schemas.openxmlformats.org/drawingml/2006/main">
               <a:ext uri="{FF2B5EF4-FFF2-40B4-BE49-F238E27FC236}">
-                <a16:creationId xmlns:a16="http://schemas.microsoft.com/office/drawing/2014/main" id="{5AB31EB0-0101-4825-BACC-00900A856C9C}"/>
+                <a16:creationId xmlns:a16="http://schemas.microsoft.com/office/drawing/2014/main" id="{A8EE072B-90F5-45A3-8D8A-DAEA64E2A602}"/>
               </a:ext>
             </a:extLst>
           </p:cNvPr>
@@ -24400,14 +24421,14 @@
           <a:lstStyle xmlns:a="http://schemas.openxmlformats.org/drawingml/2006/main"/>
           <a:p xmlns:a="http://schemas.openxmlformats.org/drawingml/2006/main">
             <a:pPr algn="ctr">
-              <a:defRPr sz="1275" b="1">
+              <a:defRPr sz="1350" b="1">
                 <a:solidFill>
                   <a:srgbClr val="263746"/>
                 </a:solidFill>
               </a:defRPr>
             </a:pPr>
             <a:r>
-              <a:rPr sz="1275" b="1">
+              <a:rPr sz="1350" b="1">
                 <a:solidFill>
                   <a:srgbClr val="263746"/>
                 </a:solidFill>
@@ -24425,7 +24446,7 @@
           <p:cNvPr id="13" name="p09-i-2">
             <a:extLst xmlns:a="http://schemas.openxmlformats.org/drawingml/2006/main">
               <a:ext uri="{FF2B5EF4-FFF2-40B4-BE49-F238E27FC236}">
-                <a16:creationId xmlns:a16="http://schemas.microsoft.com/office/drawing/2014/main" id="{A52A5083-114B-47AD-8278-AFEE163AEFE1}"/>
+                <a16:creationId xmlns:a16="http://schemas.microsoft.com/office/drawing/2014/main" id="{3A5E2F8A-7B9A-466C-BABF-DCA33786134B}"/>
               </a:ext>
             </a:extLst>
           </p:cNvPr>
@@ -24457,14 +24478,14 @@
           <a:lstStyle xmlns:a="http://schemas.openxmlformats.org/drawingml/2006/main"/>
           <a:p xmlns:a="http://schemas.openxmlformats.org/drawingml/2006/main">
             <a:pPr algn="ctr">
-              <a:defRPr sz="1275" b="1">
+              <a:defRPr sz="1350" b="1">
                 <a:solidFill>
                   <a:srgbClr val="FFFFFF"/>
                 </a:solidFill>
               </a:defRPr>
             </a:pPr>
             <a:r>
-              <a:rPr sz="1275" b="1">
+              <a:rPr sz="1350" b="1">
                 <a:solidFill>
                   <a:srgbClr val="FFFFFF"/>
                 </a:solidFill>
@@ -24482,7 +24503,7 @@
           <p:cNvPr id="14" name="p09-p-2">
             <a:extLst xmlns:a="http://schemas.openxmlformats.org/drawingml/2006/main">
               <a:ext uri="{FF2B5EF4-FFF2-40B4-BE49-F238E27FC236}">
-                <a16:creationId xmlns:a16="http://schemas.microsoft.com/office/drawing/2014/main" id="{76291E2D-6809-4C4C-B892-5193EB8CB231}"/>
+                <a16:creationId xmlns:a16="http://schemas.microsoft.com/office/drawing/2014/main" id="{67177C63-5FFD-4343-80DB-BEBD63C21134}"/>
               </a:ext>
             </a:extLst>
           </p:cNvPr>
@@ -24512,14 +24533,14 @@
           <a:lstStyle xmlns:a="http://schemas.openxmlformats.org/drawingml/2006/main"/>
           <a:p xmlns:a="http://schemas.openxmlformats.org/drawingml/2006/main">
             <a:pPr algn="ctr">
-              <a:defRPr sz="1275" b="1">
+              <a:defRPr sz="1350" b="1">
                 <a:solidFill>
                   <a:srgbClr val="263746"/>
                 </a:solidFill>
               </a:defRPr>
             </a:pPr>
             <a:r>
-              <a:rPr sz="1275" b="1">
+              <a:rPr sz="1350" b="1">
                 <a:solidFill>
                   <a:srgbClr val="263746"/>
                 </a:solidFill>
@@ -24537,7 +24558,7 @@
           <p:cNvPr id="15" name="p09-i-3">
             <a:extLst xmlns:a="http://schemas.openxmlformats.org/drawingml/2006/main">
               <a:ext uri="{FF2B5EF4-FFF2-40B4-BE49-F238E27FC236}">
-                <a16:creationId xmlns:a16="http://schemas.microsoft.com/office/drawing/2014/main" id="{37D338D2-6DA8-416C-B7A0-9ECACED9A077}"/>
+                <a16:creationId xmlns:a16="http://schemas.microsoft.com/office/drawing/2014/main" id="{7F752A57-0E63-4EA8-BC13-BC447B782971}"/>
               </a:ext>
             </a:extLst>
           </p:cNvPr>
@@ -24569,14 +24590,14 @@
           <a:lstStyle xmlns:a="http://schemas.openxmlformats.org/drawingml/2006/main"/>
           <a:p xmlns:a="http://schemas.openxmlformats.org/drawingml/2006/main">
             <a:pPr algn="ctr">
-              <a:defRPr sz="1275" b="1">
+              <a:defRPr sz="1350" b="1">
                 <a:solidFill>
                   <a:srgbClr val="FFFFFF"/>
                 </a:solidFill>
               </a:defRPr>
             </a:pPr>
             <a:r>
-              <a:rPr sz="1275" b="1">
+              <a:rPr sz="1350" b="1">
                 <a:solidFill>
                   <a:srgbClr val="FFFFFF"/>
                 </a:solidFill>
@@ -24594,7 +24615,7 @@
           <p:cNvPr id="16" name="p09-p-3">
             <a:extLst xmlns:a="http://schemas.openxmlformats.org/drawingml/2006/main">
               <a:ext uri="{FF2B5EF4-FFF2-40B4-BE49-F238E27FC236}">
-                <a16:creationId xmlns:a16="http://schemas.microsoft.com/office/drawing/2014/main" id="{FDAC5FD3-AB7A-433D-847C-5757F9CF82B7}"/>
+                <a16:creationId xmlns:a16="http://schemas.microsoft.com/office/drawing/2014/main" id="{C9F52F5D-3537-4A06-AA83-3BC4A7D44385}"/>
               </a:ext>
             </a:extLst>
           </p:cNvPr>
@@ -24624,14 +24645,14 @@
           <a:lstStyle xmlns:a="http://schemas.openxmlformats.org/drawingml/2006/main"/>
           <a:p xmlns:a="http://schemas.openxmlformats.org/drawingml/2006/main">
             <a:pPr algn="ctr">
-              <a:defRPr sz="1275" b="1">
+              <a:defRPr sz="1350" b="1">
                 <a:solidFill>
                   <a:srgbClr val="263746"/>
                 </a:solidFill>
               </a:defRPr>
             </a:pPr>
             <a:r>
-              <a:rPr sz="1275" b="1">
+              <a:rPr sz="1350" b="1">
                 <a:solidFill>
                   <a:srgbClr val="263746"/>
                 </a:solidFill>
@@ -24649,7 +24670,7 @@
           <p:cNvPr id="17" name="p09-bottom">
             <a:extLst xmlns:a="http://schemas.openxmlformats.org/drawingml/2006/main">
               <a:ext uri="{FF2B5EF4-FFF2-40B4-BE49-F238E27FC236}">
-                <a16:creationId xmlns:a16="http://schemas.microsoft.com/office/drawing/2014/main" id="{631A10F9-1880-45AA-BBCD-6BD5CA5C42D2}"/>
+                <a16:creationId xmlns:a16="http://schemas.microsoft.com/office/drawing/2014/main" id="{4624AAF6-9113-45A7-B751-146B3DDDB1E1}"/>
               </a:ext>
             </a:extLst>
           </p:cNvPr>
@@ -24694,7 +24715,7 @@
                 <a:ea typeface="Microsoft YaHei"/>
                 <a:cs typeface="Microsoft YaHei"/>
               </a:rPr>
-              <a:t>失败预案让失败可分析；删除失败记录是学术规范红线。</a:t>
+              <a:t>虚构教学规格｜失败预案让失败可分析；删除失败记录是红线。</a:t>
             </a:r>
           </a:p>
         </p:txBody>
